--- a/docs/pitch-deck-v3.pptx
+++ b/docs/pitch-deck-v3.pptx
@@ -1001,7 +1001,7 @@
           <a:lstStyle/>
           <a:p>
             <a:r>
-              <a:t>We researched this deliberately rather than guessing — the full write-up with citations is filed as GitHub issue #137. Here's the short version, ranked by leverage. The single biggest onboarding unlock is passkey and smart-wallet support: Stellar's native WebAuthn signers, paired with the open-source Passkey Kit and the Foundation's Launchtube fee-sponsorship relay, let a player start with zero seed phrase and zero XLM — sign in with Face ID, done. Second, a SEP-24 anchor integration lets a player fund a wallet with a card right inside our checkout, removing the 'must already own crypto' wall entirely. Third, we want to move item ownership on-chain as Soroban NFTs — today ownership is a database mirror we verify by calling back into a studio's own API; an on-chain NFT makes P2P trading trustless and opens cross-studio secondary markets, which is the strongest 'real Soroban usage at consumer scale' story available. We'll also diversify beyond one demo stablecoin to the real anchor-issued assets already live — USDC, EURC, MoneyGram's MGUSD — support path payments so a player can check out with whatever asset they hold, and migrate our bespoke wallet-auth flow to the SEP-10 standard so we interoperate with the wider wallet ecosystem, not just Freighter. We're planning to fund this roadmap partly through the Stellar Community Fund Build Award — up to $150K in XLM per round — since ecosystem impact is exactly what that program scores for.</a:t>
+              <a:t>We researched this deliberately rather than guessing — the full write-up with citations is filed as GitHub issue #137. Here's the short version, ranked by leverage. The single biggest onboarding unlock is passkey and smart-wallet support: Stellar's native WebAuthn signers, paired with the open-source Passkey Kit and the Foundation's Launchtube fee-sponsorship relay, let a player start with zero seed phrase and zero XLM — sign in with Face ID, done. Second, a SEP-24 anchor integration lets a player fund a wallet with a card right inside our checkout, removing the 'must already own crypto' wall entirely. Third, we want to move item ownership on-chain as Soroban NFTs — today ownership is a database mirror we verify by calling back into a studio's own API; an on-chain NFT makes P2P trading trustless and opens cross-studio secondary markets, the strongest 'real Soroban usage at consumer scale' story available. We'll also diversify beyond one demo stablecoin to the real anchor-issued assets already live — USDC, EURC, MoneyGram's MGUSD — support path payments so a player can check out with whatever asset they hold, and migrate our bespoke wallet-auth flow to the SEP-10 standard so we interoperate with the wider wallet ecosystem, not just Freighter. We plan to fund this roadmap partly through the Stellar Community Fund Build Award — up to $150K in XLM per round — since ecosystem impact is exactly what that program scores for.</a:t>
             </a:r>
           </a:p>
         </p:txBody>
@@ -1071,7 +1071,7 @@
           <a:lstStyle/>
           <a:p>
             <a:r>
-              <a:t>Our go-to-market is deliberately staged, not a simultaneous global launch. We start at home, in the Philippines, where we already have an anchor partner in Gridlock Games and a founder/team home-field advantage. Filipino players are already comfortable with e-wallet-style payments through GCash and Maya, and local Stellar anchors give us peso on/off-ramps, so the 'players need to already own crypto' barrier is smaller here than almost anywhere else. We plan to pull in a handful of pilot studios from the local indie and mobile dev community over the next two quarters. From there we expand regionally into APAC markets with similar dynamics — Vietnam, Indonesia, Thailand — large mobile gaming populations, strong wallet adoption, and the same e-wallet-to-crypto-wallet familiarity we're relying on at home; we localize currency and branding per market and lean on regional anchors and publisher partnerships rather than cold-starting every studio ourselves. Globally, we don't try to out-market established platforms directly — we go through the Stellar ecosystem itself: developer communities, game jams, an SCF Build Award application, multi-stablecoin support so no studio is tied to one regional asset, and eventually on-chain NFT item interoperability, which becomes a real network-effect moat once enough studios are on the rail.</a:t>
+              <a:t>Our go-to-market is deliberately staged, not a simultaneous global launch. We start at home, in the Philippines, where we already have an anchor partner in Gridlock Games and a founder/team home-field advantage. Filipino players are already comfortable with e-wallet-style payments through GCash and Maya, and local Stellar anchors give us peso on/off-ramps, so the 'players need to already own crypto' barrier is smaller here than almost anywhere else. We plan to pull in a pilot cohort of studios from the local indie and mobile dev community over the next two quarters. From there we expand regionally into APAC markets with similar dynamics — Vietnam, Indonesia, Thailand — large mobile gaming populations, strong wallet adoption, and the same e-wallet-to-crypto-wallet familiarity we rely on at home; we localize currency and branding per market and lean on regional anchors and publisher partnerships rather than cold-starting every studio ourselves. Globally, we don't try to out-market established platforms directly — we go through the Stellar ecosystem itself: developer communities, game jams, an SCF Build Award application, multi-stablecoin support so no studio is tied to one regional asset, and eventually on-chain NFT item interoperability, which becomes a real network-effect moat once enough studios are on the rail.</a:t>
             </a:r>
           </a:p>
         </p:txBody>
@@ -4157,48 +4157,14 @@
       <p:grpSpPr/>
       <p:sp>
         <p:nvSpPr>
-          <p:cNvPr id="2" name="TextBox 1"/>
-          <p:cNvSpPr txBox="1"/>
-          <p:nvPr/>
-        </p:nvSpPr>
-        <p:spPr>
-          <a:xfrm>
-            <a:off x="548640" y="1828800"/>
-            <a:ext cx="7315200" cy="365760"/>
-          </a:xfrm>
-          <a:prstGeom prst="rect">
-            <a:avLst/>
-          </a:prstGeom>
-          <a:noFill/>
-        </p:spPr>
-        <p:txBody>
-          <a:bodyPr wrap="square">
-            <a:spAutoFit/>
-          </a:bodyPr>
-          <a:lstStyle/>
-          <a:p>
-            <a:r>
-              <a:rPr sz="1300" b="1" i="0">
-                <a:solidFill>
-                  <a:srgbClr val="C3F400"/>
-                </a:solidFill>
-                <a:latin typeface="Consolas"/>
-              </a:rPr>
-              <a:t>NEON OVERDRIVE // PITCH DECK V3</a:t>
-            </a:r>
-          </a:p>
-        </p:txBody>
-      </p:sp>
-      <p:sp>
-        <p:nvSpPr>
-          <p:cNvPr id="3" name="Rectangle 2"/>
+          <p:cNvPr id="2" name="Rectangle 1"/>
           <p:cNvSpPr/>
           <p:nvPr/>
         </p:nvSpPr>
         <p:spPr>
           <a:xfrm>
-            <a:off x="548640" y="2148840"/>
-            <a:ext cx="320040" cy="27940"/>
+            <a:off x="0" y="0"/>
+            <a:ext cx="12192000" cy="38100"/>
           </a:xfrm>
           <a:prstGeom prst="rect">
             <a:avLst/>
@@ -4209,6 +4175,7 @@
           <a:ln>
             <a:noFill/>
           </a:ln>
+          <a:effectLst/>
         </p:spPr>
         <p:style>
           <a:lnRef idx="1">
@@ -4234,38 +4201,101 @@
       </p:sp>
       <p:sp>
         <p:nvSpPr>
-          <p:cNvPr id="4" name="TextBox 3"/>
-          <p:cNvSpPr txBox="1"/>
+          <p:cNvPr id="3" name="Freeform 2"/>
+          <p:cNvSpPr/>
           <p:nvPr/>
         </p:nvSpPr>
         <p:spPr>
           <a:xfrm>
-            <a:off x="548640" y="2286000"/>
-            <a:ext cx="10241280" cy="1188720"/>
-          </a:xfrm>
-          <a:prstGeom prst="rect">
-            <a:avLst/>
-          </a:prstGeom>
-          <a:noFill/>
-        </p:spPr>
-        <p:txBody>
-          <a:bodyPr wrap="square">
-            <a:spAutoFit/>
-          </a:bodyPr>
-          <a:lstStyle/>
-          <a:p>
-            <a:r>
-              <a:rPr sz="6000" b="1" i="0">
-                <a:solidFill>
-                  <a:srgbClr val="C3F400"/>
-                </a:solidFill>
-                <a:latin typeface="Arial"/>
-              </a:rPr>
-              <a:t>xGameFi</a:t>
-            </a:r>
-          </a:p>
-        </p:txBody>
-      </p:sp>
+            <a:off x="8778240" y="4480560"/>
+            <a:ext cx="2194560" cy="1737360"/>
+          </a:xfrm>
+          <a:custGeom>
+            <a:avLst/>
+            <a:gdLst/>
+            <a:ahLst/>
+            <a:cxnLst/>
+            <a:rect l="l" t="t" r="r" b="b"/>
+            <a:pathLst>
+              <a:path w="2194560" h="1737360">
+                <a:moveTo>
+                  <a:pt x="0" y="0"/>
+                </a:moveTo>
+                <a:lnTo>
+                  <a:pt x="2194560" y="0"/>
+                </a:lnTo>
+                <a:lnTo>
+                  <a:pt x="2194560" y="1325880"/>
+                </a:lnTo>
+                <a:lnTo>
+                  <a:pt x="1783080" y="1737360"/>
+                </a:lnTo>
+                <a:lnTo>
+                  <a:pt x="0" y="1737360"/>
+                </a:lnTo>
+                <a:lnTo>
+                  <a:pt x="0" y="0"/>
+                </a:lnTo>
+                <a:close/>
+              </a:path>
+            </a:pathLst>
+          </a:custGeom>
+          <a:solidFill>
+            <a:srgbClr val="0E0E0E"/>
+          </a:solidFill>
+          <a:ln w="15875">
+            <a:solidFill>
+              <a:srgbClr val="444933"/>
+            </a:solidFill>
+          </a:ln>
+          <a:effectLst/>
+        </p:spPr>
+        <p:style>
+          <a:lnRef idx="1">
+            <a:schemeClr val="accent1"/>
+          </a:lnRef>
+          <a:fillRef idx="3">
+            <a:schemeClr val="accent1"/>
+          </a:fillRef>
+          <a:effectRef idx="2">
+            <a:schemeClr val="accent1"/>
+          </a:effectRef>
+          <a:fontRef idx="minor">
+            <a:schemeClr val="lt1"/>
+          </a:fontRef>
+        </p:style>
+        <p:txBody>
+          <a:bodyPr rtlCol="0" anchor="ctr"/>
+          <a:lstStyle/>
+          <a:p>
+            <a:pPr algn="ctr"/>
+          </a:p>
+        </p:txBody>
+      </p:sp>
+      <p:pic>
+        <p:nvPicPr>
+          <p:cNvPr id="4" name="Picture 3" descr="logo.jpg"/>
+          <p:cNvPicPr>
+            <a:picLocks noChangeAspect="1"/>
+          </p:cNvPicPr>
+          <p:nvPr/>
+        </p:nvPicPr>
+        <p:blipFill>
+          <a:blip r:embed="rId2"/>
+          <a:stretch>
+            <a:fillRect/>
+          </a:stretch>
+        </p:blipFill>
+        <p:spPr>
+          <a:xfrm>
+            <a:off x="548640" y="502920"/>
+            <a:ext cx="1051560" cy="1051560"/>
+          </a:xfrm>
+          <a:prstGeom prst="rect">
+            <a:avLst/>
+          </a:prstGeom>
+        </p:spPr>
+      </p:pic>
       <p:sp>
         <p:nvSpPr>
           <p:cNvPr id="5" name="TextBox 4"/>
@@ -4274,8 +4304,8 @@
         </p:nvSpPr>
         <p:spPr>
           <a:xfrm>
-            <a:off x="548640" y="3383280"/>
-            <a:ext cx="9692640" cy="914400"/>
+            <a:off x="1783080" y="658368"/>
+            <a:ext cx="5486400" cy="822960"/>
           </a:xfrm>
           <a:prstGeom prst="rect">
             <a:avLst/>
@@ -4283,19 +4313,28 @@
           <a:noFill/>
         </p:spPr>
         <p:txBody>
-          <a:bodyPr wrap="square">
+          <a:bodyPr wrap="square" lIns="0" rIns="0" tIns="0" bIns="0">
             <a:spAutoFit/>
           </a:bodyPr>
           <a:lstStyle/>
           <a:p>
             <a:r>
-              <a:rPr sz="2000" b="0" i="0">
+              <a:rPr sz="4000" b="1" i="1">
                 <a:solidFill>
                   <a:srgbClr val="E5E2E1"/>
                 </a:solidFill>
-                <a:latin typeface="Arial"/>
-              </a:rPr>
-              <a:t>Commerce infrastructure for game studios — connect your game, get a Stellar-powered shop, go live in hours.</a:t>
+                <a:latin typeface="Space Grotesk"/>
+              </a:rPr>
+              <a:t>x</a:t>
+            </a:r>
+            <a:r>
+              <a:rPr sz="4000" b="1" i="1">
+                <a:solidFill>
+                  <a:srgbClr val="C3F400"/>
+                </a:solidFill>
+                <a:latin typeface="Space Grotesk"/>
+              </a:rPr>
+              <a:t>GameFi</a:t>
             </a:r>
           </a:p>
         </p:txBody>
@@ -4308,8 +4347,8 @@
         </p:nvSpPr>
         <p:spPr>
           <a:xfrm>
-            <a:off x="548640" y="4389120"/>
-            <a:ext cx="9692640" cy="822960"/>
+            <a:off x="548640" y="2331720"/>
+            <a:ext cx="8229600" cy="365760"/>
           </a:xfrm>
           <a:prstGeom prst="rect">
             <a:avLst/>
@@ -4317,76 +4356,64 @@
           <a:noFill/>
         </p:spPr>
         <p:txBody>
-          <a:bodyPr wrap="square">
+          <a:bodyPr wrap="square" lIns="0" rIns="0" tIns="0" bIns="0">
             <a:spAutoFit/>
           </a:bodyPr>
           <a:lstStyle/>
           <a:p>
             <a:r>
-              <a:rPr sz="1300" b="0" i="0">
-                <a:solidFill>
-                  <a:srgbClr val="C4C9AC"/>
-                </a:solidFill>
-                <a:latin typeface="Consolas"/>
-              </a:rPr>
-              <a:t>Project Lead: [NAME]</a:t>
-            </a:r>
-          </a:p>
-          <a:p>
-            <a:r>
-              <a:rPr sz="1300" b="0" i="0">
-                <a:solidFill>
-                  <a:srgbClr val="C4C9AC"/>
-                </a:solidFill>
-                <a:latin typeface="Consolas"/>
-              </a:rPr>
-              <a:t>Repo: webnxt-2030/xgamefi · branch develop</a:t>
-            </a:r>
-          </a:p>
-          <a:p>
-            <a:r>
-              <a:rPr sz="1300" b="0" i="0">
-                <a:solidFill>
-                  <a:srgbClr val="C4C9AC"/>
-                </a:solidFill>
-                <a:latin typeface="Consolas"/>
-              </a:rPr>
-              <a:t>SPEC.md v1: feature-complete · CI green · staging branch live</a:t>
-            </a:r>
-          </a:p>
-        </p:txBody>
-      </p:sp>
-      <p:sp>
-        <p:nvSpPr>
-          <p:cNvPr id="7" name="TextBox 6"/>
-          <p:cNvSpPr txBox="1"/>
+              <a:rPr sz="1300" b="1" i="0" spc="140">
+                <a:solidFill>
+                  <a:srgbClr val="C3F400"/>
+                </a:solidFill>
+                <a:latin typeface="JetBrains Mono"/>
+              </a:rPr>
+              <a:t>NEON OVERDRIVE // PITCH DECK V3</a:t>
+            </a:r>
+          </a:p>
+        </p:txBody>
+      </p:sp>
+      <p:sp>
+        <p:nvSpPr>
+          <p:cNvPr id="7" name="Rectangle 6"/>
+          <p:cNvSpPr/>
           <p:nvPr/>
         </p:nvSpPr>
         <p:spPr>
           <a:xfrm>
-            <a:off x="548640" y="6446520"/>
-            <a:ext cx="5486400" cy="320040"/>
-          </a:xfrm>
-          <a:prstGeom prst="rect">
-            <a:avLst/>
-          </a:prstGeom>
-          <a:noFill/>
-        </p:spPr>
-        <p:txBody>
-          <a:bodyPr wrap="square">
-            <a:spAutoFit/>
-          </a:bodyPr>
-          <a:lstStyle/>
-          <a:p>
-            <a:r>
-              <a:rPr sz="1000" b="0" i="0">
-                <a:solidFill>
-                  <a:srgbClr val="444933"/>
-                </a:solidFill>
-                <a:latin typeface="Consolas"/>
-              </a:rPr>
-              <a:t>xGameFi  //  Stellar commerce infrastructure</a:t>
-            </a:r>
+            <a:off x="548640" y="2651760"/>
+            <a:ext cx="320040" cy="25400"/>
+          </a:xfrm>
+          <a:prstGeom prst="rect">
+            <a:avLst/>
+          </a:prstGeom>
+          <a:solidFill>
+            <a:srgbClr val="C3F400"/>
+          </a:solidFill>
+          <a:ln>
+            <a:noFill/>
+          </a:ln>
+          <a:effectLst/>
+        </p:spPr>
+        <p:style>
+          <a:lnRef idx="1">
+            <a:schemeClr val="accent1"/>
+          </a:lnRef>
+          <a:fillRef idx="3">
+            <a:schemeClr val="accent1"/>
+          </a:fillRef>
+          <a:effectRef idx="2">
+            <a:schemeClr val="accent1"/>
+          </a:effectRef>
+          <a:fontRef idx="minor">
+            <a:schemeClr val="lt1"/>
+          </a:fontRef>
+        </p:style>
+        <p:txBody>
+          <a:bodyPr rtlCol="0" anchor="ctr"/>
+          <a:lstStyle/>
+          <a:p>
+            <a:pPr algn="ctr"/>
           </a:p>
         </p:txBody>
       </p:sp>
@@ -4398,8 +4425,8 @@
         </p:nvSpPr>
         <p:spPr>
           <a:xfrm>
-            <a:off x="10607040" y="6446520"/>
-            <a:ext cx="1097280" cy="320040"/>
+            <a:off x="548640" y="2880360"/>
+            <a:ext cx="10058400" cy="1097280"/>
           </a:xfrm>
           <a:prstGeom prst="rect">
             <a:avLst/>
@@ -4407,20 +4434,124 @@
           <a:noFill/>
         </p:spPr>
         <p:txBody>
-          <a:bodyPr wrap="square">
+          <a:bodyPr wrap="square" lIns="0" rIns="0" tIns="0" bIns="0">
             <a:spAutoFit/>
           </a:bodyPr>
           <a:lstStyle/>
           <a:p>
-            <a:pPr algn="r"/>
-            <a:r>
-              <a:rPr sz="1000" b="0" i="0">
-                <a:solidFill>
-                  <a:srgbClr val="444933"/>
-                </a:solidFill>
-                <a:latin typeface="Consolas"/>
-              </a:rPr>
-              <a:t>01 / 10</a:t>
+            <a:r>
+              <a:rPr sz="4000" b="1" i="0">
+                <a:solidFill>
+                  <a:srgbClr val="E5E2E1"/>
+                </a:solidFill>
+                <a:latin typeface="Space Grotesk"/>
+              </a:rPr>
+              <a:t>Commerce infrastructure for game studios</a:t>
+            </a:r>
+          </a:p>
+        </p:txBody>
+      </p:sp>
+      <p:sp>
+        <p:nvSpPr>
+          <p:cNvPr id="9" name="TextBox 8"/>
+          <p:cNvSpPr txBox="1"/>
+          <p:nvPr/>
+        </p:nvSpPr>
+        <p:spPr>
+          <a:xfrm>
+            <a:off x="548640" y="3977639"/>
+            <a:ext cx="9692640" cy="640080"/>
+          </a:xfrm>
+          <a:prstGeom prst="rect">
+            <a:avLst/>
+          </a:prstGeom>
+          <a:noFill/>
+        </p:spPr>
+        <p:txBody>
+          <a:bodyPr wrap="square" lIns="0" rIns="0" tIns="0" bIns="0">
+            <a:spAutoFit/>
+          </a:bodyPr>
+          <a:lstStyle/>
+          <a:p>
+            <a:r>
+              <a:rPr sz="1900" b="0" i="1">
+                <a:solidFill>
+                  <a:srgbClr val="C4C9AC"/>
+                </a:solidFill>
+                <a:latin typeface="Space Grotesk"/>
+              </a:rPr>
+              <a:t>Connect your game, get a Stellar-powered shop, go live in hours.</a:t>
+            </a:r>
+          </a:p>
+        </p:txBody>
+      </p:sp>
+      <p:sp>
+        <p:nvSpPr>
+          <p:cNvPr id="10" name="TextBox 9"/>
+          <p:cNvSpPr txBox="1"/>
+          <p:nvPr/>
+        </p:nvSpPr>
+        <p:spPr>
+          <a:xfrm>
+            <a:off x="548640" y="4846320"/>
+            <a:ext cx="7863840" cy="1005840"/>
+          </a:xfrm>
+          <a:prstGeom prst="rect">
+            <a:avLst/>
+          </a:prstGeom>
+          <a:noFill/>
+        </p:spPr>
+        <p:txBody>
+          <a:bodyPr wrap="square" lIns="0" rIns="0" tIns="0" bIns="0">
+            <a:spAutoFit/>
+          </a:bodyPr>
+          <a:lstStyle/>
+          <a:p>
+            <a:pPr>
+              <a:spcAft>
+                <a:spcPts val="300"/>
+              </a:spcAft>
+            </a:pPr>
+            <a:r>
+              <a:rPr sz="1200" b="0" i="0" spc="100">
+                <a:solidFill>
+                  <a:srgbClr val="C4C9AC"/>
+                </a:solidFill>
+                <a:latin typeface="JetBrains Mono"/>
+              </a:rPr>
+              <a:t>PROJECT LEAD: [NAME]</a:t>
+            </a:r>
+          </a:p>
+          <a:p>
+            <a:pPr>
+              <a:spcAft>
+                <a:spcPts val="300"/>
+              </a:spcAft>
+            </a:pPr>
+            <a:r>
+              <a:rPr sz="1200" b="0" i="0" spc="100">
+                <a:solidFill>
+                  <a:srgbClr val="C4C9AC"/>
+                </a:solidFill>
+                <a:latin typeface="JetBrains Mono"/>
+              </a:rPr>
+              <a:t>REPO: WEBNXT-2030/XGAMEFI · BRANCH DEVELOP</a:t>
+            </a:r>
+          </a:p>
+          <a:p>
+            <a:pPr>
+              <a:spcAft>
+                <a:spcPts val="300"/>
+              </a:spcAft>
+            </a:pPr>
+            <a:r>
+              <a:rPr sz="1200" b="0" i="0" spc="100">
+                <a:solidFill>
+                  <a:srgbClr val="ABD600"/>
+                </a:solidFill>
+                <a:latin typeface="JetBrains Mono"/>
+              </a:rPr>
+              <a:t>SPEC.md V1: FEATURE-COMPLETE · CI GREEN · STAGING LIVE</a:t>
             </a:r>
           </a:p>
         </p:txBody>
@@ -4453,48 +4584,14 @@
       <p:grpSpPr/>
       <p:sp>
         <p:nvSpPr>
-          <p:cNvPr id="2" name="TextBox 1"/>
-          <p:cNvSpPr txBox="1"/>
-          <p:nvPr/>
-        </p:nvSpPr>
-        <p:spPr>
-          <a:xfrm>
-            <a:off x="548640" y="411480"/>
-            <a:ext cx="7315200" cy="365760"/>
-          </a:xfrm>
-          <a:prstGeom prst="rect">
-            <a:avLst/>
-          </a:prstGeom>
-          <a:noFill/>
-        </p:spPr>
-        <p:txBody>
-          <a:bodyPr wrap="square">
-            <a:spAutoFit/>
-          </a:bodyPr>
-          <a:lstStyle/>
-          <a:p>
-            <a:r>
-              <a:rPr sz="1300" b="1" i="0">
-                <a:solidFill>
-                  <a:srgbClr val="C3F400"/>
-                </a:solidFill>
-                <a:latin typeface="Consolas"/>
-              </a:rPr>
-              <a:t>09 // TEAM</a:t>
-            </a:r>
-          </a:p>
-        </p:txBody>
-      </p:sp>
-      <p:sp>
-        <p:nvSpPr>
-          <p:cNvPr id="3" name="Rectangle 2"/>
+          <p:cNvPr id="2" name="Rectangle 1"/>
           <p:cNvSpPr/>
           <p:nvPr/>
         </p:nvSpPr>
         <p:spPr>
           <a:xfrm>
-            <a:off x="548640" y="731520"/>
-            <a:ext cx="320040" cy="27940"/>
+            <a:off x="0" y="0"/>
+            <a:ext cx="12192000" cy="38100"/>
           </a:xfrm>
           <a:prstGeom prst="rect">
             <a:avLst/>
@@ -4505,6 +4602,7 @@
           <a:ln>
             <a:noFill/>
           </a:ln>
+          <a:effectLst/>
         </p:spPr>
         <p:style>
           <a:lnRef idx="1">
@@ -4528,6 +4626,30 @@
           </a:p>
         </p:txBody>
       </p:sp>
+      <p:pic>
+        <p:nvPicPr>
+          <p:cNvPr id="3" name="Picture 2" descr="logo.jpg"/>
+          <p:cNvPicPr>
+            <a:picLocks noChangeAspect="1"/>
+          </p:cNvPicPr>
+          <p:nvPr/>
+        </p:nvPicPr>
+        <p:blipFill>
+          <a:blip r:embed="rId2"/>
+          <a:stretch>
+            <a:fillRect/>
+          </a:stretch>
+        </p:blipFill>
+        <p:spPr>
+          <a:xfrm>
+            <a:off x="548640" y="640080"/>
+            <a:ext cx="1005840" cy="1005840"/>
+          </a:xfrm>
+          <a:prstGeom prst="rect">
+            <a:avLst/>
+          </a:prstGeom>
+        </p:spPr>
+      </p:pic>
       <p:sp>
         <p:nvSpPr>
           <p:cNvPr id="4" name="TextBox 3"/>
@@ -4536,8 +4658,8 @@
         </p:nvSpPr>
         <p:spPr>
           <a:xfrm>
-            <a:off x="548640" y="777240"/>
-            <a:ext cx="10789920" cy="1005840"/>
+            <a:off x="1737360" y="777240"/>
+            <a:ext cx="5486400" cy="822960"/>
           </a:xfrm>
           <a:prstGeom prst="rect">
             <a:avLst/>
@@ -4545,33 +4667,76 @@
           <a:noFill/>
         </p:spPr>
         <p:txBody>
-          <a:bodyPr wrap="square">
+          <a:bodyPr wrap="square" lIns="0" rIns="0" tIns="0" bIns="0">
             <a:spAutoFit/>
           </a:bodyPr>
           <a:lstStyle/>
           <a:p>
             <a:r>
-              <a:rPr sz="3600" b="1" i="0">
+              <a:rPr sz="3600" b="1" i="1">
                 <a:solidFill>
                   <a:srgbClr val="E5E2E1"/>
                 </a:solidFill>
-                <a:latin typeface="Arial"/>
-              </a:rPr>
-              <a:t>Team &amp; thanks</a:t>
-            </a:r>
-          </a:p>
-        </p:txBody>
-      </p:sp>
-      <p:sp>
-        <p:nvSpPr>
-          <p:cNvPr id="5" name="Rectangle 4"/>
+                <a:latin typeface="Space Grotesk"/>
+              </a:rPr>
+              <a:t>x</a:t>
+            </a:r>
+            <a:r>
+              <a:rPr sz="3600" b="1" i="1">
+                <a:solidFill>
+                  <a:srgbClr val="C3F400"/>
+                </a:solidFill>
+                <a:latin typeface="Space Grotesk"/>
+              </a:rPr>
+              <a:t>GameFi</a:t>
+            </a:r>
+          </a:p>
+        </p:txBody>
+      </p:sp>
+      <p:sp>
+        <p:nvSpPr>
+          <p:cNvPr id="5" name="TextBox 4"/>
+          <p:cNvSpPr txBox="1"/>
+          <p:nvPr/>
+        </p:nvSpPr>
+        <p:spPr>
+          <a:xfrm>
+            <a:off x="548640" y="2148840"/>
+            <a:ext cx="8229600" cy="320040"/>
+          </a:xfrm>
+          <a:prstGeom prst="rect">
+            <a:avLst/>
+          </a:prstGeom>
+          <a:noFill/>
+        </p:spPr>
+        <p:txBody>
+          <a:bodyPr wrap="square" lIns="0" rIns="0" tIns="0" bIns="0">
+            <a:spAutoFit/>
+          </a:bodyPr>
+          <a:lstStyle/>
+          <a:p>
+            <a:r>
+              <a:rPr sz="1250" b="1" i="0" spc="120">
+                <a:solidFill>
+                  <a:srgbClr val="C3F400"/>
+                </a:solidFill>
+                <a:latin typeface="JetBrains Mono"/>
+              </a:rPr>
+              <a:t>09 // TEAM &amp; THANKS</a:t>
+            </a:r>
+          </a:p>
+        </p:txBody>
+      </p:sp>
+      <p:sp>
+        <p:nvSpPr>
+          <p:cNvPr id="6" name="Rectangle 5"/>
           <p:cNvSpPr/>
           <p:nvPr/>
         </p:nvSpPr>
         <p:spPr>
           <a:xfrm>
-            <a:off x="548640" y="1645920"/>
-            <a:ext cx="1280160" cy="38100"/>
+            <a:off x="548640" y="2441448"/>
+            <a:ext cx="320040" cy="25400"/>
           </a:xfrm>
           <a:prstGeom prst="rect">
             <a:avLst/>
@@ -4582,6 +4747,7 @@
           <a:ln>
             <a:noFill/>
           </a:ln>
+          <a:effectLst/>
         </p:spPr>
         <p:style>
           <a:lnRef idx="1">
@@ -4607,162 +4773,14 @@
       </p:sp>
       <p:sp>
         <p:nvSpPr>
-          <p:cNvPr id="6" name="TextBox 5"/>
-          <p:cNvSpPr txBox="1"/>
-          <p:nvPr/>
-        </p:nvSpPr>
-        <p:spPr>
-          <a:xfrm>
-            <a:off x="548640" y="1828800"/>
-            <a:ext cx="10241280" cy="4206240"/>
-          </a:xfrm>
-          <a:prstGeom prst="rect">
-            <a:avLst/>
-          </a:prstGeom>
-          <a:noFill/>
-        </p:spPr>
-        <p:txBody>
-          <a:bodyPr wrap="square">
-            <a:spAutoFit/>
-          </a:bodyPr>
-          <a:lstStyle/>
-          <a:p>
-            <a:pPr>
-              <a:spcAft>
-                <a:spcPts val="800"/>
-              </a:spcAft>
-            </a:pPr>
-            <a:r>
-              <a:rPr sz="1700" b="1" i="0">
-                <a:solidFill>
-                  <a:srgbClr val="C3F400"/>
-                </a:solidFill>
-                <a:latin typeface="Arial"/>
-              </a:rPr>
-              <a:t>‣  </a:t>
-            </a:r>
-            <a:r>
-              <a:rPr sz="1700" b="0" i="0">
-                <a:solidFill>
-                  <a:srgbClr val="E5E2E1"/>
-                </a:solidFill>
-                <a:latin typeface="Arial"/>
-              </a:rPr>
-              <a:t>[Your Name] — role / contact</a:t>
-            </a:r>
-          </a:p>
-          <a:p>
-            <a:pPr>
-              <a:spcAft>
-                <a:spcPts val="800"/>
-              </a:spcAft>
-            </a:pPr>
-            <a:r>
-              <a:rPr sz="1700" b="1" i="0">
-                <a:solidFill>
-                  <a:srgbClr val="C3F400"/>
-                </a:solidFill>
-                <a:latin typeface="Arial"/>
-              </a:rPr>
-              <a:t>‣  </a:t>
-            </a:r>
-            <a:r>
-              <a:rPr sz="1700" b="0" i="0">
-                <a:solidFill>
-                  <a:srgbClr val="E5E2E1"/>
-                </a:solidFill>
-                <a:latin typeface="Arial"/>
-              </a:rPr>
-              <a:t>[Teammate] — role / contact</a:t>
-            </a:r>
-          </a:p>
-          <a:p>
-            <a:pPr>
-              <a:spcAft>
-                <a:spcPts val="800"/>
-              </a:spcAft>
-            </a:pPr>
-            <a:r>
-              <a:rPr sz="1700" b="1" i="0">
-                <a:solidFill>
-                  <a:srgbClr val="C3F400"/>
-                </a:solidFill>
-                <a:latin typeface="Arial"/>
-              </a:rPr>
-              <a:t>‣  </a:t>
-            </a:r>
-            <a:r>
-              <a:rPr sz="1700" b="0" i="0">
-                <a:solidFill>
-                  <a:srgbClr val="E5E2E1"/>
-                </a:solidFill>
-                <a:latin typeface="Arial"/>
-              </a:rPr>
-              <a:t>[Teammate] — role / contact</a:t>
-            </a:r>
-          </a:p>
-          <a:p>
-            <a:pPr>
-              <a:spcAft>
-                <a:spcPts val="800"/>
-              </a:spcAft>
-            </a:pPr>
-            <a:r>
-              <a:rPr sz="1700" b="1" i="0">
-                <a:solidFill>
-                  <a:srgbClr val="C3F400"/>
-                </a:solidFill>
-                <a:latin typeface="Arial"/>
-              </a:rPr>
-              <a:t>‣  </a:t>
-            </a:r>
-            <a:r>
-              <a:rPr sz="1700" b="0" i="0">
-                <a:solidFill>
-                  <a:srgbClr val="E5E2E1"/>
-                </a:solidFill>
-                <a:latin typeface="Arial"/>
-              </a:rPr>
-              <a:t>Docs: SPEC.md · AGENT.md · BRAND.md · docs/features.md · GitHub issue #137 (ecosystem report)</a:t>
-            </a:r>
-          </a:p>
-          <a:p>
-            <a:pPr>
-              <a:spcAft>
-                <a:spcPts val="800"/>
-              </a:spcAft>
-            </a:pPr>
-            <a:r>
-              <a:rPr sz="1700" b="1" i="0">
-                <a:solidFill>
-                  <a:srgbClr val="C3F400"/>
-                </a:solidFill>
-                <a:latin typeface="Arial"/>
-              </a:rPr>
-              <a:t>‣  </a:t>
-            </a:r>
-            <a:r>
-              <a:rPr sz="1700" b="0" i="0">
-                <a:solidFill>
-                  <a:srgbClr val="E5E2E1"/>
-                </a:solidFill>
-                <a:latin typeface="Arial"/>
-              </a:rPr>
-              <a:t>Thanks to Gridlock Games (anchor partner), the Stellar Community Fund, and everyone reviewing this deck.</a:t>
-            </a:r>
-          </a:p>
-        </p:txBody>
-      </p:sp>
-      <p:sp>
-        <p:nvSpPr>
           <p:cNvPr id="7" name="TextBox 6"/>
           <p:cNvSpPr txBox="1"/>
           <p:nvPr/>
         </p:nvSpPr>
         <p:spPr>
           <a:xfrm>
-            <a:off x="548640" y="6446520"/>
-            <a:ext cx="5486400" cy="320040"/>
+            <a:off x="548640" y="2697480"/>
+            <a:ext cx="10424160" cy="2926080"/>
           </a:xfrm>
           <a:prstGeom prst="rect">
             <a:avLst/>
@@ -4770,19 +4788,83 @@
           <a:noFill/>
         </p:spPr>
         <p:txBody>
-          <a:bodyPr wrap="square">
+          <a:bodyPr wrap="square" lIns="0" rIns="0" tIns="0" bIns="0">
             <a:spAutoFit/>
           </a:bodyPr>
           <a:lstStyle/>
           <a:p>
-            <a:r>
-              <a:rPr sz="1000" b="0" i="0">
-                <a:solidFill>
-                  <a:srgbClr val="444933"/>
-                </a:solidFill>
-                <a:latin typeface="Consolas"/>
-              </a:rPr>
-              <a:t>xGameFi  //  Stellar commerce infrastructure</a:t>
+            <a:pPr>
+              <a:spcAft>
+                <a:spcPts val="1000"/>
+              </a:spcAft>
+            </a:pPr>
+            <a:r>
+              <a:rPr sz="1700" b="1" i="0">
+                <a:solidFill>
+                  <a:srgbClr val="C3F400"/>
+                </a:solidFill>
+                <a:latin typeface="JetBrains Mono"/>
+              </a:rPr>
+              <a:t>▸  </a:t>
+            </a:r>
+            <a:r>
+              <a:rPr sz="1700" b="0" i="0">
+                <a:solidFill>
+                  <a:srgbClr val="E5E2E1"/>
+                </a:solidFill>
+                <a:latin typeface="Space Grotesk"/>
+              </a:rPr>
+              <a:t>[Your Name] — role / contact</a:t>
+            </a:r>
+          </a:p>
+          <a:p>
+            <a:pPr>
+              <a:spcAft>
+                <a:spcPts val="1000"/>
+              </a:spcAft>
+            </a:pPr>
+            <a:r>
+              <a:rPr sz="1700" b="1" i="0">
+                <a:solidFill>
+                  <a:srgbClr val="C3F400"/>
+                </a:solidFill>
+                <a:latin typeface="JetBrains Mono"/>
+              </a:rPr>
+              <a:t>▸  </a:t>
+            </a:r>
+            <a:r>
+              <a:rPr sz="1700" b="0" i="0">
+                <a:solidFill>
+                  <a:srgbClr val="E5E2E1"/>
+                </a:solidFill>
+                <a:latin typeface="Space Grotesk"/>
+              </a:rPr>
+              <a:t>[Teammate] — role / contact</a:t>
+            </a:r>
+          </a:p>
+          <a:p>
+            <a:pPr>
+              <a:spcAft>
+                <a:spcPts val="1000"/>
+              </a:spcAft>
+            </a:pPr>
+            <a:r>
+              <a:rPr sz="1700" b="1" i="0">
+                <a:solidFill>
+                  <a:srgbClr val="C3F400"/>
+                </a:solidFill>
+                <a:latin typeface="JetBrains Mono"/>
+              </a:rPr>
+              <a:t>▸  </a:t>
+            </a:r>
+            <a:r>
+              <a:rPr sz="1700" b="0" i="0">
+                <a:solidFill>
+                  <a:srgbClr val="E5E2E1"/>
+                </a:solidFill>
+                <a:latin typeface="Space Grotesk"/>
+              </a:rPr>
+              <a:t>[Teammate] — role / contact</a:t>
             </a:r>
           </a:p>
         </p:txBody>
@@ -4795,8 +4877,8 @@
         </p:nvSpPr>
         <p:spPr>
           <a:xfrm>
-            <a:off x="10607040" y="6446520"/>
-            <a:ext cx="1097280" cy="320040"/>
+            <a:off x="548640" y="4709160"/>
+            <a:ext cx="10424160" cy="1097280"/>
           </a:xfrm>
           <a:prstGeom prst="rect">
             <a:avLst/>
@@ -4804,18 +4886,129 @@
           <a:noFill/>
         </p:spPr>
         <p:txBody>
-          <a:bodyPr wrap="square">
+          <a:bodyPr wrap="square" lIns="0" rIns="0" tIns="0" bIns="0">
             <a:spAutoFit/>
           </a:bodyPr>
           <a:lstStyle/>
           <a:p>
+            <a:r>
+              <a:rPr sz="1200" b="0" i="0" spc="100">
+                <a:solidFill>
+                  <a:srgbClr val="ABD600"/>
+                </a:solidFill>
+                <a:latin typeface="JetBrains Mono"/>
+              </a:rPr>
+              <a:t>DOCS  </a:t>
+            </a:r>
+            <a:r>
+              <a:rPr sz="1300" b="0" i="0">
+                <a:solidFill>
+                  <a:srgbClr val="C4C9AC"/>
+                </a:solidFill>
+                <a:latin typeface="JetBrains Mono"/>
+              </a:rPr>
+              <a:t>SPEC.md · AGENT.md · BRAND.md · docs/features.md · GitHub issue #137 (ecosystem report)</a:t>
+            </a:r>
+          </a:p>
+          <a:p>
+            <a:pPr>
+              <a:spcBef>
+                <a:spcPts val="1000"/>
+              </a:spcBef>
+            </a:pPr>
+            <a:r>
+              <a:rPr sz="1400" b="0" i="1">
+                <a:solidFill>
+                  <a:srgbClr val="E5E2E1"/>
+                </a:solidFill>
+                <a:latin typeface="Space Grotesk"/>
+              </a:rPr>
+              <a:t>Thanks to Gridlock Games (anchor partner), the Stellar Community Fund, and everyone reviewing this deck.</a:t>
+            </a:r>
+          </a:p>
+        </p:txBody>
+      </p:sp>
+      <p:sp>
+        <p:nvSpPr>
+          <p:cNvPr id="9" name="TextBox 8"/>
+          <p:cNvSpPr txBox="1"/>
+          <p:nvPr/>
+        </p:nvSpPr>
+        <p:spPr>
+          <a:xfrm>
+            <a:off x="548640" y="6419088"/>
+            <a:ext cx="6400800" cy="320040"/>
+          </a:xfrm>
+          <a:prstGeom prst="rect">
+            <a:avLst/>
+          </a:prstGeom>
+          <a:noFill/>
+        </p:spPr>
+        <p:txBody>
+          <a:bodyPr wrap="square" lIns="0" rIns="0" tIns="0" bIns="0">
+            <a:spAutoFit/>
+          </a:bodyPr>
+          <a:lstStyle/>
+          <a:p>
+            <a:r>
+              <a:rPr sz="1000" b="0" i="1">
+                <a:solidFill>
+                  <a:srgbClr val="8E9379"/>
+                </a:solidFill>
+                <a:latin typeface="JetBrains Mono"/>
+              </a:rPr>
+              <a:t>x</a:t>
+            </a:r>
+            <a:r>
+              <a:rPr sz="1000" b="0" i="1">
+                <a:solidFill>
+                  <a:srgbClr val="ABD600"/>
+                </a:solidFill>
+                <a:latin typeface="JetBrains Mono"/>
+              </a:rPr>
+              <a:t>GameFi</a:t>
+            </a:r>
+            <a:r>
+              <a:rPr sz="1000" b="0" i="0" spc="100">
+                <a:solidFill>
+                  <a:srgbClr val="8E9379"/>
+                </a:solidFill>
+                <a:latin typeface="JetBrains Mono"/>
+              </a:rPr>
+              <a:t>  //  STELLAR COMMERCE INFRASTRUCTURE</a:t>
+            </a:r>
+          </a:p>
+        </p:txBody>
+      </p:sp>
+      <p:sp>
+        <p:nvSpPr>
+          <p:cNvPr id="10" name="TextBox 9"/>
+          <p:cNvSpPr txBox="1"/>
+          <p:nvPr/>
+        </p:nvSpPr>
+        <p:spPr>
+          <a:xfrm>
+            <a:off x="9966960" y="6419088"/>
+            <a:ext cx="1188720" cy="320040"/>
+          </a:xfrm>
+          <a:prstGeom prst="rect">
+            <a:avLst/>
+          </a:prstGeom>
+          <a:noFill/>
+        </p:spPr>
+        <p:txBody>
+          <a:bodyPr wrap="square" lIns="0" rIns="0" tIns="0" bIns="0">
+            <a:spAutoFit/>
+          </a:bodyPr>
+          <a:lstStyle/>
+          <a:p>
             <a:pPr algn="r"/>
             <a:r>
-              <a:rPr sz="1000" b="0" i="0">
-                <a:solidFill>
-                  <a:srgbClr val="444933"/>
-                </a:solidFill>
-                <a:latin typeface="Consolas"/>
+              <a:rPr sz="1000" b="0" i="0" spc="100">
+                <a:solidFill>
+                  <a:srgbClr val="8E9379"/>
+                </a:solidFill>
+                <a:latin typeface="JetBrains Mono"/>
               </a:rPr>
               <a:t>10 / 10</a:t>
             </a:r>
@@ -4850,48 +5043,14 @@
       <p:grpSpPr/>
       <p:sp>
         <p:nvSpPr>
-          <p:cNvPr id="2" name="TextBox 1"/>
-          <p:cNvSpPr txBox="1"/>
-          <p:nvPr/>
-        </p:nvSpPr>
-        <p:spPr>
-          <a:xfrm>
-            <a:off x="548640" y="411480"/>
-            <a:ext cx="7315200" cy="365760"/>
-          </a:xfrm>
-          <a:prstGeom prst="rect">
-            <a:avLst/>
-          </a:prstGeom>
-          <a:noFill/>
-        </p:spPr>
-        <p:txBody>
-          <a:bodyPr wrap="square">
-            <a:spAutoFit/>
-          </a:bodyPr>
-          <a:lstStyle/>
-          <a:p>
-            <a:r>
-              <a:rPr sz="1300" b="1" i="0">
-                <a:solidFill>
-                  <a:srgbClr val="C3F400"/>
-                </a:solidFill>
-                <a:latin typeface="Consolas"/>
-              </a:rPr>
-              <a:t>01 // PROBLEM</a:t>
-            </a:r>
-          </a:p>
-        </p:txBody>
-      </p:sp>
-      <p:sp>
-        <p:nvSpPr>
-          <p:cNvPr id="3" name="Rectangle 2"/>
+          <p:cNvPr id="2" name="Rectangle 1"/>
           <p:cNvSpPr/>
           <p:nvPr/>
         </p:nvSpPr>
         <p:spPr>
           <a:xfrm>
-            <a:off x="548640" y="731520"/>
-            <a:ext cx="320040" cy="27940"/>
+            <a:off x="0" y="0"/>
+            <a:ext cx="12192000" cy="31750"/>
           </a:xfrm>
           <a:prstGeom prst="rect">
             <a:avLst/>
@@ -4902,6 +5061,7 @@
           <a:ln>
             <a:noFill/>
           </a:ln>
+          <a:effectLst/>
         </p:spPr>
         <p:style>
           <a:lnRef idx="1">
@@ -4927,14 +5087,58 @@
       </p:sp>
       <p:sp>
         <p:nvSpPr>
+          <p:cNvPr id="3" name="Rectangle 2"/>
+          <p:cNvSpPr/>
+          <p:nvPr/>
+        </p:nvSpPr>
+        <p:spPr>
+          <a:xfrm>
+            <a:off x="548640" y="31750"/>
+            <a:ext cx="640080" cy="31750"/>
+          </a:xfrm>
+          <a:prstGeom prst="rect">
+            <a:avLst/>
+          </a:prstGeom>
+          <a:solidFill>
+            <a:srgbClr val="ABD600"/>
+          </a:solidFill>
+          <a:ln>
+            <a:noFill/>
+          </a:ln>
+          <a:effectLst/>
+        </p:spPr>
+        <p:style>
+          <a:lnRef idx="1">
+            <a:schemeClr val="accent1"/>
+          </a:lnRef>
+          <a:fillRef idx="3">
+            <a:schemeClr val="accent1"/>
+          </a:fillRef>
+          <a:effectRef idx="2">
+            <a:schemeClr val="accent1"/>
+          </a:effectRef>
+          <a:fontRef idx="minor">
+            <a:schemeClr val="lt1"/>
+          </a:fontRef>
+        </p:style>
+        <p:txBody>
+          <a:bodyPr rtlCol="0" anchor="ctr"/>
+          <a:lstStyle/>
+          <a:p>
+            <a:pPr algn="ctr"/>
+          </a:p>
+        </p:txBody>
+      </p:sp>
+      <p:sp>
+        <p:nvSpPr>
           <p:cNvPr id="4" name="TextBox 3"/>
           <p:cNvSpPr txBox="1"/>
           <p:nvPr/>
         </p:nvSpPr>
         <p:spPr>
           <a:xfrm>
-            <a:off x="548640" y="777240"/>
-            <a:ext cx="10789920" cy="1005840"/>
+            <a:off x="548640" y="457200"/>
+            <a:ext cx="8229600" cy="320040"/>
           </a:xfrm>
           <a:prstGeom prst="rect">
             <a:avLst/>
@@ -4942,19 +5146,19 @@
           <a:noFill/>
         </p:spPr>
         <p:txBody>
-          <a:bodyPr wrap="square">
+          <a:bodyPr wrap="square" lIns="0" rIns="0" tIns="0" bIns="0">
             <a:spAutoFit/>
           </a:bodyPr>
           <a:lstStyle/>
           <a:p>
             <a:r>
-              <a:rPr sz="3600" b="1" i="0">
-                <a:solidFill>
-                  <a:srgbClr val="E5E2E1"/>
-                </a:solidFill>
-                <a:latin typeface="Arial"/>
-              </a:rPr>
-              <a:t>Every studio rebuilds the same plumbing</a:t>
+              <a:rPr sz="1250" b="1" i="0" spc="120">
+                <a:solidFill>
+                  <a:srgbClr val="C3F400"/>
+                </a:solidFill>
+                <a:latin typeface="JetBrains Mono"/>
+              </a:rPr>
+              <a:t>01 // PROBLEM</a:t>
             </a:r>
           </a:p>
         </p:txBody>
@@ -4967,8 +5171,8 @@
         </p:nvSpPr>
         <p:spPr>
           <a:xfrm>
-            <a:off x="548640" y="1645920"/>
-            <a:ext cx="1280160" cy="38100"/>
+            <a:off x="548640" y="749808"/>
+            <a:ext cx="320040" cy="25400"/>
           </a:xfrm>
           <a:prstGeom prst="rect">
             <a:avLst/>
@@ -4979,6 +5183,7 @@
           <a:ln>
             <a:noFill/>
           </a:ln>
+          <a:effectLst/>
         </p:spPr>
         <p:style>
           <a:lnRef idx="1">
@@ -5010,8 +5215,8 @@
         </p:nvSpPr>
         <p:spPr>
           <a:xfrm>
-            <a:off x="548640" y="1737360"/>
-            <a:ext cx="10424160" cy="548640"/>
+            <a:off x="548640" y="822960"/>
+            <a:ext cx="10607040" cy="914400"/>
           </a:xfrm>
           <a:prstGeom prst="rect">
             <a:avLst/>
@@ -5019,33 +5224,77 @@
           <a:noFill/>
         </p:spPr>
         <p:txBody>
-          <a:bodyPr wrap="square">
+          <a:bodyPr wrap="square" lIns="0" rIns="0" tIns="0" bIns="0">
             <a:spAutoFit/>
           </a:bodyPr>
           <a:lstStyle/>
           <a:p>
             <a:r>
-              <a:rPr sz="1600" b="0" i="1">
-                <a:solidFill>
-                  <a:srgbClr val="C4C9AC"/>
-                </a:solidFill>
-                <a:latin typeface="Arial"/>
-              </a:rPr>
-              <a:t>Checkout, shop, delivery, fraud — none of it is the game, and it's rebuilt from scratch every time.</a:t>
-            </a:r>
-          </a:p>
-        </p:txBody>
-      </p:sp>
-      <p:sp>
-        <p:nvSpPr>
-          <p:cNvPr id="7" name="TextBox 6"/>
+              <a:rPr sz="3400" b="1" i="0">
+                <a:solidFill>
+                  <a:srgbClr val="E5E2E1"/>
+                </a:solidFill>
+                <a:latin typeface="Space Grotesk"/>
+              </a:rPr>
+              <a:t>Every studio rebuilds the same plumbing</a:t>
+            </a:r>
+          </a:p>
+        </p:txBody>
+      </p:sp>
+      <p:sp>
+        <p:nvSpPr>
+          <p:cNvPr id="7" name="Rectangle 6"/>
+          <p:cNvSpPr/>
+          <p:nvPr/>
+        </p:nvSpPr>
+        <p:spPr>
+          <a:xfrm>
+            <a:off x="548640" y="1664208"/>
+            <a:ext cx="1280160" cy="38100"/>
+          </a:xfrm>
+          <a:prstGeom prst="rect">
+            <a:avLst/>
+          </a:prstGeom>
+          <a:solidFill>
+            <a:srgbClr val="C3F400"/>
+          </a:solidFill>
+          <a:ln>
+            <a:noFill/>
+          </a:ln>
+          <a:effectLst/>
+        </p:spPr>
+        <p:style>
+          <a:lnRef idx="1">
+            <a:schemeClr val="accent1"/>
+          </a:lnRef>
+          <a:fillRef idx="3">
+            <a:schemeClr val="accent1"/>
+          </a:fillRef>
+          <a:effectRef idx="2">
+            <a:schemeClr val="accent1"/>
+          </a:effectRef>
+          <a:fontRef idx="minor">
+            <a:schemeClr val="lt1"/>
+          </a:fontRef>
+        </p:style>
+        <p:txBody>
+          <a:bodyPr rtlCol="0" anchor="ctr"/>
+          <a:lstStyle/>
+          <a:p>
+            <a:pPr algn="ctr"/>
+          </a:p>
+        </p:txBody>
+      </p:sp>
+      <p:sp>
+        <p:nvSpPr>
+          <p:cNvPr id="8" name="TextBox 7"/>
           <p:cNvSpPr txBox="1"/>
           <p:nvPr/>
         </p:nvSpPr>
         <p:spPr>
           <a:xfrm>
-            <a:off x="548640" y="2468880"/>
-            <a:ext cx="10241280" cy="4206240"/>
+            <a:off x="548640" y="1783080"/>
+            <a:ext cx="10424160" cy="548640"/>
           </a:xfrm>
           <a:prstGeom prst="rect">
             <a:avLst/>
@@ -5053,122 +5302,168 @@
           <a:noFill/>
         </p:spPr>
         <p:txBody>
-          <a:bodyPr wrap="square">
+          <a:bodyPr wrap="square" lIns="0" rIns="0" tIns="0" bIns="0">
             <a:spAutoFit/>
           </a:bodyPr>
           <a:lstStyle/>
           <a:p>
+            <a:r>
+              <a:rPr sz="1550" b="0" i="1">
+                <a:solidFill>
+                  <a:srgbClr val="C4C9AC"/>
+                </a:solidFill>
+                <a:latin typeface="Space Grotesk"/>
+              </a:rPr>
+              <a:t>Checkout, shop, delivery, fraud — none of it is the game, and it's rebuilt from scratch every time.</a:t>
+            </a:r>
+          </a:p>
+        </p:txBody>
+      </p:sp>
+      <p:sp>
+        <p:nvSpPr>
+          <p:cNvPr id="9" name="TextBox 8"/>
+          <p:cNvSpPr txBox="1"/>
+          <p:nvPr/>
+        </p:nvSpPr>
+        <p:spPr>
+          <a:xfrm>
+            <a:off x="548640" y="2514600"/>
+            <a:ext cx="10424160" cy="4206240"/>
+          </a:xfrm>
+          <a:prstGeom prst="rect">
+            <a:avLst/>
+          </a:prstGeom>
+          <a:noFill/>
+        </p:spPr>
+        <p:txBody>
+          <a:bodyPr wrap="square" lIns="0" rIns="0" tIns="0" bIns="0">
+            <a:spAutoFit/>
+          </a:bodyPr>
+          <a:lstStyle/>
+          <a:p>
             <a:pPr>
+              <a:lnSpc>
+                <a:spcPct val="105000"/>
+              </a:lnSpc>
               <a:spcAft>
                 <a:spcPts val="800"/>
               </a:spcAft>
             </a:pPr>
             <a:r>
-              <a:rPr sz="1700" b="1" i="0">
+              <a:rPr sz="1650" b="1" i="0">
                 <a:solidFill>
                   <a:srgbClr val="C3F400"/>
                 </a:solidFill>
-                <a:latin typeface="Arial"/>
-              </a:rPr>
-              <a:t>‣  </a:t>
-            </a:r>
-            <a:r>
-              <a:rPr sz="1700" b="0" i="0">
+                <a:latin typeface="JetBrains Mono"/>
+              </a:rPr>
+              <a:t>▸  </a:t>
+            </a:r>
+            <a:r>
+              <a:rPr sz="1650" b="0" i="0">
                 <a:solidFill>
                   <a:srgbClr val="E5E2E1"/>
                 </a:solidFill>
-                <a:latin typeface="Arial"/>
+                <a:latin typeface="Space Grotesk"/>
               </a:rPr>
               <a:t>Building a payment rail, shop UI, and delivery pipeline is expensive, slow, and brittle — before a studio sells a single skin.</a:t>
             </a:r>
           </a:p>
           <a:p>
             <a:pPr>
+              <a:lnSpc>
+                <a:spcPct val="105000"/>
+              </a:lnSpc>
               <a:spcAft>
                 <a:spcPts val="800"/>
               </a:spcAft>
             </a:pPr>
             <a:r>
-              <a:rPr sz="1700" b="1" i="0">
+              <a:rPr sz="1650" b="1" i="0">
                 <a:solidFill>
                   <a:srgbClr val="C3F400"/>
                 </a:solidFill>
-                <a:latin typeface="Arial"/>
-              </a:rPr>
-              <a:t>‣  </a:t>
-            </a:r>
-            <a:r>
-              <a:rPr sz="1700" b="0" i="0">
+                <a:latin typeface="JetBrains Mono"/>
+              </a:rPr>
+              <a:t>▸  </a:t>
+            </a:r>
+            <a:r>
+              <a:rPr sz="1650" b="0" i="0">
                 <a:solidFill>
                   <a:srgbClr val="E5E2E1"/>
                 </a:solidFill>
-                <a:latin typeface="Arial"/>
+                <a:latin typeface="Space Grotesk"/>
               </a:rPr>
               <a:t>Players pay the price too: per-game checkout flows, weak security, no resale, no portable wallet identity.</a:t>
             </a:r>
           </a:p>
           <a:p>
             <a:pPr>
+              <a:lnSpc>
+                <a:spcPct val="105000"/>
+              </a:lnSpc>
               <a:spcAft>
                 <a:spcPts val="800"/>
               </a:spcAft>
             </a:pPr>
             <a:r>
-              <a:rPr sz="1700" b="1" i="0">
+              <a:rPr sz="1650" b="1" i="0">
                 <a:solidFill>
                   <a:srgbClr val="C3F400"/>
                 </a:solidFill>
-                <a:latin typeface="Arial"/>
-              </a:rPr>
-              <a:t>‣  </a:t>
-            </a:r>
-            <a:r>
-              <a:rPr sz="1700" b="0" i="0">
+                <a:latin typeface="JetBrains Mono"/>
+              </a:rPr>
+              <a:t>▸  </a:t>
+            </a:r>
+            <a:r>
+              <a:rPr sz="1650" b="0" i="0">
                 <a:solidFill>
                   <a:srgbClr val="E5E2E1"/>
                 </a:solidFill>
-                <a:latin typeface="Arial"/>
+                <a:latin typeface="Space Grotesk"/>
               </a:rPr>
               <a:t>Web3 gaming promised ownership, but today it mostly delivers friction — not a real checkout.</a:t>
             </a:r>
           </a:p>
           <a:p>
             <a:pPr>
+              <a:lnSpc>
+                <a:spcPct val="105000"/>
+              </a:lnSpc>
               <a:spcAft>
                 <a:spcPts val="800"/>
               </a:spcAft>
             </a:pPr>
             <a:r>
-              <a:rPr sz="1700" b="1" i="0">
+              <a:rPr sz="1650" b="1" i="0">
                 <a:solidFill>
                   <a:srgbClr val="C3F400"/>
                 </a:solidFill>
-                <a:latin typeface="Arial"/>
-              </a:rPr>
-              <a:t>‣  </a:t>
-            </a:r>
-            <a:r>
-              <a:rPr sz="1700" b="0" i="0">
+                <a:latin typeface="JetBrains Mono"/>
+              </a:rPr>
+              <a:t>▸  </a:t>
+            </a:r>
+            <a:r>
+              <a:rPr sz="1650" b="0" i="0">
                 <a:solidFill>
                   <a:srgbClr val="E5E2E1"/>
                 </a:solidFill>
-                <a:latin typeface="Arial"/>
-              </a:rPr>
-              <a:t>None of this touches the Stellar network at meaningful scale either — fragmented, per-studio efforts mean fragmented, low on-chain volume.</a:t>
-            </a:r>
-          </a:p>
-        </p:txBody>
-      </p:sp>
-      <p:sp>
-        <p:nvSpPr>
-          <p:cNvPr id="8" name="TextBox 7"/>
+                <a:latin typeface="Space Grotesk"/>
+              </a:rPr>
+              <a:t>None of this touches the Stellar network at meaningful scale — fragmented, per-studio effort means fragmented, low on-chain volume.</a:t>
+            </a:r>
+          </a:p>
+        </p:txBody>
+      </p:sp>
+      <p:sp>
+        <p:nvSpPr>
+          <p:cNvPr id="10" name="TextBox 9"/>
           <p:cNvSpPr txBox="1"/>
           <p:nvPr/>
         </p:nvSpPr>
         <p:spPr>
           <a:xfrm>
-            <a:off x="548640" y="6446520"/>
-            <a:ext cx="5486400" cy="320040"/>
+            <a:off x="548640" y="6419088"/>
+            <a:ext cx="6400800" cy="320040"/>
           </a:xfrm>
           <a:prstGeom prst="rect">
             <a:avLst/>
@@ -5176,33 +5471,51 @@
           <a:noFill/>
         </p:spPr>
         <p:txBody>
-          <a:bodyPr wrap="square">
+          <a:bodyPr wrap="square" lIns="0" rIns="0" tIns="0" bIns="0">
             <a:spAutoFit/>
           </a:bodyPr>
           <a:lstStyle/>
           <a:p>
             <a:r>
-              <a:rPr sz="1000" b="0" i="0">
-                <a:solidFill>
-                  <a:srgbClr val="444933"/>
-                </a:solidFill>
-                <a:latin typeface="Consolas"/>
-              </a:rPr>
-              <a:t>xGameFi  //  Stellar commerce infrastructure</a:t>
-            </a:r>
-          </a:p>
-        </p:txBody>
-      </p:sp>
-      <p:sp>
-        <p:nvSpPr>
-          <p:cNvPr id="9" name="TextBox 8"/>
+              <a:rPr sz="1000" b="0" i="1">
+                <a:solidFill>
+                  <a:srgbClr val="8E9379"/>
+                </a:solidFill>
+                <a:latin typeface="JetBrains Mono"/>
+              </a:rPr>
+              <a:t>x</a:t>
+            </a:r>
+            <a:r>
+              <a:rPr sz="1000" b="0" i="1">
+                <a:solidFill>
+                  <a:srgbClr val="ABD600"/>
+                </a:solidFill>
+                <a:latin typeface="JetBrains Mono"/>
+              </a:rPr>
+              <a:t>GameFi</a:t>
+            </a:r>
+            <a:r>
+              <a:rPr sz="1000" b="0" i="0" spc="100">
+                <a:solidFill>
+                  <a:srgbClr val="8E9379"/>
+                </a:solidFill>
+                <a:latin typeface="JetBrains Mono"/>
+              </a:rPr>
+              <a:t>  //  STELLAR COMMERCE INFRASTRUCTURE</a:t>
+            </a:r>
+          </a:p>
+        </p:txBody>
+      </p:sp>
+      <p:sp>
+        <p:nvSpPr>
+          <p:cNvPr id="11" name="TextBox 10"/>
           <p:cNvSpPr txBox="1"/>
           <p:nvPr/>
         </p:nvSpPr>
         <p:spPr>
           <a:xfrm>
-            <a:off x="10607040" y="6446520"/>
-            <a:ext cx="1097280" cy="320040"/>
+            <a:off x="9966960" y="6419088"/>
+            <a:ext cx="1188720" cy="320040"/>
           </a:xfrm>
           <a:prstGeom prst="rect">
             <a:avLst/>
@@ -5210,18 +5523,18 @@
           <a:noFill/>
         </p:spPr>
         <p:txBody>
-          <a:bodyPr wrap="square">
+          <a:bodyPr wrap="square" lIns="0" rIns="0" tIns="0" bIns="0">
             <a:spAutoFit/>
           </a:bodyPr>
           <a:lstStyle/>
           <a:p>
             <a:pPr algn="r"/>
             <a:r>
-              <a:rPr sz="1000" b="0" i="0">
-                <a:solidFill>
-                  <a:srgbClr val="444933"/>
-                </a:solidFill>
-                <a:latin typeface="Consolas"/>
+              <a:rPr sz="1000" b="0" i="0" spc="100">
+                <a:solidFill>
+                  <a:srgbClr val="8E9379"/>
+                </a:solidFill>
+                <a:latin typeface="JetBrains Mono"/>
               </a:rPr>
               <a:t>02 / 10</a:t>
             </a:r>
@@ -5256,48 +5569,14 @@
       <p:grpSpPr/>
       <p:sp>
         <p:nvSpPr>
-          <p:cNvPr id="2" name="TextBox 1"/>
-          <p:cNvSpPr txBox="1"/>
-          <p:nvPr/>
-        </p:nvSpPr>
-        <p:spPr>
-          <a:xfrm>
-            <a:off x="548640" y="411480"/>
-            <a:ext cx="7315200" cy="365760"/>
-          </a:xfrm>
-          <a:prstGeom prst="rect">
-            <a:avLst/>
-          </a:prstGeom>
-          <a:noFill/>
-        </p:spPr>
-        <p:txBody>
-          <a:bodyPr wrap="square">
-            <a:spAutoFit/>
-          </a:bodyPr>
-          <a:lstStyle/>
-          <a:p>
-            <a:r>
-              <a:rPr sz="1300" b="1" i="0">
-                <a:solidFill>
-                  <a:srgbClr val="C3F400"/>
-                </a:solidFill>
-                <a:latin typeface="Consolas"/>
-              </a:rPr>
-              <a:t>02 // SOLUTION</a:t>
-            </a:r>
-          </a:p>
-        </p:txBody>
-      </p:sp>
-      <p:sp>
-        <p:nvSpPr>
-          <p:cNvPr id="3" name="Rectangle 2"/>
+          <p:cNvPr id="2" name="Rectangle 1"/>
           <p:cNvSpPr/>
           <p:nvPr/>
         </p:nvSpPr>
         <p:spPr>
           <a:xfrm>
-            <a:off x="548640" y="731520"/>
-            <a:ext cx="320040" cy="27940"/>
+            <a:off x="0" y="0"/>
+            <a:ext cx="12192000" cy="31750"/>
           </a:xfrm>
           <a:prstGeom prst="rect">
             <a:avLst/>
@@ -5308,6 +5587,7 @@
           <a:ln>
             <a:noFill/>
           </a:ln>
+          <a:effectLst/>
         </p:spPr>
         <p:style>
           <a:lnRef idx="1">
@@ -5333,14 +5613,58 @@
       </p:sp>
       <p:sp>
         <p:nvSpPr>
+          <p:cNvPr id="3" name="Rectangle 2"/>
+          <p:cNvSpPr/>
+          <p:nvPr/>
+        </p:nvSpPr>
+        <p:spPr>
+          <a:xfrm>
+            <a:off x="548640" y="31750"/>
+            <a:ext cx="640080" cy="31750"/>
+          </a:xfrm>
+          <a:prstGeom prst="rect">
+            <a:avLst/>
+          </a:prstGeom>
+          <a:solidFill>
+            <a:srgbClr val="ABD600"/>
+          </a:solidFill>
+          <a:ln>
+            <a:noFill/>
+          </a:ln>
+          <a:effectLst/>
+        </p:spPr>
+        <p:style>
+          <a:lnRef idx="1">
+            <a:schemeClr val="accent1"/>
+          </a:lnRef>
+          <a:fillRef idx="3">
+            <a:schemeClr val="accent1"/>
+          </a:fillRef>
+          <a:effectRef idx="2">
+            <a:schemeClr val="accent1"/>
+          </a:effectRef>
+          <a:fontRef idx="minor">
+            <a:schemeClr val="lt1"/>
+          </a:fontRef>
+        </p:style>
+        <p:txBody>
+          <a:bodyPr rtlCol="0" anchor="ctr"/>
+          <a:lstStyle/>
+          <a:p>
+            <a:pPr algn="ctr"/>
+          </a:p>
+        </p:txBody>
+      </p:sp>
+      <p:sp>
+        <p:nvSpPr>
           <p:cNvPr id="4" name="TextBox 3"/>
           <p:cNvSpPr txBox="1"/>
           <p:nvPr/>
         </p:nvSpPr>
         <p:spPr>
           <a:xfrm>
-            <a:off x="548640" y="777240"/>
-            <a:ext cx="10789920" cy="1005840"/>
+            <a:off x="548640" y="457200"/>
+            <a:ext cx="8229600" cy="320040"/>
           </a:xfrm>
           <a:prstGeom prst="rect">
             <a:avLst/>
@@ -5348,19 +5672,19 @@
           <a:noFill/>
         </p:spPr>
         <p:txBody>
-          <a:bodyPr wrap="square">
+          <a:bodyPr wrap="square" lIns="0" rIns="0" tIns="0" bIns="0">
             <a:spAutoFit/>
           </a:bodyPr>
           <a:lstStyle/>
           <a:p>
             <a:r>
-              <a:rPr sz="3600" b="1" i="0">
-                <a:solidFill>
-                  <a:srgbClr val="E5E2E1"/>
-                </a:solidFill>
-                <a:latin typeface="Arial"/>
-              </a:rPr>
-              <a:t>The commerce layer between a game's items and its players</a:t>
+              <a:rPr sz="1250" b="1" i="0" spc="120">
+                <a:solidFill>
+                  <a:srgbClr val="C3F400"/>
+                </a:solidFill>
+                <a:latin typeface="JetBrains Mono"/>
+              </a:rPr>
+              <a:t>02 // SOLUTION</a:t>
             </a:r>
           </a:p>
         </p:txBody>
@@ -5373,8 +5697,8 @@
         </p:nvSpPr>
         <p:spPr>
           <a:xfrm>
-            <a:off x="548640" y="1645920"/>
-            <a:ext cx="1280160" cy="38100"/>
+            <a:off x="548640" y="749808"/>
+            <a:ext cx="320040" cy="25400"/>
           </a:xfrm>
           <a:prstGeom prst="rect">
             <a:avLst/>
@@ -5385,6 +5709,7 @@
           <a:ln>
             <a:noFill/>
           </a:ln>
+          <a:effectLst/>
         </p:spPr>
         <p:style>
           <a:lnRef idx="1">
@@ -5416,8 +5741,8 @@
         </p:nvSpPr>
         <p:spPr>
           <a:xfrm>
-            <a:off x="548640" y="1828800"/>
-            <a:ext cx="10241280" cy="4206240"/>
+            <a:off x="548640" y="822960"/>
+            <a:ext cx="10607040" cy="914400"/>
           </a:xfrm>
           <a:prstGeom prst="rect">
             <a:avLst/>
@@ -5425,131 +5750,224 @@
           <a:noFill/>
         </p:spPr>
         <p:txBody>
-          <a:bodyPr wrap="square">
+          <a:bodyPr wrap="square" lIns="0" rIns="0" tIns="0" bIns="0">
             <a:spAutoFit/>
           </a:bodyPr>
           <a:lstStyle/>
           <a:p>
+            <a:r>
+              <a:rPr sz="3400" b="1" i="0">
+                <a:solidFill>
+                  <a:srgbClr val="E5E2E1"/>
+                </a:solidFill>
+                <a:latin typeface="Space Grotesk"/>
+              </a:rPr>
+              <a:t>The commerce layer between a game's items and its players</a:t>
+            </a:r>
+          </a:p>
+        </p:txBody>
+      </p:sp>
+      <p:sp>
+        <p:nvSpPr>
+          <p:cNvPr id="7" name="Rectangle 6"/>
+          <p:cNvSpPr/>
+          <p:nvPr/>
+        </p:nvSpPr>
+        <p:spPr>
+          <a:xfrm>
+            <a:off x="548640" y="1664208"/>
+            <a:ext cx="1280160" cy="38100"/>
+          </a:xfrm>
+          <a:prstGeom prst="rect">
+            <a:avLst/>
+          </a:prstGeom>
+          <a:solidFill>
+            <a:srgbClr val="C3F400"/>
+          </a:solidFill>
+          <a:ln>
+            <a:noFill/>
+          </a:ln>
+          <a:effectLst/>
+        </p:spPr>
+        <p:style>
+          <a:lnRef idx="1">
+            <a:schemeClr val="accent1"/>
+          </a:lnRef>
+          <a:fillRef idx="3">
+            <a:schemeClr val="accent1"/>
+          </a:fillRef>
+          <a:effectRef idx="2">
+            <a:schemeClr val="accent1"/>
+          </a:effectRef>
+          <a:fontRef idx="minor">
+            <a:schemeClr val="lt1"/>
+          </a:fontRef>
+        </p:style>
+        <p:txBody>
+          <a:bodyPr rtlCol="0" anchor="ctr"/>
+          <a:lstStyle/>
+          <a:p>
+            <a:pPr algn="ctr"/>
+          </a:p>
+        </p:txBody>
+      </p:sp>
+      <p:sp>
+        <p:nvSpPr>
+          <p:cNvPr id="8" name="TextBox 7"/>
+          <p:cNvSpPr txBox="1"/>
+          <p:nvPr/>
+        </p:nvSpPr>
+        <p:spPr>
+          <a:xfrm>
+            <a:off x="548640" y="1874519"/>
+            <a:ext cx="10424160" cy="4206240"/>
+          </a:xfrm>
+          <a:prstGeom prst="rect">
+            <a:avLst/>
+          </a:prstGeom>
+          <a:noFill/>
+        </p:spPr>
+        <p:txBody>
+          <a:bodyPr wrap="square" lIns="0" rIns="0" tIns="0" bIns="0">
+            <a:spAutoFit/>
+          </a:bodyPr>
+          <a:lstStyle/>
+          <a:p>
             <a:pPr>
+              <a:lnSpc>
+                <a:spcPct val="105000"/>
+              </a:lnSpc>
               <a:spcAft>
                 <a:spcPts val="800"/>
               </a:spcAft>
             </a:pPr>
             <a:r>
-              <a:rPr sz="1700" b="1" i="0">
+              <a:rPr sz="1650" b="1" i="0">
                 <a:solidFill>
                   <a:srgbClr val="C3F400"/>
                 </a:solidFill>
-                <a:latin typeface="Arial"/>
-              </a:rPr>
-              <a:t>‣  </a:t>
-            </a:r>
-            <a:r>
-              <a:rPr sz="1700" b="0" i="0">
+                <a:latin typeface="JetBrains Mono"/>
+              </a:rPr>
+              <a:t>▸  </a:t>
+            </a:r>
+            <a:r>
+              <a:rPr sz="1650" b="0" i="0">
                 <a:solidFill>
                   <a:srgbClr val="E5E2E1"/>
                 </a:solidFill>
-                <a:latin typeface="Arial"/>
+                <a:latin typeface="Space Grotesk"/>
               </a:rPr>
               <a:t>Connect once: pull items from a studio's API, or push via a signed webhook — get a branded shop at /s/[slug].</a:t>
             </a:r>
           </a:p>
           <a:p>
             <a:pPr>
+              <a:lnSpc>
+                <a:spcPct val="105000"/>
+              </a:lnSpc>
               <a:spcAft>
                 <a:spcPts val="800"/>
               </a:spcAft>
             </a:pPr>
             <a:r>
-              <a:rPr sz="1700" b="1" i="0">
+              <a:rPr sz="1650" b="1" i="0">
                 <a:solidFill>
                   <a:srgbClr val="C3F400"/>
                 </a:solidFill>
-                <a:latin typeface="Arial"/>
-              </a:rPr>
-              <a:t>‣  </a:t>
-            </a:r>
-            <a:r>
-              <a:rPr sz="1700" b="0" i="0">
+                <a:latin typeface="JetBrains Mono"/>
+              </a:rPr>
+              <a:t>▸  </a:t>
+            </a:r>
+            <a:r>
+              <a:rPr sz="1650" b="0" i="0">
                 <a:solidFill>
                   <a:srgbClr val="E5E2E1"/>
                 </a:solidFill>
-                <a:latin typeface="Arial"/>
+                <a:latin typeface="Space Grotesk"/>
               </a:rPr>
               <a:t>Pay with any Stellar wallet: one-click sign-in (Freighter today), no password, no account creation.</a:t>
             </a:r>
           </a:p>
           <a:p>
             <a:pPr>
+              <a:lnSpc>
+                <a:spcPct val="105000"/>
+              </a:lnSpc>
               <a:spcAft>
                 <a:spcPts val="800"/>
               </a:spcAft>
             </a:pPr>
             <a:r>
-              <a:rPr sz="1700" b="1" i="0">
+              <a:rPr sz="1650" b="1" i="0">
                 <a:solidFill>
                   <a:srgbClr val="C3F400"/>
                 </a:solidFill>
-                <a:latin typeface="Arial"/>
-              </a:rPr>
-              <a:t>‣  </a:t>
-            </a:r>
-            <a:r>
-              <a:rPr sz="1700" b="0" i="0">
+                <a:latin typeface="JetBrains Mono"/>
+              </a:rPr>
+              <a:t>▸  </a:t>
+            </a:r>
+            <a:r>
+              <a:rPr sz="1650" b="0" i="0">
                 <a:solidFill>
                   <a:srgbClr val="E5E2E1"/>
                 </a:solidFill>
-                <a:latin typeface="Arial"/>
+                <a:latin typeface="Space Grotesk"/>
               </a:rPr>
               <a:t>Every payment verified on-chain before anything moves — destination, asset, amount, memo, never the client's word.</a:t>
             </a:r>
           </a:p>
           <a:p>
             <a:pPr>
+              <a:lnSpc>
+                <a:spcPct val="105000"/>
+              </a:lnSpc>
               <a:spcAft>
                 <a:spcPts val="800"/>
               </a:spcAft>
             </a:pPr>
             <a:r>
-              <a:rPr sz="1700" b="1" i="0">
+              <a:rPr sz="1650" b="1" i="0">
                 <a:solidFill>
                   <a:srgbClr val="C3F400"/>
                 </a:solidFill>
-                <a:latin typeface="Arial"/>
-              </a:rPr>
-              <a:t>‣  </a:t>
-            </a:r>
-            <a:r>
-              <a:rPr sz="1700" b="0" i="0">
+                <a:latin typeface="JetBrains Mono"/>
+              </a:rPr>
+              <a:t>▸  </a:t>
+            </a:r>
+            <a:r>
+              <a:rPr sz="1650" b="0" i="0">
                 <a:solidFill>
                   <a:srgbClr val="E5E2E1"/>
                 </a:solidFill>
-                <a:latin typeface="Arial"/>
+                <a:latin typeface="Space Grotesk"/>
               </a:rPr>
               <a:t>Instant net payout to the studio, automatic item delivery, P2P resale, referrals, and promotions — all in a tamper-evident ledger.</a:t>
             </a:r>
           </a:p>
           <a:p>
             <a:pPr>
+              <a:lnSpc>
+                <a:spcPct val="105000"/>
+              </a:lnSpc>
               <a:spcAft>
                 <a:spcPts val="800"/>
               </a:spcAft>
             </a:pPr>
             <a:r>
-              <a:rPr sz="1700" b="1" i="0">
+              <a:rPr sz="1650" b="1" i="0">
                 <a:solidFill>
                   <a:srgbClr val="C3F400"/>
                 </a:solidFill>
-                <a:latin typeface="Arial"/>
-              </a:rPr>
-              <a:t>‣  </a:t>
-            </a:r>
-            <a:r>
-              <a:rPr sz="1700" b="0" i="0">
+                <a:latin typeface="JetBrains Mono"/>
+              </a:rPr>
+              <a:t>▸  </a:t>
+            </a:r>
+            <a:r>
+              <a:rPr sz="1650" b="0" i="0">
                 <a:solidFill>
                   <a:srgbClr val="E5E2E1"/>
                 </a:solidFill>
-                <a:latin typeface="Arial"/>
+                <a:latin typeface="Space Grotesk"/>
               </a:rPr>
               <a:t>Full studio self-service: branding, payout wallet, API keys, and webhook configuration from one dashboard.</a:t>
             </a:r>
@@ -5558,14 +5976,14 @@
       </p:sp>
       <p:sp>
         <p:nvSpPr>
-          <p:cNvPr id="7" name="TextBox 6"/>
+          <p:cNvPr id="9" name="TextBox 8"/>
           <p:cNvSpPr txBox="1"/>
           <p:nvPr/>
         </p:nvSpPr>
         <p:spPr>
           <a:xfrm>
-            <a:off x="548640" y="6446520"/>
-            <a:ext cx="5486400" cy="320040"/>
+            <a:off x="548640" y="6419088"/>
+            <a:ext cx="6400800" cy="320040"/>
           </a:xfrm>
           <a:prstGeom prst="rect">
             <a:avLst/>
@@ -5573,33 +5991,51 @@
           <a:noFill/>
         </p:spPr>
         <p:txBody>
-          <a:bodyPr wrap="square">
+          <a:bodyPr wrap="square" lIns="0" rIns="0" tIns="0" bIns="0">
             <a:spAutoFit/>
           </a:bodyPr>
           <a:lstStyle/>
           <a:p>
             <a:r>
-              <a:rPr sz="1000" b="0" i="0">
-                <a:solidFill>
-                  <a:srgbClr val="444933"/>
-                </a:solidFill>
-                <a:latin typeface="Consolas"/>
-              </a:rPr>
-              <a:t>xGameFi  //  Stellar commerce infrastructure</a:t>
-            </a:r>
-          </a:p>
-        </p:txBody>
-      </p:sp>
-      <p:sp>
-        <p:nvSpPr>
-          <p:cNvPr id="8" name="TextBox 7"/>
+              <a:rPr sz="1000" b="0" i="1">
+                <a:solidFill>
+                  <a:srgbClr val="8E9379"/>
+                </a:solidFill>
+                <a:latin typeface="JetBrains Mono"/>
+              </a:rPr>
+              <a:t>x</a:t>
+            </a:r>
+            <a:r>
+              <a:rPr sz="1000" b="0" i="1">
+                <a:solidFill>
+                  <a:srgbClr val="ABD600"/>
+                </a:solidFill>
+                <a:latin typeface="JetBrains Mono"/>
+              </a:rPr>
+              <a:t>GameFi</a:t>
+            </a:r>
+            <a:r>
+              <a:rPr sz="1000" b="0" i="0" spc="100">
+                <a:solidFill>
+                  <a:srgbClr val="8E9379"/>
+                </a:solidFill>
+                <a:latin typeface="JetBrains Mono"/>
+              </a:rPr>
+              <a:t>  //  STELLAR COMMERCE INFRASTRUCTURE</a:t>
+            </a:r>
+          </a:p>
+        </p:txBody>
+      </p:sp>
+      <p:sp>
+        <p:nvSpPr>
+          <p:cNvPr id="10" name="TextBox 9"/>
           <p:cNvSpPr txBox="1"/>
           <p:nvPr/>
         </p:nvSpPr>
         <p:spPr>
           <a:xfrm>
-            <a:off x="10607040" y="6446520"/>
-            <a:ext cx="1097280" cy="320040"/>
+            <a:off x="9966960" y="6419088"/>
+            <a:ext cx="1188720" cy="320040"/>
           </a:xfrm>
           <a:prstGeom prst="rect">
             <a:avLst/>
@@ -5607,18 +6043,18 @@
           <a:noFill/>
         </p:spPr>
         <p:txBody>
-          <a:bodyPr wrap="square">
+          <a:bodyPr wrap="square" lIns="0" rIns="0" tIns="0" bIns="0">
             <a:spAutoFit/>
           </a:bodyPr>
           <a:lstStyle/>
           <a:p>
             <a:pPr algn="r"/>
             <a:r>
-              <a:rPr sz="1000" b="0" i="0">
-                <a:solidFill>
-                  <a:srgbClr val="444933"/>
-                </a:solidFill>
-                <a:latin typeface="Consolas"/>
+              <a:rPr sz="1000" b="0" i="0" spc="100">
+                <a:solidFill>
+                  <a:srgbClr val="8E9379"/>
+                </a:solidFill>
+                <a:latin typeface="JetBrains Mono"/>
               </a:rPr>
               <a:t>03 / 10</a:t>
             </a:r>
@@ -5653,48 +6089,14 @@
       <p:grpSpPr/>
       <p:sp>
         <p:nvSpPr>
-          <p:cNvPr id="2" name="TextBox 1"/>
-          <p:cNvSpPr txBox="1"/>
-          <p:nvPr/>
-        </p:nvSpPr>
-        <p:spPr>
-          <a:xfrm>
-            <a:off x="548640" y="411480"/>
-            <a:ext cx="7315200" cy="365760"/>
-          </a:xfrm>
-          <a:prstGeom prst="rect">
-            <a:avLst/>
-          </a:prstGeom>
-          <a:noFill/>
-        </p:spPr>
-        <p:txBody>
-          <a:bodyPr wrap="square">
-            <a:spAutoFit/>
-          </a:bodyPr>
-          <a:lstStyle/>
-          <a:p>
-            <a:r>
-              <a:rPr sz="1300" b="1" i="0">
-                <a:solidFill>
-                  <a:srgbClr val="C3F400"/>
-                </a:solidFill>
-                <a:latin typeface="Consolas"/>
-              </a:rPr>
-              <a:t>03 // DEMO</a:t>
-            </a:r>
-          </a:p>
-        </p:txBody>
-      </p:sp>
-      <p:sp>
-        <p:nvSpPr>
-          <p:cNvPr id="3" name="Rectangle 2"/>
+          <p:cNvPr id="2" name="Rectangle 1"/>
           <p:cNvSpPr/>
           <p:nvPr/>
         </p:nvSpPr>
         <p:spPr>
           <a:xfrm>
-            <a:off x="548640" y="731520"/>
-            <a:ext cx="320040" cy="27940"/>
+            <a:off x="0" y="0"/>
+            <a:ext cx="12192000" cy="31750"/>
           </a:xfrm>
           <a:prstGeom prst="rect">
             <a:avLst/>
@@ -5705,6 +6107,7 @@
           <a:ln>
             <a:noFill/>
           </a:ln>
+          <a:effectLst/>
         </p:spPr>
         <p:style>
           <a:lnRef idx="1">
@@ -5730,14 +6133,58 @@
       </p:sp>
       <p:sp>
         <p:nvSpPr>
+          <p:cNvPr id="3" name="Rectangle 2"/>
+          <p:cNvSpPr/>
+          <p:nvPr/>
+        </p:nvSpPr>
+        <p:spPr>
+          <a:xfrm>
+            <a:off x="548640" y="31750"/>
+            <a:ext cx="640080" cy="31750"/>
+          </a:xfrm>
+          <a:prstGeom prst="rect">
+            <a:avLst/>
+          </a:prstGeom>
+          <a:solidFill>
+            <a:srgbClr val="ABD600"/>
+          </a:solidFill>
+          <a:ln>
+            <a:noFill/>
+          </a:ln>
+          <a:effectLst/>
+        </p:spPr>
+        <p:style>
+          <a:lnRef idx="1">
+            <a:schemeClr val="accent1"/>
+          </a:lnRef>
+          <a:fillRef idx="3">
+            <a:schemeClr val="accent1"/>
+          </a:fillRef>
+          <a:effectRef idx="2">
+            <a:schemeClr val="accent1"/>
+          </a:effectRef>
+          <a:fontRef idx="minor">
+            <a:schemeClr val="lt1"/>
+          </a:fontRef>
+        </p:style>
+        <p:txBody>
+          <a:bodyPr rtlCol="0" anchor="ctr"/>
+          <a:lstStyle/>
+          <a:p>
+            <a:pPr algn="ctr"/>
+          </a:p>
+        </p:txBody>
+      </p:sp>
+      <p:sp>
+        <p:nvSpPr>
           <p:cNvPr id="4" name="TextBox 3"/>
           <p:cNvSpPr txBox="1"/>
           <p:nvPr/>
         </p:nvSpPr>
         <p:spPr>
           <a:xfrm>
-            <a:off x="548640" y="777240"/>
-            <a:ext cx="10789920" cy="1005840"/>
+            <a:off x="548640" y="457200"/>
+            <a:ext cx="8229600" cy="320040"/>
           </a:xfrm>
           <a:prstGeom prst="rect">
             <a:avLst/>
@@ -5745,19 +6192,19 @@
           <a:noFill/>
         </p:spPr>
         <p:txBody>
-          <a:bodyPr wrap="square">
+          <a:bodyPr wrap="square" lIns="0" rIns="0" tIns="0" bIns="0">
             <a:spAutoFit/>
           </a:bodyPr>
           <a:lstStyle/>
           <a:p>
             <a:r>
-              <a:rPr sz="3600" b="1" i="0">
-                <a:solidFill>
-                  <a:srgbClr val="E5E2E1"/>
-                </a:solidFill>
-                <a:latin typeface="Arial"/>
-              </a:rPr>
-              <a:t>Browse → pay → get your item, live</a:t>
+              <a:rPr sz="1250" b="1" i="0" spc="120">
+                <a:solidFill>
+                  <a:srgbClr val="FE00FE"/>
+                </a:solidFill>
+                <a:latin typeface="JetBrains Mono"/>
+              </a:rPr>
+              <a:t>03 // DEMO</a:t>
             </a:r>
           </a:p>
         </p:txBody>
@@ -5770,7 +6217,85 @@
         </p:nvSpPr>
         <p:spPr>
           <a:xfrm>
-            <a:off x="548640" y="1645920"/>
+            <a:off x="548640" y="749808"/>
+            <a:ext cx="320040" cy="25400"/>
+          </a:xfrm>
+          <a:prstGeom prst="rect">
+            <a:avLst/>
+          </a:prstGeom>
+          <a:solidFill>
+            <a:srgbClr val="FE00FE"/>
+          </a:solidFill>
+          <a:ln>
+            <a:noFill/>
+          </a:ln>
+          <a:effectLst/>
+        </p:spPr>
+        <p:style>
+          <a:lnRef idx="1">
+            <a:schemeClr val="accent1"/>
+          </a:lnRef>
+          <a:fillRef idx="3">
+            <a:schemeClr val="accent1"/>
+          </a:fillRef>
+          <a:effectRef idx="2">
+            <a:schemeClr val="accent1"/>
+          </a:effectRef>
+          <a:fontRef idx="minor">
+            <a:schemeClr val="lt1"/>
+          </a:fontRef>
+        </p:style>
+        <p:txBody>
+          <a:bodyPr rtlCol="0" anchor="ctr"/>
+          <a:lstStyle/>
+          <a:p>
+            <a:pPr algn="ctr"/>
+          </a:p>
+        </p:txBody>
+      </p:sp>
+      <p:sp>
+        <p:nvSpPr>
+          <p:cNvPr id="6" name="TextBox 5"/>
+          <p:cNvSpPr txBox="1"/>
+          <p:nvPr/>
+        </p:nvSpPr>
+        <p:spPr>
+          <a:xfrm>
+            <a:off x="548640" y="822960"/>
+            <a:ext cx="10607040" cy="914400"/>
+          </a:xfrm>
+          <a:prstGeom prst="rect">
+            <a:avLst/>
+          </a:prstGeom>
+          <a:noFill/>
+        </p:spPr>
+        <p:txBody>
+          <a:bodyPr wrap="square" lIns="0" rIns="0" tIns="0" bIns="0">
+            <a:spAutoFit/>
+          </a:bodyPr>
+          <a:lstStyle/>
+          <a:p>
+            <a:r>
+              <a:rPr sz="3400" b="1" i="0">
+                <a:solidFill>
+                  <a:srgbClr val="E5E2E1"/>
+                </a:solidFill>
+                <a:latin typeface="Space Grotesk"/>
+              </a:rPr>
+              <a:t>Browse → pay → get your item, live</a:t>
+            </a:r>
+          </a:p>
+        </p:txBody>
+      </p:sp>
+      <p:sp>
+        <p:nvSpPr>
+          <p:cNvPr id="7" name="Rectangle 6"/>
+          <p:cNvSpPr/>
+          <p:nvPr/>
+        </p:nvSpPr>
+        <p:spPr>
+          <a:xfrm>
+            <a:off x="548640" y="1664208"/>
             <a:ext cx="1280160" cy="38100"/>
           </a:xfrm>
           <a:prstGeom prst="rect">
@@ -5782,6 +6307,7 @@
           <a:ln>
             <a:noFill/>
           </a:ln>
+          <a:effectLst/>
         </p:spPr>
         <p:style>
           <a:lnRef idx="1">
@@ -5807,14 +6333,14 @@
       </p:sp>
       <p:sp>
         <p:nvSpPr>
-          <p:cNvPr id="6" name="TextBox 5"/>
+          <p:cNvPr id="8" name="TextBox 7"/>
           <p:cNvSpPr txBox="1"/>
           <p:nvPr/>
         </p:nvSpPr>
         <p:spPr>
           <a:xfrm>
-            <a:off x="548640" y="1828800"/>
-            <a:ext cx="10241280" cy="4206240"/>
+            <a:off x="548640" y="1874519"/>
+            <a:ext cx="10424160" cy="4206240"/>
           </a:xfrm>
           <a:prstGeom prst="rect">
             <a:avLst/>
@@ -5822,131 +6348,146 @@
           <a:noFill/>
         </p:spPr>
         <p:txBody>
-          <a:bodyPr wrap="square">
+          <a:bodyPr wrap="square" lIns="0" rIns="0" tIns="0" bIns="0">
             <a:spAutoFit/>
           </a:bodyPr>
           <a:lstStyle/>
           <a:p>
             <a:pPr>
+              <a:lnSpc>
+                <a:spcPct val="105000"/>
+              </a:lnSpc>
               <a:spcAft>
                 <a:spcPts val="800"/>
               </a:spcAft>
             </a:pPr>
             <a:r>
-              <a:rPr sz="1700" b="1" i="0">
+              <a:rPr sz="1650" b="1" i="0">
                 <a:solidFill>
                   <a:srgbClr val="C3F400"/>
                 </a:solidFill>
-                <a:latin typeface="Arial"/>
-              </a:rPr>
-              <a:t>‣  </a:t>
-            </a:r>
-            <a:r>
-              <a:rPr sz="1700" b="0" i="0">
+                <a:latin typeface="JetBrains Mono"/>
+              </a:rPr>
+              <a:t>▸  </a:t>
+            </a:r>
+            <a:r>
+              <a:rPr sz="1650" b="0" i="0">
                 <a:solidFill>
                   <a:srgbClr val="E5E2E1"/>
                 </a:solidFill>
-                <a:latin typeface="Arial"/>
+                <a:latin typeface="Space Grotesk"/>
               </a:rPr>
               <a:t>Open the Gridlock Games storefront at /s/gridlock — branded per studio.</a:t>
             </a:r>
           </a:p>
           <a:p>
             <a:pPr>
+              <a:lnSpc>
+                <a:spcPct val="105000"/>
+              </a:lnSpc>
               <a:spcAft>
                 <a:spcPts val="800"/>
               </a:spcAft>
             </a:pPr>
             <a:r>
-              <a:rPr sz="1700" b="1" i="0">
+              <a:rPr sz="1650" b="1" i="0">
                 <a:solidFill>
                   <a:srgbClr val="C3F400"/>
                 </a:solidFill>
-                <a:latin typeface="Arial"/>
-              </a:rPr>
-              <a:t>‣  </a:t>
-            </a:r>
-            <a:r>
-              <a:rPr sz="1700" b="0" i="0">
+                <a:latin typeface="JetBrains Mono"/>
+              </a:rPr>
+              <a:t>▸  </a:t>
+            </a:r>
+            <a:r>
+              <a:rPr sz="1650" b="0" i="0">
                 <a:solidFill>
                   <a:srgbClr val="E5E2E1"/>
                 </a:solidFill>
-                <a:latin typeface="Arial"/>
+                <a:latin typeface="Space Grotesk"/>
               </a:rPr>
               <a:t>Connect a wallet, sign in with one click — player session, no password.</a:t>
             </a:r>
           </a:p>
           <a:p>
             <a:pPr>
+              <a:lnSpc>
+                <a:spcPct val="105000"/>
+              </a:lnSpc>
               <a:spcAft>
                 <a:spcPts val="800"/>
               </a:spcAft>
             </a:pPr>
             <a:r>
-              <a:rPr sz="1700" b="1" i="0">
+              <a:rPr sz="1650" b="1" i="0">
                 <a:solidFill>
                   <a:srgbClr val="C3F400"/>
                 </a:solidFill>
-                <a:latin typeface="Arial"/>
-              </a:rPr>
-              <a:t>‣  </a:t>
-            </a:r>
-            <a:r>
-              <a:rPr sz="1700" b="0" i="0">
+                <a:latin typeface="JetBrains Mono"/>
+              </a:rPr>
+              <a:t>▸  </a:t>
+            </a:r>
+            <a:r>
+              <a:rPr sz="1650" b="0" i="0">
                 <a:solidFill>
                   <a:srgbClr val="E5E2E1"/>
                 </a:solidFill>
-                <a:latin typeface="Arial"/>
+                <a:latin typeface="Space Grotesk"/>
               </a:rPr>
               <a:t>Pick the Sword Skin @ 1 USDT — checkout renders a QR + one-tap pay button.</a:t>
             </a:r>
           </a:p>
           <a:p>
             <a:pPr>
+              <a:lnSpc>
+                <a:spcPct val="105000"/>
+              </a:lnSpc>
               <a:spcAft>
                 <a:spcPts val="800"/>
               </a:spcAft>
             </a:pPr>
             <a:r>
-              <a:rPr sz="1700" b="1" i="0">
+              <a:rPr sz="1650" b="1" i="0">
                 <a:solidFill>
                   <a:srgbClr val="C3F400"/>
                 </a:solidFill>
-                <a:latin typeface="Arial"/>
-              </a:rPr>
-              <a:t>‣  </a:t>
-            </a:r>
-            <a:r>
-              <a:rPr sz="1700" b="0" i="0">
+                <a:latin typeface="JetBrains Mono"/>
+              </a:rPr>
+              <a:t>▸  </a:t>
+            </a:r>
+            <a:r>
+              <a:rPr sz="1650" b="0" i="0">
                 <a:solidFill>
                   <a:srgbClr val="E5E2E1"/>
                 </a:solidFill>
-                <a:latin typeface="Arial"/>
+                <a:latin typeface="Space Grotesk"/>
               </a:rPr>
               <a:t>Player pays → platform verifies on Stellar → Order PAID → payout + delivery fire.</a:t>
             </a:r>
           </a:p>
           <a:p>
             <a:pPr>
+              <a:lnSpc>
+                <a:spcPct val="105000"/>
+              </a:lnSpc>
               <a:spcAft>
                 <a:spcPts val="800"/>
               </a:spcAft>
             </a:pPr>
             <a:r>
-              <a:rPr sz="1700" b="1" i="0">
+              <a:rPr sz="1650" b="1" i="0">
                 <a:solidFill>
                   <a:srgbClr val="C3F400"/>
                 </a:solidFill>
-                <a:latin typeface="Arial"/>
-              </a:rPr>
-              <a:t>‣  </a:t>
-            </a:r>
-            <a:r>
-              <a:rPr sz="1700" b="0" i="0">
+                <a:latin typeface="JetBrains Mono"/>
+              </a:rPr>
+              <a:t>▸  </a:t>
+            </a:r>
+            <a:r>
+              <a:rPr sz="1650" b="0" i="0">
                 <a:solidFill>
                   <a:srgbClr val="E5E2E1"/>
                 </a:solidFill>
-                <a:latin typeface="Arial"/>
+                <a:latin typeface="Space Grotesk"/>
               </a:rPr>
               <a:t>Game grants the item → live status feed shows “payment in → item delivered” in real time.</a:t>
             </a:r>
@@ -5955,14 +6496,87 @@
       </p:sp>
       <p:sp>
         <p:nvSpPr>
-          <p:cNvPr id="7" name="TextBox 6"/>
+          <p:cNvPr id="9" name="Freeform 8"/>
+          <p:cNvSpPr/>
+          <p:nvPr/>
+        </p:nvSpPr>
+        <p:spPr>
+          <a:xfrm>
+            <a:off x="548640" y="5257800"/>
+            <a:ext cx="10424160" cy="777240"/>
+          </a:xfrm>
+          <a:custGeom>
+            <a:avLst/>
+            <a:gdLst/>
+            <a:ahLst/>
+            <a:cxnLst/>
+            <a:rect l="l" t="t" r="r" b="b"/>
+            <a:pathLst>
+              <a:path w="10424160" h="777240">
+                <a:moveTo>
+                  <a:pt x="0" y="0"/>
+                </a:moveTo>
+                <a:lnTo>
+                  <a:pt x="10424160" y="0"/>
+                </a:lnTo>
+                <a:lnTo>
+                  <a:pt x="10424160" y="521208"/>
+                </a:lnTo>
+                <a:lnTo>
+                  <a:pt x="10168128" y="777240"/>
+                </a:lnTo>
+                <a:lnTo>
+                  <a:pt x="0" y="777240"/>
+                </a:lnTo>
+                <a:lnTo>
+                  <a:pt x="0" y="0"/>
+                </a:lnTo>
+                <a:close/>
+              </a:path>
+            </a:pathLst>
+          </a:custGeom>
+          <a:solidFill>
+            <a:srgbClr val="1C1B1B"/>
+          </a:solidFill>
+          <a:ln w="15875">
+            <a:solidFill>
+              <a:srgbClr val="FE00FE"/>
+            </a:solidFill>
+          </a:ln>
+          <a:effectLst/>
+        </p:spPr>
+        <p:style>
+          <a:lnRef idx="1">
+            <a:schemeClr val="accent1"/>
+          </a:lnRef>
+          <a:fillRef idx="3">
+            <a:schemeClr val="accent1"/>
+          </a:fillRef>
+          <a:effectRef idx="2">
+            <a:schemeClr val="accent1"/>
+          </a:effectRef>
+          <a:fontRef idx="minor">
+            <a:schemeClr val="lt1"/>
+          </a:fontRef>
+        </p:style>
+        <p:txBody>
+          <a:bodyPr rtlCol="0" anchor="ctr"/>
+          <a:lstStyle/>
+          <a:p>
+            <a:pPr algn="ctr"/>
+          </a:p>
+        </p:txBody>
+      </p:sp>
+      <p:sp>
+        <p:nvSpPr>
+          <p:cNvPr id="10" name="TextBox 9"/>
           <p:cNvSpPr txBox="1"/>
           <p:nvPr/>
         </p:nvSpPr>
         <p:spPr>
           <a:xfrm>
-            <a:off x="548640" y="5394960"/>
-            <a:ext cx="10058400" cy="457200"/>
+            <a:off x="868680" y="5440680"/>
+            <a:ext cx="9875520" cy="457200"/>
           </a:xfrm>
           <a:prstGeom prst="rect">
             <a:avLst/>
@@ -5970,33 +6584,33 @@
           <a:noFill/>
         </p:spPr>
         <p:txBody>
-          <a:bodyPr wrap="square">
+          <a:bodyPr wrap="square" lIns="0" rIns="0" tIns="0" bIns="0">
             <a:spAutoFit/>
           </a:bodyPr>
           <a:lstStyle/>
           <a:p>
             <a:r>
-              <a:rPr sz="1300" b="0" i="1">
+              <a:rPr sz="1250" b="0" i="0" spc="60">
                 <a:solidFill>
                   <a:srgbClr val="FE00FE"/>
                 </a:solidFill>
-                <a:latin typeface="Consolas"/>
-              </a:rPr>
-              <a:t>[Demo video placeholder — 60-90s screen capture: open /s/gridlock → connect → pay → PAID → DELIVERED]</a:t>
-            </a:r>
-          </a:p>
-        </p:txBody>
-      </p:sp>
-      <p:sp>
-        <p:nvSpPr>
-          <p:cNvPr id="8" name="TextBox 7"/>
+                <a:latin typeface="JetBrains Mono"/>
+              </a:rPr>
+              <a:t>[ DEMO VIDEO PLACEHOLDER — 60-90s: open /s/gridlock → connect → pay → PAID → DELIVERED ]</a:t>
+            </a:r>
+          </a:p>
+        </p:txBody>
+      </p:sp>
+      <p:sp>
+        <p:nvSpPr>
+          <p:cNvPr id="11" name="TextBox 10"/>
           <p:cNvSpPr txBox="1"/>
           <p:nvPr/>
         </p:nvSpPr>
         <p:spPr>
           <a:xfrm>
-            <a:off x="548640" y="6446520"/>
-            <a:ext cx="5486400" cy="320040"/>
+            <a:off x="548640" y="6419088"/>
+            <a:ext cx="6400800" cy="320040"/>
           </a:xfrm>
           <a:prstGeom prst="rect">
             <a:avLst/>
@@ -6004,33 +6618,51 @@
           <a:noFill/>
         </p:spPr>
         <p:txBody>
-          <a:bodyPr wrap="square">
+          <a:bodyPr wrap="square" lIns="0" rIns="0" tIns="0" bIns="0">
             <a:spAutoFit/>
           </a:bodyPr>
           <a:lstStyle/>
           <a:p>
             <a:r>
-              <a:rPr sz="1000" b="0" i="0">
-                <a:solidFill>
-                  <a:srgbClr val="444933"/>
-                </a:solidFill>
-                <a:latin typeface="Consolas"/>
-              </a:rPr>
-              <a:t>xGameFi  //  Stellar commerce infrastructure</a:t>
-            </a:r>
-          </a:p>
-        </p:txBody>
-      </p:sp>
-      <p:sp>
-        <p:nvSpPr>
-          <p:cNvPr id="9" name="TextBox 8"/>
+              <a:rPr sz="1000" b="0" i="1">
+                <a:solidFill>
+                  <a:srgbClr val="8E9379"/>
+                </a:solidFill>
+                <a:latin typeface="JetBrains Mono"/>
+              </a:rPr>
+              <a:t>x</a:t>
+            </a:r>
+            <a:r>
+              <a:rPr sz="1000" b="0" i="1">
+                <a:solidFill>
+                  <a:srgbClr val="ABD600"/>
+                </a:solidFill>
+                <a:latin typeface="JetBrains Mono"/>
+              </a:rPr>
+              <a:t>GameFi</a:t>
+            </a:r>
+            <a:r>
+              <a:rPr sz="1000" b="0" i="0" spc="100">
+                <a:solidFill>
+                  <a:srgbClr val="8E9379"/>
+                </a:solidFill>
+                <a:latin typeface="JetBrains Mono"/>
+              </a:rPr>
+              <a:t>  //  STELLAR COMMERCE INFRASTRUCTURE</a:t>
+            </a:r>
+          </a:p>
+        </p:txBody>
+      </p:sp>
+      <p:sp>
+        <p:nvSpPr>
+          <p:cNvPr id="12" name="TextBox 11"/>
           <p:cNvSpPr txBox="1"/>
           <p:nvPr/>
         </p:nvSpPr>
         <p:spPr>
           <a:xfrm>
-            <a:off x="10607040" y="6446520"/>
-            <a:ext cx="1097280" cy="320040"/>
+            <a:off x="9966960" y="6419088"/>
+            <a:ext cx="1188720" cy="320040"/>
           </a:xfrm>
           <a:prstGeom prst="rect">
             <a:avLst/>
@@ -6038,18 +6670,18 @@
           <a:noFill/>
         </p:spPr>
         <p:txBody>
-          <a:bodyPr wrap="square">
+          <a:bodyPr wrap="square" lIns="0" rIns="0" tIns="0" bIns="0">
             <a:spAutoFit/>
           </a:bodyPr>
           <a:lstStyle/>
           <a:p>
             <a:pPr algn="r"/>
             <a:r>
-              <a:rPr sz="1000" b="0" i="0">
-                <a:solidFill>
-                  <a:srgbClr val="444933"/>
-                </a:solidFill>
-                <a:latin typeface="Consolas"/>
+              <a:rPr sz="1000" b="0" i="0" spc="100">
+                <a:solidFill>
+                  <a:srgbClr val="8E9379"/>
+                </a:solidFill>
+                <a:latin typeface="JetBrains Mono"/>
               </a:rPr>
               <a:t>04 / 10</a:t>
             </a:r>
@@ -6084,48 +6716,14 @@
       <p:grpSpPr/>
       <p:sp>
         <p:nvSpPr>
-          <p:cNvPr id="2" name="TextBox 1"/>
-          <p:cNvSpPr txBox="1"/>
-          <p:nvPr/>
-        </p:nvSpPr>
-        <p:spPr>
-          <a:xfrm>
-            <a:off x="548640" y="411480"/>
-            <a:ext cx="7315200" cy="365760"/>
-          </a:xfrm>
-          <a:prstGeom prst="rect">
-            <a:avLst/>
-          </a:prstGeom>
-          <a:noFill/>
-        </p:spPr>
-        <p:txBody>
-          <a:bodyPr wrap="square">
-            <a:spAutoFit/>
-          </a:bodyPr>
-          <a:lstStyle/>
-          <a:p>
-            <a:r>
-              <a:rPr sz="1300" b="1" i="0">
-                <a:solidFill>
-                  <a:srgbClr val="C3F400"/>
-                </a:solidFill>
-                <a:latin typeface="Consolas"/>
-              </a:rPr>
-              <a:t>04 // HOW IT WORKS</a:t>
-            </a:r>
-          </a:p>
-        </p:txBody>
-      </p:sp>
-      <p:sp>
-        <p:nvSpPr>
-          <p:cNvPr id="3" name="Rectangle 2"/>
+          <p:cNvPr id="2" name="Rectangle 1"/>
           <p:cNvSpPr/>
           <p:nvPr/>
         </p:nvSpPr>
         <p:spPr>
           <a:xfrm>
-            <a:off x="548640" y="731520"/>
-            <a:ext cx="320040" cy="27940"/>
+            <a:off x="0" y="0"/>
+            <a:ext cx="12192000" cy="31750"/>
           </a:xfrm>
           <a:prstGeom prst="rect">
             <a:avLst/>
@@ -6136,6 +6734,7 @@
           <a:ln>
             <a:noFill/>
           </a:ln>
+          <a:effectLst/>
         </p:spPr>
         <p:style>
           <a:lnRef idx="1">
@@ -6161,14 +6760,58 @@
       </p:sp>
       <p:sp>
         <p:nvSpPr>
+          <p:cNvPr id="3" name="Rectangle 2"/>
+          <p:cNvSpPr/>
+          <p:nvPr/>
+        </p:nvSpPr>
+        <p:spPr>
+          <a:xfrm>
+            <a:off x="548640" y="31750"/>
+            <a:ext cx="640080" cy="31750"/>
+          </a:xfrm>
+          <a:prstGeom prst="rect">
+            <a:avLst/>
+          </a:prstGeom>
+          <a:solidFill>
+            <a:srgbClr val="ABD600"/>
+          </a:solidFill>
+          <a:ln>
+            <a:noFill/>
+          </a:ln>
+          <a:effectLst/>
+        </p:spPr>
+        <p:style>
+          <a:lnRef idx="1">
+            <a:schemeClr val="accent1"/>
+          </a:lnRef>
+          <a:fillRef idx="3">
+            <a:schemeClr val="accent1"/>
+          </a:fillRef>
+          <a:effectRef idx="2">
+            <a:schemeClr val="accent1"/>
+          </a:effectRef>
+          <a:fontRef idx="minor">
+            <a:schemeClr val="lt1"/>
+          </a:fontRef>
+        </p:style>
+        <p:txBody>
+          <a:bodyPr rtlCol="0" anchor="ctr"/>
+          <a:lstStyle/>
+          <a:p>
+            <a:pPr algn="ctr"/>
+          </a:p>
+        </p:txBody>
+      </p:sp>
+      <p:sp>
+        <p:nvSpPr>
           <p:cNvPr id="4" name="TextBox 3"/>
           <p:cNvSpPr txBox="1"/>
           <p:nvPr/>
         </p:nvSpPr>
         <p:spPr>
           <a:xfrm>
-            <a:off x="548640" y="777240"/>
-            <a:ext cx="10789920" cy="1005840"/>
+            <a:off x="548640" y="457200"/>
+            <a:ext cx="8229600" cy="320040"/>
           </a:xfrm>
           <a:prstGeom prst="rect">
             <a:avLst/>
@@ -6176,19 +6819,19 @@
           <a:noFill/>
         </p:spPr>
         <p:txBody>
-          <a:bodyPr wrap="square">
+          <a:bodyPr wrap="square" lIns="0" rIns="0" tIns="0" bIns="0">
             <a:spAutoFit/>
           </a:bodyPr>
           <a:lstStyle/>
           <a:p>
             <a:r>
-              <a:rPr sz="3600" b="1" i="0">
-                <a:solidFill>
-                  <a:srgbClr val="E5E2E1"/>
-                </a:solidFill>
-                <a:latin typeface="Arial"/>
-              </a:rPr>
-              <a:t>A hands-off pipeline, verified at every step</a:t>
+              <a:rPr sz="1250" b="1" i="0" spc="120">
+                <a:solidFill>
+                  <a:srgbClr val="C3F400"/>
+                </a:solidFill>
+                <a:latin typeface="JetBrains Mono"/>
+              </a:rPr>
+              <a:t>04 // HOW IT WORKS</a:t>
             </a:r>
           </a:p>
         </p:txBody>
@@ -6201,8 +6844,8 @@
         </p:nvSpPr>
         <p:spPr>
           <a:xfrm>
-            <a:off x="548640" y="1645920"/>
-            <a:ext cx="1280160" cy="38100"/>
+            <a:off x="548640" y="749808"/>
+            <a:ext cx="320040" cy="25400"/>
           </a:xfrm>
           <a:prstGeom prst="rect">
             <a:avLst/>
@@ -6213,6 +6856,7 @@
           <a:ln>
             <a:noFill/>
           </a:ln>
+          <a:effectLst/>
         </p:spPr>
         <p:style>
           <a:lnRef idx="1">
@@ -6244,8 +6888,8 @@
         </p:nvSpPr>
         <p:spPr>
           <a:xfrm>
-            <a:off x="548640" y="1828800"/>
-            <a:ext cx="10241280" cy="4206240"/>
+            <a:off x="548640" y="822960"/>
+            <a:ext cx="10607040" cy="914400"/>
           </a:xfrm>
           <a:prstGeom prst="rect">
             <a:avLst/>
@@ -6253,131 +6897,224 @@
           <a:noFill/>
         </p:spPr>
         <p:txBody>
-          <a:bodyPr wrap="square">
+          <a:bodyPr wrap="square" lIns="0" rIns="0" tIns="0" bIns="0">
             <a:spAutoFit/>
           </a:bodyPr>
           <a:lstStyle/>
           <a:p>
+            <a:r>
+              <a:rPr sz="3400" b="1" i="0">
+                <a:solidFill>
+                  <a:srgbClr val="E5E2E1"/>
+                </a:solidFill>
+                <a:latin typeface="Space Grotesk"/>
+              </a:rPr>
+              <a:t>A hands-off pipeline, verified at every step</a:t>
+            </a:r>
+          </a:p>
+        </p:txBody>
+      </p:sp>
+      <p:sp>
+        <p:nvSpPr>
+          <p:cNvPr id="7" name="Rectangle 6"/>
+          <p:cNvSpPr/>
+          <p:nvPr/>
+        </p:nvSpPr>
+        <p:spPr>
+          <a:xfrm>
+            <a:off x="548640" y="1664208"/>
+            <a:ext cx="1280160" cy="38100"/>
+          </a:xfrm>
+          <a:prstGeom prst="rect">
+            <a:avLst/>
+          </a:prstGeom>
+          <a:solidFill>
+            <a:srgbClr val="C3F400"/>
+          </a:solidFill>
+          <a:ln>
+            <a:noFill/>
+          </a:ln>
+          <a:effectLst/>
+        </p:spPr>
+        <p:style>
+          <a:lnRef idx="1">
+            <a:schemeClr val="accent1"/>
+          </a:lnRef>
+          <a:fillRef idx="3">
+            <a:schemeClr val="accent1"/>
+          </a:fillRef>
+          <a:effectRef idx="2">
+            <a:schemeClr val="accent1"/>
+          </a:effectRef>
+          <a:fontRef idx="minor">
+            <a:schemeClr val="lt1"/>
+          </a:fontRef>
+        </p:style>
+        <p:txBody>
+          <a:bodyPr rtlCol="0" anchor="ctr"/>
+          <a:lstStyle/>
+          <a:p>
+            <a:pPr algn="ctr"/>
+          </a:p>
+        </p:txBody>
+      </p:sp>
+      <p:sp>
+        <p:nvSpPr>
+          <p:cNvPr id="8" name="TextBox 7"/>
+          <p:cNvSpPr txBox="1"/>
+          <p:nvPr/>
+        </p:nvSpPr>
+        <p:spPr>
+          <a:xfrm>
+            <a:off x="548640" y="1874519"/>
+            <a:ext cx="10424160" cy="4206240"/>
+          </a:xfrm>
+          <a:prstGeom prst="rect">
+            <a:avLst/>
+          </a:prstGeom>
+          <a:noFill/>
+        </p:spPr>
+        <p:txBody>
+          <a:bodyPr wrap="square" lIns="0" rIns="0" tIns="0" bIns="0">
+            <a:spAutoFit/>
+          </a:bodyPr>
+          <a:lstStyle/>
+          <a:p>
             <a:pPr>
+              <a:lnSpc>
+                <a:spcPct val="105000"/>
+              </a:lnSpc>
               <a:spcAft>
                 <a:spcPts val="800"/>
               </a:spcAft>
             </a:pPr>
             <a:r>
-              <a:rPr sz="1700" b="1" i="0">
+              <a:rPr sz="1650" b="1" i="0">
                 <a:solidFill>
                   <a:srgbClr val="C3F400"/>
                 </a:solidFill>
-                <a:latin typeface="Arial"/>
-              </a:rPr>
-              <a:t>‣  </a:t>
-            </a:r>
-            <a:r>
-              <a:rPr sz="1700" b="0" i="0">
+                <a:latin typeface="JetBrains Mono"/>
+              </a:rPr>
+              <a:t>▸  </a:t>
+            </a:r>
+            <a:r>
+              <a:rPr sz="1650" b="0" i="0">
                 <a:solidFill>
                   <a:srgbClr val="E5E2E1"/>
                 </a:solidFill>
-                <a:latin typeface="Arial"/>
+                <a:latin typeface="Space Grotesk"/>
               </a:rPr>
               <a:t>One deployment, one branded shop per studio — every query scoped by studioId, tenant isolation enforced.</a:t>
             </a:r>
           </a:p>
           <a:p>
             <a:pPr>
+              <a:lnSpc>
+                <a:spcPct val="105000"/>
+              </a:lnSpc>
               <a:spcAft>
                 <a:spcPts val="800"/>
               </a:spcAft>
             </a:pPr>
             <a:r>
-              <a:rPr sz="1700" b="1" i="0">
+              <a:rPr sz="1650" b="1" i="0">
                 <a:solidFill>
                   <a:srgbClr val="C3F400"/>
                 </a:solidFill>
-                <a:latin typeface="Arial"/>
-              </a:rPr>
-              <a:t>‣  </a:t>
-            </a:r>
-            <a:r>
-              <a:rPr sz="1700" b="0" i="0">
+                <a:latin typeface="JetBrains Mono"/>
+              </a:rPr>
+              <a:t>▸  </a:t>
+            </a:r>
+            <a:r>
+              <a:rPr sz="1650" b="0" i="0">
                 <a:solidFill>
                   <a:srgbClr val="E5E2E1"/>
                 </a:solidFill>
-                <a:latin typeface="Arial"/>
+                <a:latin typeface="Space Grotesk"/>
               </a:rPr>
               <a:t>Payments verified, not trusted: nothing advances until Stellar confirms the transaction.</a:t>
             </a:r>
           </a:p>
           <a:p>
             <a:pPr>
+              <a:lnSpc>
+                <a:spcPct val="105000"/>
+              </a:lnSpc>
               <a:spcAft>
                 <a:spcPts val="800"/>
               </a:spcAft>
             </a:pPr>
             <a:r>
-              <a:rPr sz="1700" b="1" i="0">
+              <a:rPr sz="1650" b="1" i="0">
                 <a:solidFill>
                   <a:srgbClr val="C3F400"/>
                 </a:solidFill>
-                <a:latin typeface="Arial"/>
-              </a:rPr>
-              <a:t>‣  </a:t>
-            </a:r>
-            <a:r>
-              <a:rPr sz="1700" b="0" i="0">
+                <a:latin typeface="JetBrains Mono"/>
+              </a:rPr>
+              <a:t>▸  </a:t>
+            </a:r>
+            <a:r>
+              <a:rPr sz="1650" b="0" i="0">
                 <a:solidFill>
                   <a:srgbClr val="E5E2E1"/>
                 </a:solidFill>
-                <a:latin typeface="Arial"/>
+                <a:latin typeface="Space Grotesk"/>
               </a:rPr>
               <a:t>Delivery is automatic and durable — a dropped connection never loses an order; background workers retry.</a:t>
             </a:r>
           </a:p>
           <a:p>
             <a:pPr>
+              <a:lnSpc>
+                <a:spcPct val="105000"/>
+              </a:lnSpc>
               <a:spcAft>
                 <a:spcPts val="800"/>
               </a:spcAft>
             </a:pPr>
             <a:r>
-              <a:rPr sz="1700" b="1" i="0">
+              <a:rPr sz="1650" b="1" i="0">
                 <a:solidFill>
                   <a:srgbClr val="C3F400"/>
                 </a:solidFill>
-                <a:latin typeface="Arial"/>
-              </a:rPr>
-              <a:t>‣  </a:t>
-            </a:r>
-            <a:r>
-              <a:rPr sz="1700" b="0" i="0">
+                <a:latin typeface="JetBrains Mono"/>
+              </a:rPr>
+              <a:t>▸  </a:t>
+            </a:r>
+            <a:r>
+              <a:rPr sz="1650" b="0" i="0">
                 <a:solidFill>
                   <a:srgbClr val="E5E2E1"/>
                 </a:solidFill>
-                <a:latin typeface="Arial"/>
+                <a:latin typeface="Space Grotesk"/>
               </a:rPr>
               <a:t>One source of truth for money: fees, payouts, refunds, and settlement state live in one tested module.</a:t>
             </a:r>
           </a:p>
           <a:p>
             <a:pPr>
+              <a:lnSpc>
+                <a:spcPct val="105000"/>
+              </a:lnSpc>
               <a:spcAft>
                 <a:spcPts val="800"/>
               </a:spcAft>
             </a:pPr>
             <a:r>
-              <a:rPr sz="1700" b="1" i="0">
+              <a:rPr sz="1650" b="1" i="0">
                 <a:solidFill>
                   <a:srgbClr val="C3F400"/>
                 </a:solidFill>
-                <a:latin typeface="Arial"/>
-              </a:rPr>
-              <a:t>‣  </a:t>
-            </a:r>
-            <a:r>
-              <a:rPr sz="1700" b="0" i="0">
+                <a:latin typeface="JetBrains Mono"/>
+              </a:rPr>
+              <a:t>▸  </a:t>
+            </a:r>
+            <a:r>
+              <a:rPr sz="1650" b="0" i="0">
                 <a:solidFill>
                   <a:srgbClr val="E5E2E1"/>
                 </a:solidFill>
-                <a:latin typeface="Arial"/>
+                <a:latin typeface="Space Grotesk"/>
               </a:rPr>
               <a:t>Every sale, payout, resale, and refund is written to an append-only ledger a studio can audit.</a:t>
             </a:r>
@@ -6386,14 +7123,14 @@
       </p:sp>
       <p:sp>
         <p:nvSpPr>
-          <p:cNvPr id="7" name="TextBox 6"/>
+          <p:cNvPr id="9" name="TextBox 8"/>
           <p:cNvSpPr txBox="1"/>
           <p:nvPr/>
         </p:nvSpPr>
         <p:spPr>
           <a:xfrm>
-            <a:off x="548640" y="6446520"/>
-            <a:ext cx="5486400" cy="320040"/>
+            <a:off x="548640" y="6419088"/>
+            <a:ext cx="6400800" cy="320040"/>
           </a:xfrm>
           <a:prstGeom prst="rect">
             <a:avLst/>
@@ -6401,33 +7138,51 @@
           <a:noFill/>
         </p:spPr>
         <p:txBody>
-          <a:bodyPr wrap="square">
+          <a:bodyPr wrap="square" lIns="0" rIns="0" tIns="0" bIns="0">
             <a:spAutoFit/>
           </a:bodyPr>
           <a:lstStyle/>
           <a:p>
             <a:r>
-              <a:rPr sz="1000" b="0" i="0">
-                <a:solidFill>
-                  <a:srgbClr val="444933"/>
-                </a:solidFill>
-                <a:latin typeface="Consolas"/>
-              </a:rPr>
-              <a:t>xGameFi  //  Stellar commerce infrastructure</a:t>
-            </a:r>
-          </a:p>
-        </p:txBody>
-      </p:sp>
-      <p:sp>
-        <p:nvSpPr>
-          <p:cNvPr id="8" name="TextBox 7"/>
+              <a:rPr sz="1000" b="0" i="1">
+                <a:solidFill>
+                  <a:srgbClr val="8E9379"/>
+                </a:solidFill>
+                <a:latin typeface="JetBrains Mono"/>
+              </a:rPr>
+              <a:t>x</a:t>
+            </a:r>
+            <a:r>
+              <a:rPr sz="1000" b="0" i="1">
+                <a:solidFill>
+                  <a:srgbClr val="ABD600"/>
+                </a:solidFill>
+                <a:latin typeface="JetBrains Mono"/>
+              </a:rPr>
+              <a:t>GameFi</a:t>
+            </a:r>
+            <a:r>
+              <a:rPr sz="1000" b="0" i="0" spc="100">
+                <a:solidFill>
+                  <a:srgbClr val="8E9379"/>
+                </a:solidFill>
+                <a:latin typeface="JetBrains Mono"/>
+              </a:rPr>
+              <a:t>  //  STELLAR COMMERCE INFRASTRUCTURE</a:t>
+            </a:r>
+          </a:p>
+        </p:txBody>
+      </p:sp>
+      <p:sp>
+        <p:nvSpPr>
+          <p:cNvPr id="10" name="TextBox 9"/>
           <p:cNvSpPr txBox="1"/>
           <p:nvPr/>
         </p:nvSpPr>
         <p:spPr>
           <a:xfrm>
-            <a:off x="10607040" y="6446520"/>
-            <a:ext cx="1097280" cy="320040"/>
+            <a:off x="9966960" y="6419088"/>
+            <a:ext cx="1188720" cy="320040"/>
           </a:xfrm>
           <a:prstGeom prst="rect">
             <a:avLst/>
@@ -6435,18 +7190,18 @@
           <a:noFill/>
         </p:spPr>
         <p:txBody>
-          <a:bodyPr wrap="square">
+          <a:bodyPr wrap="square" lIns="0" rIns="0" tIns="0" bIns="0">
             <a:spAutoFit/>
           </a:bodyPr>
           <a:lstStyle/>
           <a:p>
             <a:pPr algn="r"/>
             <a:r>
-              <a:rPr sz="1000" b="0" i="0">
-                <a:solidFill>
-                  <a:srgbClr val="444933"/>
-                </a:solidFill>
-                <a:latin typeface="Consolas"/>
+              <a:rPr sz="1000" b="0" i="0" spc="100">
+                <a:solidFill>
+                  <a:srgbClr val="8E9379"/>
+                </a:solidFill>
+                <a:latin typeface="JetBrains Mono"/>
               </a:rPr>
               <a:t>05 / 10</a:t>
             </a:r>
@@ -6481,35 +7236,45 @@
       <p:grpSpPr/>
       <p:sp>
         <p:nvSpPr>
-          <p:cNvPr id="2" name="TextBox 1"/>
-          <p:cNvSpPr txBox="1"/>
+          <p:cNvPr id="2" name="Rectangle 1"/>
+          <p:cNvSpPr/>
           <p:nvPr/>
         </p:nvSpPr>
         <p:spPr>
           <a:xfrm>
-            <a:off x="548640" y="411480"/>
-            <a:ext cx="7315200" cy="365760"/>
-          </a:xfrm>
-          <a:prstGeom prst="rect">
-            <a:avLst/>
-          </a:prstGeom>
-          <a:noFill/>
-        </p:spPr>
-        <p:txBody>
-          <a:bodyPr wrap="square">
-            <a:spAutoFit/>
-          </a:bodyPr>
-          <a:lstStyle/>
-          <a:p>
-            <a:r>
-              <a:rPr sz="1300" b="1" i="0">
-                <a:solidFill>
-                  <a:srgbClr val="7DF4FF"/>
-                </a:solidFill>
-                <a:latin typeface="Consolas"/>
-              </a:rPr>
-              <a:t>05 // IMPACT</a:t>
-            </a:r>
+            <a:off x="0" y="0"/>
+            <a:ext cx="12192000" cy="31750"/>
+          </a:xfrm>
+          <a:prstGeom prst="rect">
+            <a:avLst/>
+          </a:prstGeom>
+          <a:solidFill>
+            <a:srgbClr val="C3F400"/>
+          </a:solidFill>
+          <a:ln>
+            <a:noFill/>
+          </a:ln>
+          <a:effectLst/>
+        </p:spPr>
+        <p:style>
+          <a:lnRef idx="1">
+            <a:schemeClr val="accent1"/>
+          </a:lnRef>
+          <a:fillRef idx="3">
+            <a:schemeClr val="accent1"/>
+          </a:fillRef>
+          <a:effectRef idx="2">
+            <a:schemeClr val="accent1"/>
+          </a:effectRef>
+          <a:fontRef idx="minor">
+            <a:schemeClr val="lt1"/>
+          </a:fontRef>
+        </p:style>
+        <p:txBody>
+          <a:bodyPr rtlCol="0" anchor="ctr"/>
+          <a:lstStyle/>
+          <a:p>
+            <a:pPr algn="ctr"/>
           </a:p>
         </p:txBody>
       </p:sp>
@@ -6521,8 +7286,86 @@
         </p:nvSpPr>
         <p:spPr>
           <a:xfrm>
-            <a:off x="548640" y="731520"/>
-            <a:ext cx="320040" cy="27940"/>
+            <a:off x="548640" y="31750"/>
+            <a:ext cx="640080" cy="31750"/>
+          </a:xfrm>
+          <a:prstGeom prst="rect">
+            <a:avLst/>
+          </a:prstGeom>
+          <a:solidFill>
+            <a:srgbClr val="ABD600"/>
+          </a:solidFill>
+          <a:ln>
+            <a:noFill/>
+          </a:ln>
+          <a:effectLst/>
+        </p:spPr>
+        <p:style>
+          <a:lnRef idx="1">
+            <a:schemeClr val="accent1"/>
+          </a:lnRef>
+          <a:fillRef idx="3">
+            <a:schemeClr val="accent1"/>
+          </a:fillRef>
+          <a:effectRef idx="2">
+            <a:schemeClr val="accent1"/>
+          </a:effectRef>
+          <a:fontRef idx="minor">
+            <a:schemeClr val="lt1"/>
+          </a:fontRef>
+        </p:style>
+        <p:txBody>
+          <a:bodyPr rtlCol="0" anchor="ctr"/>
+          <a:lstStyle/>
+          <a:p>
+            <a:pPr algn="ctr"/>
+          </a:p>
+        </p:txBody>
+      </p:sp>
+      <p:sp>
+        <p:nvSpPr>
+          <p:cNvPr id="4" name="TextBox 3"/>
+          <p:cNvSpPr txBox="1"/>
+          <p:nvPr/>
+        </p:nvSpPr>
+        <p:spPr>
+          <a:xfrm>
+            <a:off x="548640" y="457200"/>
+            <a:ext cx="8229600" cy="320040"/>
+          </a:xfrm>
+          <a:prstGeom prst="rect">
+            <a:avLst/>
+          </a:prstGeom>
+          <a:noFill/>
+        </p:spPr>
+        <p:txBody>
+          <a:bodyPr wrap="square" lIns="0" rIns="0" tIns="0" bIns="0">
+            <a:spAutoFit/>
+          </a:bodyPr>
+          <a:lstStyle/>
+          <a:p>
+            <a:r>
+              <a:rPr sz="1250" b="1" i="0" spc="120">
+                <a:solidFill>
+                  <a:srgbClr val="7DF4FF"/>
+                </a:solidFill>
+                <a:latin typeface="JetBrains Mono"/>
+              </a:rPr>
+              <a:t>05 // IMPACT</a:t>
+            </a:r>
+          </a:p>
+        </p:txBody>
+      </p:sp>
+      <p:sp>
+        <p:nvSpPr>
+          <p:cNvPr id="5" name="Rectangle 4"/>
+          <p:cNvSpPr/>
+          <p:nvPr/>
+        </p:nvSpPr>
+        <p:spPr>
+          <a:xfrm>
+            <a:off x="548640" y="749808"/>
+            <a:ext cx="320040" cy="25400"/>
           </a:xfrm>
           <a:prstGeom prst="rect">
             <a:avLst/>
@@ -6533,6 +7376,7 @@
           <a:ln>
             <a:noFill/>
           </a:ln>
+          <a:effectLst/>
         </p:spPr>
         <p:style>
           <a:lnRef idx="1">
@@ -6558,14 +7402,14 @@
       </p:sp>
       <p:sp>
         <p:nvSpPr>
-          <p:cNvPr id="4" name="TextBox 3"/>
+          <p:cNvPr id="6" name="TextBox 5"/>
           <p:cNvSpPr txBox="1"/>
           <p:nvPr/>
         </p:nvSpPr>
         <p:spPr>
           <a:xfrm>
-            <a:off x="548640" y="777240"/>
-            <a:ext cx="10789920" cy="1005840"/>
+            <a:off x="548640" y="822960"/>
+            <a:ext cx="10607040" cy="914400"/>
           </a:xfrm>
           <a:prstGeom prst="rect">
             <a:avLst/>
@@ -6573,17 +7417,17 @@
           <a:noFill/>
         </p:spPr>
         <p:txBody>
-          <a:bodyPr wrap="square">
+          <a:bodyPr wrap="square" lIns="0" rIns="0" tIns="0" bIns="0">
             <a:spAutoFit/>
           </a:bodyPr>
           <a:lstStyle/>
           <a:p>
             <a:r>
-              <a:rPr sz="3600" b="1" i="0">
+              <a:rPr sz="3400" b="1" i="0">
                 <a:solidFill>
                   <a:srgbClr val="E5E2E1"/>
                 </a:solidFill>
-                <a:latin typeface="Arial"/>
+                <a:latin typeface="Space Grotesk"/>
               </a:rPr>
               <a:t>Impact to the Stellar ecosystem</a:t>
             </a:r>
@@ -6592,13 +7436,13 @@
       </p:sp>
       <p:sp>
         <p:nvSpPr>
-          <p:cNvPr id="5" name="Rectangle 4"/>
+          <p:cNvPr id="7" name="Rectangle 6"/>
           <p:cNvSpPr/>
           <p:nvPr/>
         </p:nvSpPr>
         <p:spPr>
           <a:xfrm>
-            <a:off x="548640" y="1645920"/>
+            <a:off x="548640" y="1664208"/>
             <a:ext cx="1280160" cy="38100"/>
           </a:xfrm>
           <a:prstGeom prst="rect">
@@ -6610,6 +7454,7 @@
           <a:ln>
             <a:noFill/>
           </a:ln>
+          <a:effectLst/>
         </p:spPr>
         <p:style>
           <a:lnRef idx="1">
@@ -6635,14 +7480,14 @@
       </p:sp>
       <p:sp>
         <p:nvSpPr>
-          <p:cNvPr id="6" name="TextBox 5"/>
+          <p:cNvPr id="8" name="TextBox 7"/>
           <p:cNvSpPr txBox="1"/>
           <p:nvPr/>
         </p:nvSpPr>
         <p:spPr>
           <a:xfrm>
-            <a:off x="548640" y="1828800"/>
-            <a:ext cx="10241280" cy="4206240"/>
+            <a:off x="548640" y="1874519"/>
+            <a:ext cx="10424160" cy="4206240"/>
           </a:xfrm>
           <a:prstGeom prst="rect">
             <a:avLst/>
@@ -6650,147 +7495,162 @@
           <a:noFill/>
         </p:spPr>
         <p:txBody>
-          <a:bodyPr wrap="square">
+          <a:bodyPr wrap="square" lIns="0" rIns="0" tIns="0" bIns="0">
             <a:spAutoFit/>
           </a:bodyPr>
           <a:lstStyle/>
           <a:p>
             <a:pPr>
+              <a:lnSpc>
+                <a:spcPct val="105000"/>
+              </a:lnSpc>
               <a:spcAft>
                 <a:spcPts val="800"/>
               </a:spcAft>
             </a:pPr>
             <a:r>
-              <a:rPr sz="1700" b="1" i="0">
-                <a:solidFill>
-                  <a:srgbClr val="C3F400"/>
-                </a:solidFill>
-                <a:latin typeface="Arial"/>
-              </a:rPr>
-              <a:t>‣  </a:t>
-            </a:r>
-            <a:r>
-              <a:rPr sz="1700" b="0" i="0">
+              <a:rPr sz="1650" b="1" i="0">
+                <a:solidFill>
+                  <a:srgbClr val="7DF4FF"/>
+                </a:solidFill>
+                <a:latin typeface="JetBrains Mono"/>
+              </a:rPr>
+              <a:t>▸  </a:t>
+            </a:r>
+            <a:r>
+              <a:rPr sz="1650" b="0" i="0">
                 <a:solidFill>
                   <a:srgbClr val="E5E2E1"/>
                 </a:solidFill>
-                <a:latin typeface="Arial"/>
+                <a:latin typeface="Space Grotesk"/>
               </a:rPr>
               <a:t>Every purchase, payout, P2P escrow release, and referral reward is a real, verified Stellar transaction — not a wrapper over a centralized ledger.</a:t>
             </a:r>
           </a:p>
           <a:p>
             <a:pPr>
+              <a:lnSpc>
+                <a:spcPct val="105000"/>
+              </a:lnSpc>
               <a:spcAft>
                 <a:spcPts val="800"/>
               </a:spcAft>
             </a:pPr>
             <a:r>
-              <a:rPr sz="1700" b="1" i="0">
-                <a:solidFill>
-                  <a:srgbClr val="C3F400"/>
-                </a:solidFill>
-                <a:latin typeface="Arial"/>
-              </a:rPr>
-              <a:t>‣  </a:t>
-            </a:r>
-            <a:r>
-              <a:rPr sz="1700" b="0" i="0">
+              <a:rPr sz="1650" b="1" i="0">
+                <a:solidFill>
+                  <a:srgbClr val="7DF4FF"/>
+                </a:solidFill>
+                <a:latin typeface="JetBrains Mono"/>
+              </a:rPr>
+              <a:t>▸  </a:t>
+            </a:r>
+            <a:r>
+              <a:rPr sz="1650" b="0" i="0">
                 <a:solidFill>
                   <a:srgbClr val="E5E2E1"/>
                 </a:solidFill>
-                <a:latin typeface="Arial"/>
-              </a:rPr>
-              <a:t>A repeatable, non-speculative, retail-volume use case: microtransaction-scale in-game commerce running on Horizon/RPC at production traffic patterns.</a:t>
+                <a:latin typeface="Space Grotesk"/>
+              </a:rPr>
+              <a:t>A repeatable, non-speculative, retail-volume use case: microtransaction-scale in-game commerce on Horizon/RPC at production traffic patterns.</a:t>
             </a:r>
           </a:p>
           <a:p>
             <a:pPr>
+              <a:lnSpc>
+                <a:spcPct val="105000"/>
+              </a:lnSpc>
               <a:spcAft>
                 <a:spcPts val="800"/>
               </a:spcAft>
             </a:pPr>
             <a:r>
-              <a:rPr sz="1700" b="1" i="0">
-                <a:solidFill>
-                  <a:srgbClr val="C3F400"/>
-                </a:solidFill>
-                <a:latin typeface="Arial"/>
-              </a:rPr>
-              <a:t>‣  </a:t>
-            </a:r>
-            <a:r>
-              <a:rPr sz="1700" b="0" i="0">
+              <a:rPr sz="1650" b="1" i="0">
+                <a:solidFill>
+                  <a:srgbClr val="7DF4FF"/>
+                </a:solidFill>
+                <a:latin typeface="JetBrains Mono"/>
+              </a:rPr>
+              <a:t>▸  </a:t>
+            </a:r>
+            <a:r>
+              <a:rPr sz="1650" b="0" i="0">
                 <a:solidFill>
                   <a:srgbClr val="E5E2E1"/>
                 </a:solidFill>
-                <a:latin typeface="Arial"/>
+                <a:latin typeface="Space Grotesk"/>
               </a:rPr>
               <a:t>Expands Stellar's footprint in gaming beyond wallets and DEX trading into everyday consumer payments.</a:t>
             </a:r>
           </a:p>
           <a:p>
             <a:pPr>
+              <a:lnSpc>
+                <a:spcPct val="105000"/>
+              </a:lnSpc>
               <a:spcAft>
                 <a:spcPts val="800"/>
               </a:spcAft>
             </a:pPr>
             <a:r>
-              <a:rPr sz="1700" b="1" i="0">
-                <a:solidFill>
-                  <a:srgbClr val="C3F400"/>
-                </a:solidFill>
-                <a:latin typeface="Arial"/>
-              </a:rPr>
-              <a:t>‣  </a:t>
-            </a:r>
-            <a:r>
-              <a:rPr sz="1700" b="0" i="0">
+              <a:rPr sz="1650" b="1" i="0">
+                <a:solidFill>
+                  <a:srgbClr val="7DF4FF"/>
+                </a:solidFill>
+                <a:latin typeface="JetBrains Mono"/>
+              </a:rPr>
+              <a:t>▸  </a:t>
+            </a:r>
+            <a:r>
+              <a:rPr sz="1650" b="0" i="0">
                 <a:solidFill>
                   <a:srgbClr val="E5E2E1"/>
                 </a:solidFill>
-                <a:latin typeface="Arial"/>
+                <a:latin typeface="Space Grotesk"/>
               </a:rPr>
               <a:t>Near-instant settlement and a materially lower take-rate than card processors or platform stores (often 30% + weeks-long holds).</a:t>
             </a:r>
           </a:p>
           <a:p>
             <a:pPr>
+              <a:lnSpc>
+                <a:spcPct val="105000"/>
+              </a:lnSpc>
               <a:spcAft>
                 <a:spcPts val="800"/>
               </a:spcAft>
             </a:pPr>
             <a:r>
-              <a:rPr sz="1700" b="1" i="0">
-                <a:solidFill>
-                  <a:srgbClr val="C3F400"/>
-                </a:solidFill>
-                <a:latin typeface="Arial"/>
-              </a:rPr>
-              <a:t>‣  </a:t>
-            </a:r>
-            <a:r>
-              <a:rPr sz="1700" b="0" i="0">
+              <a:rPr sz="1650" b="1" i="0">
+                <a:solidFill>
+                  <a:srgbClr val="7DF4FF"/>
+                </a:solidFill>
+                <a:latin typeface="JetBrains Mono"/>
+              </a:rPr>
+              <a:t>▸  </a:t>
+            </a:r>
+            <a:r>
+              <a:rPr sz="1650" b="0" i="0">
                 <a:solidFill>
                   <a:srgbClr val="E5E2E1"/>
                 </a:solidFill>
-                <a:latin typeface="Arial"/>
-              </a:rPr>
-              <a:t>Every studio onboarded multiplies on-chain transaction volume — the business model (a per-transaction platform fee) is directly aligned with growing that volume.</a:t>
-            </a:r>
-          </a:p>
-        </p:txBody>
-      </p:sp>
-      <p:sp>
-        <p:nvSpPr>
-          <p:cNvPr id="7" name="TextBox 6"/>
+                <a:latin typeface="Space Grotesk"/>
+              </a:rPr>
+              <a:t>Every studio onboarded multiplies on-chain volume — a per-transaction platform fee aligns our growth with the network's.</a:t>
+            </a:r>
+          </a:p>
+        </p:txBody>
+      </p:sp>
+      <p:sp>
+        <p:nvSpPr>
+          <p:cNvPr id="9" name="TextBox 8"/>
           <p:cNvSpPr txBox="1"/>
           <p:nvPr/>
         </p:nvSpPr>
         <p:spPr>
           <a:xfrm>
-            <a:off x="548640" y="6446520"/>
-            <a:ext cx="5486400" cy="320040"/>
+            <a:off x="548640" y="6419088"/>
+            <a:ext cx="6400800" cy="320040"/>
           </a:xfrm>
           <a:prstGeom prst="rect">
             <a:avLst/>
@@ -6798,33 +7658,51 @@
           <a:noFill/>
         </p:spPr>
         <p:txBody>
-          <a:bodyPr wrap="square">
+          <a:bodyPr wrap="square" lIns="0" rIns="0" tIns="0" bIns="0">
             <a:spAutoFit/>
           </a:bodyPr>
           <a:lstStyle/>
           <a:p>
             <a:r>
-              <a:rPr sz="1000" b="0" i="0">
-                <a:solidFill>
-                  <a:srgbClr val="444933"/>
-                </a:solidFill>
-                <a:latin typeface="Consolas"/>
-              </a:rPr>
-              <a:t>xGameFi  //  Stellar commerce infrastructure</a:t>
-            </a:r>
-          </a:p>
-        </p:txBody>
-      </p:sp>
-      <p:sp>
-        <p:nvSpPr>
-          <p:cNvPr id="8" name="TextBox 7"/>
+              <a:rPr sz="1000" b="0" i="1">
+                <a:solidFill>
+                  <a:srgbClr val="8E9379"/>
+                </a:solidFill>
+                <a:latin typeface="JetBrains Mono"/>
+              </a:rPr>
+              <a:t>x</a:t>
+            </a:r>
+            <a:r>
+              <a:rPr sz="1000" b="0" i="1">
+                <a:solidFill>
+                  <a:srgbClr val="ABD600"/>
+                </a:solidFill>
+                <a:latin typeface="JetBrains Mono"/>
+              </a:rPr>
+              <a:t>GameFi</a:t>
+            </a:r>
+            <a:r>
+              <a:rPr sz="1000" b="0" i="0" spc="100">
+                <a:solidFill>
+                  <a:srgbClr val="8E9379"/>
+                </a:solidFill>
+                <a:latin typeface="JetBrains Mono"/>
+              </a:rPr>
+              <a:t>  //  STELLAR COMMERCE INFRASTRUCTURE</a:t>
+            </a:r>
+          </a:p>
+        </p:txBody>
+      </p:sp>
+      <p:sp>
+        <p:nvSpPr>
+          <p:cNvPr id="10" name="TextBox 9"/>
           <p:cNvSpPr txBox="1"/>
           <p:nvPr/>
         </p:nvSpPr>
         <p:spPr>
           <a:xfrm>
-            <a:off x="10607040" y="6446520"/>
-            <a:ext cx="1097280" cy="320040"/>
+            <a:off x="9966960" y="6419088"/>
+            <a:ext cx="1188720" cy="320040"/>
           </a:xfrm>
           <a:prstGeom prst="rect">
             <a:avLst/>
@@ -6832,18 +7710,18 @@
           <a:noFill/>
         </p:spPr>
         <p:txBody>
-          <a:bodyPr wrap="square">
+          <a:bodyPr wrap="square" lIns="0" rIns="0" tIns="0" bIns="0">
             <a:spAutoFit/>
           </a:bodyPr>
           <a:lstStyle/>
           <a:p>
             <a:pPr algn="r"/>
             <a:r>
-              <a:rPr sz="1000" b="0" i="0">
-                <a:solidFill>
-                  <a:srgbClr val="444933"/>
-                </a:solidFill>
-                <a:latin typeface="Consolas"/>
+              <a:rPr sz="1000" b="0" i="0" spc="100">
+                <a:solidFill>
+                  <a:srgbClr val="8E9379"/>
+                </a:solidFill>
+                <a:latin typeface="JetBrains Mono"/>
               </a:rPr>
               <a:t>06 / 10</a:t>
             </a:r>
@@ -6878,35 +7756,45 @@
       <p:grpSpPr/>
       <p:sp>
         <p:nvSpPr>
-          <p:cNvPr id="2" name="TextBox 1"/>
-          <p:cNvSpPr txBox="1"/>
+          <p:cNvPr id="2" name="Rectangle 1"/>
+          <p:cNvSpPr/>
           <p:nvPr/>
         </p:nvSpPr>
         <p:spPr>
           <a:xfrm>
-            <a:off x="548640" y="411480"/>
-            <a:ext cx="7315200" cy="365760"/>
-          </a:xfrm>
-          <a:prstGeom prst="rect">
-            <a:avLst/>
-          </a:prstGeom>
-          <a:noFill/>
-        </p:spPr>
-        <p:txBody>
-          <a:bodyPr wrap="square">
-            <a:spAutoFit/>
-          </a:bodyPr>
-          <a:lstStyle/>
-          <a:p>
-            <a:r>
-              <a:rPr sz="1300" b="1" i="0">
-                <a:solidFill>
-                  <a:srgbClr val="7DF4FF"/>
-                </a:solidFill>
-                <a:latin typeface="Consolas"/>
-              </a:rPr>
-              <a:t>06 // ECOSYSTEM PLAN</a:t>
-            </a:r>
+            <a:off x="0" y="0"/>
+            <a:ext cx="12192000" cy="31750"/>
+          </a:xfrm>
+          <a:prstGeom prst="rect">
+            <a:avLst/>
+          </a:prstGeom>
+          <a:solidFill>
+            <a:srgbClr val="C3F400"/>
+          </a:solidFill>
+          <a:ln>
+            <a:noFill/>
+          </a:ln>
+          <a:effectLst/>
+        </p:spPr>
+        <p:style>
+          <a:lnRef idx="1">
+            <a:schemeClr val="accent1"/>
+          </a:lnRef>
+          <a:fillRef idx="3">
+            <a:schemeClr val="accent1"/>
+          </a:fillRef>
+          <a:effectRef idx="2">
+            <a:schemeClr val="accent1"/>
+          </a:effectRef>
+          <a:fontRef idx="minor">
+            <a:schemeClr val="lt1"/>
+          </a:fontRef>
+        </p:style>
+        <p:txBody>
+          <a:bodyPr rtlCol="0" anchor="ctr"/>
+          <a:lstStyle/>
+          <a:p>
+            <a:pPr algn="ctr"/>
           </a:p>
         </p:txBody>
       </p:sp>
@@ -6918,8 +7806,86 @@
         </p:nvSpPr>
         <p:spPr>
           <a:xfrm>
-            <a:off x="548640" y="731520"/>
-            <a:ext cx="320040" cy="27940"/>
+            <a:off x="548640" y="31750"/>
+            <a:ext cx="640080" cy="31750"/>
+          </a:xfrm>
+          <a:prstGeom prst="rect">
+            <a:avLst/>
+          </a:prstGeom>
+          <a:solidFill>
+            <a:srgbClr val="ABD600"/>
+          </a:solidFill>
+          <a:ln>
+            <a:noFill/>
+          </a:ln>
+          <a:effectLst/>
+        </p:spPr>
+        <p:style>
+          <a:lnRef idx="1">
+            <a:schemeClr val="accent1"/>
+          </a:lnRef>
+          <a:fillRef idx="3">
+            <a:schemeClr val="accent1"/>
+          </a:fillRef>
+          <a:effectRef idx="2">
+            <a:schemeClr val="accent1"/>
+          </a:effectRef>
+          <a:fontRef idx="minor">
+            <a:schemeClr val="lt1"/>
+          </a:fontRef>
+        </p:style>
+        <p:txBody>
+          <a:bodyPr rtlCol="0" anchor="ctr"/>
+          <a:lstStyle/>
+          <a:p>
+            <a:pPr algn="ctr"/>
+          </a:p>
+        </p:txBody>
+      </p:sp>
+      <p:sp>
+        <p:nvSpPr>
+          <p:cNvPr id="4" name="TextBox 3"/>
+          <p:cNvSpPr txBox="1"/>
+          <p:nvPr/>
+        </p:nvSpPr>
+        <p:spPr>
+          <a:xfrm>
+            <a:off x="548640" y="457200"/>
+            <a:ext cx="8229600" cy="320040"/>
+          </a:xfrm>
+          <a:prstGeom prst="rect">
+            <a:avLst/>
+          </a:prstGeom>
+          <a:noFill/>
+        </p:spPr>
+        <p:txBody>
+          <a:bodyPr wrap="square" lIns="0" rIns="0" tIns="0" bIns="0">
+            <a:spAutoFit/>
+          </a:bodyPr>
+          <a:lstStyle/>
+          <a:p>
+            <a:r>
+              <a:rPr sz="1250" b="1" i="0" spc="120">
+                <a:solidFill>
+                  <a:srgbClr val="7DF4FF"/>
+                </a:solidFill>
+                <a:latin typeface="JetBrains Mono"/>
+              </a:rPr>
+              <a:t>06 // ECOSYSTEM PLAN</a:t>
+            </a:r>
+          </a:p>
+        </p:txBody>
+      </p:sp>
+      <p:sp>
+        <p:nvSpPr>
+          <p:cNvPr id="5" name="Rectangle 4"/>
+          <p:cNvSpPr/>
+          <p:nvPr/>
+        </p:nvSpPr>
+        <p:spPr>
+          <a:xfrm>
+            <a:off x="548640" y="749808"/>
+            <a:ext cx="320040" cy="25400"/>
           </a:xfrm>
           <a:prstGeom prst="rect">
             <a:avLst/>
@@ -6930,6 +7896,7 @@
           <a:ln>
             <a:noFill/>
           </a:ln>
+          <a:effectLst/>
         </p:spPr>
         <p:style>
           <a:lnRef idx="1">
@@ -6955,14 +7922,14 @@
       </p:sp>
       <p:sp>
         <p:nvSpPr>
-          <p:cNvPr id="4" name="TextBox 3"/>
+          <p:cNvPr id="6" name="TextBox 5"/>
           <p:cNvSpPr txBox="1"/>
           <p:nvPr/>
         </p:nvSpPr>
         <p:spPr>
           <a:xfrm>
-            <a:off x="548640" y="777240"/>
-            <a:ext cx="10789920" cy="1005840"/>
+            <a:off x="548640" y="822960"/>
+            <a:ext cx="10607040" cy="914400"/>
           </a:xfrm>
           <a:prstGeom prst="rect">
             <a:avLst/>
@@ -6970,17 +7937,17 @@
           <a:noFill/>
         </p:spPr>
         <p:txBody>
-          <a:bodyPr wrap="square">
+          <a:bodyPr wrap="square" lIns="0" rIns="0" tIns="0" bIns="0">
             <a:spAutoFit/>
           </a:bodyPr>
           <a:lstStyle/>
           <a:p>
             <a:r>
-              <a:rPr sz="3600" b="1" i="0">
+              <a:rPr sz="3400" b="1" i="0">
                 <a:solidFill>
                   <a:srgbClr val="E5E2E1"/>
                 </a:solidFill>
-                <a:latin typeface="Arial"/>
+                <a:latin typeface="Space Grotesk"/>
               </a:rPr>
               <a:t>Plan to integrate the Stellar ecosystem</a:t>
             </a:r>
@@ -6989,13 +7956,13 @@
       </p:sp>
       <p:sp>
         <p:nvSpPr>
-          <p:cNvPr id="5" name="Rectangle 4"/>
+          <p:cNvPr id="7" name="Rectangle 6"/>
           <p:cNvSpPr/>
           <p:nvPr/>
         </p:nvSpPr>
         <p:spPr>
           <a:xfrm>
-            <a:off x="548640" y="1645920"/>
+            <a:off x="548640" y="1664208"/>
             <a:ext cx="1280160" cy="38100"/>
           </a:xfrm>
           <a:prstGeom prst="rect">
@@ -7007,6 +7974,7 @@
           <a:ln>
             <a:noFill/>
           </a:ln>
+          <a:effectLst/>
         </p:spPr>
         <p:style>
           <a:lnRef idx="1">
@@ -7032,14 +8000,14 @@
       </p:sp>
       <p:sp>
         <p:nvSpPr>
-          <p:cNvPr id="6" name="TextBox 5"/>
+          <p:cNvPr id="8" name="TextBox 7"/>
           <p:cNvSpPr txBox="1"/>
           <p:nvPr/>
         </p:nvSpPr>
         <p:spPr>
           <a:xfrm>
             <a:off x="548640" y="1828800"/>
-            <a:ext cx="10241280" cy="4206240"/>
+            <a:ext cx="10424160" cy="4206240"/>
           </a:xfrm>
           <a:prstGeom prst="rect">
             <a:avLst/>
@@ -7047,156 +8015,174 @@
           <a:noFill/>
         </p:spPr>
         <p:txBody>
-          <a:bodyPr wrap="square">
+          <a:bodyPr wrap="square" lIns="0" rIns="0" tIns="0" bIns="0">
             <a:spAutoFit/>
           </a:bodyPr>
           <a:lstStyle/>
           <a:p>
             <a:pPr>
+              <a:lnSpc>
+                <a:spcPct val="105000"/>
+              </a:lnSpc>
               <a:spcAft>
                 <a:spcPts val="600"/>
               </a:spcAft>
             </a:pPr>
             <a:r>
-              <a:rPr sz="1550" b="1" i="0">
-                <a:solidFill>
-                  <a:srgbClr val="C3F400"/>
-                </a:solidFill>
-                <a:latin typeface="Arial"/>
-              </a:rPr>
-              <a:t>‣  </a:t>
-            </a:r>
-            <a:r>
-              <a:rPr sz="1550" b="0" i="0">
+              <a:rPr sz="1500" b="1" i="0">
+                <a:solidFill>
+                  <a:srgbClr val="7DF4FF"/>
+                </a:solidFill>
+                <a:latin typeface="JetBrains Mono"/>
+              </a:rPr>
+              <a:t>▸  </a:t>
+            </a:r>
+            <a:r>
+              <a:rPr sz="1500" b="0" i="0">
                 <a:solidFill>
                   <a:srgbClr val="E5E2E1"/>
                 </a:solidFill>
-                <a:latin typeface="Arial"/>
+                <a:latin typeface="Space Grotesk"/>
               </a:rPr>
               <a:t>Fiat on-ramp via SEP-24 anchors (+SEP-38 quotes): pay with a card, inline at checkout — no crypto required to start.</a:t>
             </a:r>
           </a:p>
           <a:p>
             <a:pPr>
+              <a:lnSpc>
+                <a:spcPct val="105000"/>
+              </a:lnSpc>
               <a:spcAft>
                 <a:spcPts val="600"/>
               </a:spcAft>
             </a:pPr>
             <a:r>
-              <a:rPr sz="1550" b="1" i="0">
-                <a:solidFill>
-                  <a:srgbClr val="C3F400"/>
-                </a:solidFill>
-                <a:latin typeface="Arial"/>
-              </a:rPr>
-              <a:t>‣  </a:t>
-            </a:r>
-            <a:r>
-              <a:rPr sz="1550" b="0" i="0">
+              <a:rPr sz="1500" b="1" i="0">
+                <a:solidFill>
+                  <a:srgbClr val="7DF4FF"/>
+                </a:solidFill>
+                <a:latin typeface="JetBrains Mono"/>
+              </a:rPr>
+              <a:t>▸  </a:t>
+            </a:r>
+            <a:r>
+              <a:rPr sz="1500" b="0" i="0">
                 <a:solidFill>
                   <a:srgbClr val="E5E2E1"/>
                 </a:solidFill>
-                <a:latin typeface="Arial"/>
+                <a:latin typeface="Space Grotesk"/>
               </a:rPr>
               <a:t>Passkey / smart-wallet onboarding (WebAuthn signers + Passkey Kit) with Launchtube-sponsored fees — zero seed phrase, zero XLM to begin.</a:t>
             </a:r>
           </a:p>
           <a:p>
             <a:pPr>
+              <a:lnSpc>
+                <a:spcPct val="105000"/>
+              </a:lnSpc>
               <a:spcAft>
                 <a:spcPts val="600"/>
               </a:spcAft>
             </a:pPr>
             <a:r>
-              <a:rPr sz="1550" b="1" i="0">
-                <a:solidFill>
-                  <a:srgbClr val="C3F400"/>
-                </a:solidFill>
-                <a:latin typeface="Arial"/>
-              </a:rPr>
-              <a:t>‣  </a:t>
-            </a:r>
-            <a:r>
-              <a:rPr sz="1550" b="0" i="0">
+              <a:rPr sz="1500" b="1" i="0">
+                <a:solidFill>
+                  <a:srgbClr val="7DF4FF"/>
+                </a:solidFill>
+                <a:latin typeface="JetBrains Mono"/>
+              </a:rPr>
+              <a:t>▸  </a:t>
+            </a:r>
+            <a:r>
+              <a:rPr sz="1500" b="0" i="0">
                 <a:solidFill>
                   <a:srgbClr val="E5E2E1"/>
                 </a:solidFill>
-                <a:latin typeface="Arial"/>
+                <a:latin typeface="Space Grotesk"/>
               </a:rPr>
               <a:t>Multi-anchor, multi-stablecoin support (USDC, EURC, MGUSD via the Stellar Anchor Directory) beyond one demo asset.</a:t>
             </a:r>
           </a:p>
           <a:p>
             <a:pPr>
+              <a:lnSpc>
+                <a:spcPct val="105000"/>
+              </a:lnSpc>
               <a:spcAft>
                 <a:spcPts val="600"/>
               </a:spcAft>
             </a:pPr>
             <a:r>
-              <a:rPr sz="1550" b="1" i="0">
-                <a:solidFill>
-                  <a:srgbClr val="C3F400"/>
-                </a:solidFill>
-                <a:latin typeface="Arial"/>
-              </a:rPr>
-              <a:t>‣  </a:t>
-            </a:r>
-            <a:r>
-              <a:rPr sz="1550" b="0" i="0">
+              <a:rPr sz="1500" b="1" i="0">
+                <a:solidFill>
+                  <a:srgbClr val="7DF4FF"/>
+                </a:solidFill>
+                <a:latin typeface="JetBrains Mono"/>
+              </a:rPr>
+              <a:t>▸  </a:t>
+            </a:r>
+            <a:r>
+              <a:rPr sz="1500" b="0" i="0">
                 <a:solidFill>
                   <a:srgbClr val="E5E2E1"/>
                 </a:solidFill>
-                <a:latin typeface="Arial"/>
+                <a:latin typeface="Space Grotesk"/>
               </a:rPr>
               <a:t>On-chain item ownership via Soroban NFTs (SEP-50-track, OpenZeppelin Stellar Contracts) for trustless P2P trading.</a:t>
             </a:r>
           </a:p>
           <a:p>
             <a:pPr>
+              <a:lnSpc>
+                <a:spcPct val="105000"/>
+              </a:lnSpc>
               <a:spcAft>
                 <a:spcPts val="600"/>
               </a:spcAft>
             </a:pPr>
             <a:r>
-              <a:rPr sz="1550" b="1" i="0">
-                <a:solidFill>
-                  <a:srgbClr val="C3F400"/>
-                </a:solidFill>
-                <a:latin typeface="Arial"/>
-              </a:rPr>
-              <a:t>‣  </a:t>
-            </a:r>
-            <a:r>
-              <a:rPr sz="1550" b="0" i="0">
+              <a:rPr sz="1500" b="1" i="0">
+                <a:solidFill>
+                  <a:srgbClr val="7DF4FF"/>
+                </a:solidFill>
+                <a:latin typeface="JetBrains Mono"/>
+              </a:rPr>
+              <a:t>▸  </a:t>
+            </a:r>
+            <a:r>
+              <a:rPr sz="1500" b="0" i="0">
                 <a:solidFill>
                   <a:srgbClr val="E5E2E1"/>
                 </a:solidFill>
-                <a:latin typeface="Arial"/>
+                <a:latin typeface="Space Grotesk"/>
               </a:rPr>
               <a:t>Multi-asset checkout via path payments / DEX (Soroswap) — pay with any Stellar asset already held.</a:t>
             </a:r>
           </a:p>
           <a:p>
             <a:pPr>
+              <a:lnSpc>
+                <a:spcPct val="105000"/>
+              </a:lnSpc>
               <a:spcAft>
                 <a:spcPts val="600"/>
               </a:spcAft>
             </a:pPr>
             <a:r>
-              <a:rPr sz="1550" b="1" i="0">
-                <a:solidFill>
-                  <a:srgbClr val="C3F400"/>
-                </a:solidFill>
-                <a:latin typeface="Arial"/>
-              </a:rPr>
-              <a:t>‣  </a:t>
-            </a:r>
-            <a:r>
-              <a:rPr sz="1550" b="0" i="0">
+              <a:rPr sz="1500" b="1" i="0">
+                <a:solidFill>
+                  <a:srgbClr val="7DF4FF"/>
+                </a:solidFill>
+                <a:latin typeface="JetBrains Mono"/>
+              </a:rPr>
+              <a:t>▸  </a:t>
+            </a:r>
+            <a:r>
+              <a:rPr sz="1500" b="0" i="0">
                 <a:solidFill>
                   <a:srgbClr val="E5E2E1"/>
                 </a:solidFill>
-                <a:latin typeface="Arial"/>
+                <a:latin typeface="Space Grotesk"/>
               </a:rPr>
               <a:t>SEP-10 Web Authentication + SEP-31 cross-border studio payouts for full ecosystem interoperability.</a:t>
             </a:r>
@@ -7205,14 +8191,87 @@
       </p:sp>
       <p:sp>
         <p:nvSpPr>
-          <p:cNvPr id="7" name="TextBox 6"/>
+          <p:cNvPr id="9" name="Freeform 8"/>
+          <p:cNvSpPr/>
+          <p:nvPr/>
+        </p:nvSpPr>
+        <p:spPr>
+          <a:xfrm>
+            <a:off x="548640" y="5760720"/>
+            <a:ext cx="10424160" cy="457200"/>
+          </a:xfrm>
+          <a:custGeom>
+            <a:avLst/>
+            <a:gdLst/>
+            <a:ahLst/>
+            <a:cxnLst/>
+            <a:rect l="l" t="t" r="r" b="b"/>
+            <a:pathLst>
+              <a:path w="10424160" h="457200">
+                <a:moveTo>
+                  <a:pt x="0" y="0"/>
+                </a:moveTo>
+                <a:lnTo>
+                  <a:pt x="10424160" y="0"/>
+                </a:lnTo>
+                <a:lnTo>
+                  <a:pt x="10424160" y="256032"/>
+                </a:lnTo>
+                <a:lnTo>
+                  <a:pt x="10222992" y="457200"/>
+                </a:lnTo>
+                <a:lnTo>
+                  <a:pt x="0" y="457200"/>
+                </a:lnTo>
+                <a:lnTo>
+                  <a:pt x="0" y="0"/>
+                </a:lnTo>
+                <a:close/>
+              </a:path>
+            </a:pathLst>
+          </a:custGeom>
+          <a:solidFill>
+            <a:srgbClr val="0E0E0E"/>
+          </a:solidFill>
+          <a:ln w="12700">
+            <a:solidFill>
+              <a:srgbClr val="444933"/>
+            </a:solidFill>
+          </a:ln>
+          <a:effectLst/>
+        </p:spPr>
+        <p:style>
+          <a:lnRef idx="1">
+            <a:schemeClr val="accent1"/>
+          </a:lnRef>
+          <a:fillRef idx="3">
+            <a:schemeClr val="accent1"/>
+          </a:fillRef>
+          <a:effectRef idx="2">
+            <a:schemeClr val="accent1"/>
+          </a:effectRef>
+          <a:fontRef idx="minor">
+            <a:schemeClr val="lt1"/>
+          </a:fontRef>
+        </p:style>
+        <p:txBody>
+          <a:bodyPr rtlCol="0" anchor="ctr"/>
+          <a:lstStyle/>
+          <a:p>
+            <a:pPr algn="ctr"/>
+          </a:p>
+        </p:txBody>
+      </p:sp>
+      <p:sp>
+        <p:nvSpPr>
+          <p:cNvPr id="10" name="TextBox 9"/>
           <p:cNvSpPr txBox="1"/>
           <p:nvPr/>
         </p:nvSpPr>
         <p:spPr>
           <a:xfrm>
-            <a:off x="548640" y="5806440"/>
-            <a:ext cx="10058400" cy="457200"/>
+            <a:off x="822960" y="5870448"/>
+            <a:ext cx="9875520" cy="320040"/>
           </a:xfrm>
           <a:prstGeom prst="rect">
             <a:avLst/>
@@ -7220,33 +8279,33 @@
           <a:noFill/>
         </p:spPr>
         <p:txBody>
-          <a:bodyPr wrap="square">
+          <a:bodyPr wrap="square" lIns="0" rIns="0" tIns="0" bIns="0">
             <a:spAutoFit/>
           </a:bodyPr>
           <a:lstStyle/>
           <a:p>
             <a:r>
-              <a:rPr sz="1200" b="0" i="0">
+              <a:rPr sz="1100" b="0" i="0" spc="60">
                 <a:solidFill>
                   <a:srgbClr val="C3F400"/>
                 </a:solidFill>
-                <a:latin typeface="Consolas"/>
-              </a:rPr>
-              <a:t>Full detail + reference links: GitHub issue #137 — Growth &amp; Stellar Ecosystem Integration Report</a:t>
-            </a:r>
-          </a:p>
-        </p:txBody>
-      </p:sp>
-      <p:sp>
-        <p:nvSpPr>
-          <p:cNvPr id="8" name="TextBox 7"/>
+                <a:latin typeface="JetBrains Mono"/>
+              </a:rPr>
+              <a:t>FULL DETAIL + REFERENCE LINKS  //  GITHUB ISSUE #137 — GROWTH &amp; STELLAR ECOSYSTEM INTEGRATION REPORT</a:t>
+            </a:r>
+          </a:p>
+        </p:txBody>
+      </p:sp>
+      <p:sp>
+        <p:nvSpPr>
+          <p:cNvPr id="11" name="TextBox 10"/>
           <p:cNvSpPr txBox="1"/>
           <p:nvPr/>
         </p:nvSpPr>
         <p:spPr>
           <a:xfrm>
-            <a:off x="548640" y="6446520"/>
-            <a:ext cx="5486400" cy="320040"/>
+            <a:off x="548640" y="6419088"/>
+            <a:ext cx="6400800" cy="320040"/>
           </a:xfrm>
           <a:prstGeom prst="rect">
             <a:avLst/>
@@ -7254,33 +8313,51 @@
           <a:noFill/>
         </p:spPr>
         <p:txBody>
-          <a:bodyPr wrap="square">
+          <a:bodyPr wrap="square" lIns="0" rIns="0" tIns="0" bIns="0">
             <a:spAutoFit/>
           </a:bodyPr>
           <a:lstStyle/>
           <a:p>
             <a:r>
-              <a:rPr sz="1000" b="0" i="0">
-                <a:solidFill>
-                  <a:srgbClr val="444933"/>
-                </a:solidFill>
-                <a:latin typeface="Consolas"/>
-              </a:rPr>
-              <a:t>xGameFi  //  Stellar commerce infrastructure</a:t>
-            </a:r>
-          </a:p>
-        </p:txBody>
-      </p:sp>
-      <p:sp>
-        <p:nvSpPr>
-          <p:cNvPr id="9" name="TextBox 8"/>
+              <a:rPr sz="1000" b="0" i="1">
+                <a:solidFill>
+                  <a:srgbClr val="8E9379"/>
+                </a:solidFill>
+                <a:latin typeface="JetBrains Mono"/>
+              </a:rPr>
+              <a:t>x</a:t>
+            </a:r>
+            <a:r>
+              <a:rPr sz="1000" b="0" i="1">
+                <a:solidFill>
+                  <a:srgbClr val="ABD600"/>
+                </a:solidFill>
+                <a:latin typeface="JetBrains Mono"/>
+              </a:rPr>
+              <a:t>GameFi</a:t>
+            </a:r>
+            <a:r>
+              <a:rPr sz="1000" b="0" i="0" spc="100">
+                <a:solidFill>
+                  <a:srgbClr val="8E9379"/>
+                </a:solidFill>
+                <a:latin typeface="JetBrains Mono"/>
+              </a:rPr>
+              <a:t>  //  STELLAR COMMERCE INFRASTRUCTURE</a:t>
+            </a:r>
+          </a:p>
+        </p:txBody>
+      </p:sp>
+      <p:sp>
+        <p:nvSpPr>
+          <p:cNvPr id="12" name="TextBox 11"/>
           <p:cNvSpPr txBox="1"/>
           <p:nvPr/>
         </p:nvSpPr>
         <p:spPr>
           <a:xfrm>
-            <a:off x="10607040" y="6446520"/>
-            <a:ext cx="1097280" cy="320040"/>
+            <a:off x="9966960" y="6419088"/>
+            <a:ext cx="1188720" cy="320040"/>
           </a:xfrm>
           <a:prstGeom prst="rect">
             <a:avLst/>
@@ -7288,18 +8365,18 @@
           <a:noFill/>
         </p:spPr>
         <p:txBody>
-          <a:bodyPr wrap="square">
+          <a:bodyPr wrap="square" lIns="0" rIns="0" tIns="0" bIns="0">
             <a:spAutoFit/>
           </a:bodyPr>
           <a:lstStyle/>
           <a:p>
             <a:pPr algn="r"/>
             <a:r>
-              <a:rPr sz="1000" b="0" i="0">
-                <a:solidFill>
-                  <a:srgbClr val="444933"/>
-                </a:solidFill>
-                <a:latin typeface="Consolas"/>
+              <a:rPr sz="1000" b="0" i="0" spc="100">
+                <a:solidFill>
+                  <a:srgbClr val="8E9379"/>
+                </a:solidFill>
+                <a:latin typeface="JetBrains Mono"/>
               </a:rPr>
               <a:t>07 / 10</a:t>
             </a:r>
@@ -7334,35 +8411,45 @@
       <p:grpSpPr/>
       <p:sp>
         <p:nvSpPr>
-          <p:cNvPr id="2" name="TextBox 1"/>
-          <p:cNvSpPr txBox="1"/>
+          <p:cNvPr id="2" name="Rectangle 1"/>
+          <p:cNvSpPr/>
           <p:nvPr/>
         </p:nvSpPr>
         <p:spPr>
           <a:xfrm>
-            <a:off x="548640" y="411480"/>
-            <a:ext cx="7315200" cy="365760"/>
-          </a:xfrm>
-          <a:prstGeom prst="rect">
-            <a:avLst/>
-          </a:prstGeom>
-          <a:noFill/>
-        </p:spPr>
-        <p:txBody>
-          <a:bodyPr wrap="square">
-            <a:spAutoFit/>
-          </a:bodyPr>
-          <a:lstStyle/>
-          <a:p>
-            <a:r>
-              <a:rPr sz="1300" b="1" i="0">
-                <a:solidFill>
-                  <a:srgbClr val="FE00FE"/>
-                </a:solidFill>
-                <a:latin typeface="Consolas"/>
-              </a:rPr>
-              <a:t>07 // GO-TO-MARKET</a:t>
-            </a:r>
+            <a:off x="0" y="0"/>
+            <a:ext cx="12192000" cy="31750"/>
+          </a:xfrm>
+          <a:prstGeom prst="rect">
+            <a:avLst/>
+          </a:prstGeom>
+          <a:solidFill>
+            <a:srgbClr val="C3F400"/>
+          </a:solidFill>
+          <a:ln>
+            <a:noFill/>
+          </a:ln>
+          <a:effectLst/>
+        </p:spPr>
+        <p:style>
+          <a:lnRef idx="1">
+            <a:schemeClr val="accent1"/>
+          </a:lnRef>
+          <a:fillRef idx="3">
+            <a:schemeClr val="accent1"/>
+          </a:fillRef>
+          <a:effectRef idx="2">
+            <a:schemeClr val="accent1"/>
+          </a:effectRef>
+          <a:fontRef idx="minor">
+            <a:schemeClr val="lt1"/>
+          </a:fontRef>
+        </p:style>
+        <p:txBody>
+          <a:bodyPr rtlCol="0" anchor="ctr"/>
+          <a:lstStyle/>
+          <a:p>
+            <a:pPr algn="ctr"/>
           </a:p>
         </p:txBody>
       </p:sp>
@@ -7374,8 +8461,86 @@
         </p:nvSpPr>
         <p:spPr>
           <a:xfrm>
-            <a:off x="548640" y="731520"/>
-            <a:ext cx="320040" cy="27940"/>
+            <a:off x="548640" y="31750"/>
+            <a:ext cx="640080" cy="31750"/>
+          </a:xfrm>
+          <a:prstGeom prst="rect">
+            <a:avLst/>
+          </a:prstGeom>
+          <a:solidFill>
+            <a:srgbClr val="ABD600"/>
+          </a:solidFill>
+          <a:ln>
+            <a:noFill/>
+          </a:ln>
+          <a:effectLst/>
+        </p:spPr>
+        <p:style>
+          <a:lnRef idx="1">
+            <a:schemeClr val="accent1"/>
+          </a:lnRef>
+          <a:fillRef idx="3">
+            <a:schemeClr val="accent1"/>
+          </a:fillRef>
+          <a:effectRef idx="2">
+            <a:schemeClr val="accent1"/>
+          </a:effectRef>
+          <a:fontRef idx="minor">
+            <a:schemeClr val="lt1"/>
+          </a:fontRef>
+        </p:style>
+        <p:txBody>
+          <a:bodyPr rtlCol="0" anchor="ctr"/>
+          <a:lstStyle/>
+          <a:p>
+            <a:pPr algn="ctr"/>
+          </a:p>
+        </p:txBody>
+      </p:sp>
+      <p:sp>
+        <p:nvSpPr>
+          <p:cNvPr id="4" name="TextBox 3"/>
+          <p:cNvSpPr txBox="1"/>
+          <p:nvPr/>
+        </p:nvSpPr>
+        <p:spPr>
+          <a:xfrm>
+            <a:off x="548640" y="457200"/>
+            <a:ext cx="8229600" cy="320040"/>
+          </a:xfrm>
+          <a:prstGeom prst="rect">
+            <a:avLst/>
+          </a:prstGeom>
+          <a:noFill/>
+        </p:spPr>
+        <p:txBody>
+          <a:bodyPr wrap="square" lIns="0" rIns="0" tIns="0" bIns="0">
+            <a:spAutoFit/>
+          </a:bodyPr>
+          <a:lstStyle/>
+          <a:p>
+            <a:r>
+              <a:rPr sz="1250" b="1" i="0" spc="120">
+                <a:solidFill>
+                  <a:srgbClr val="FE00FE"/>
+                </a:solidFill>
+                <a:latin typeface="JetBrains Mono"/>
+              </a:rPr>
+              <a:t>07 // GO-TO-MARKET</a:t>
+            </a:r>
+          </a:p>
+        </p:txBody>
+      </p:sp>
+      <p:sp>
+        <p:nvSpPr>
+          <p:cNvPr id="5" name="Rectangle 4"/>
+          <p:cNvSpPr/>
+          <p:nvPr/>
+        </p:nvSpPr>
+        <p:spPr>
+          <a:xfrm>
+            <a:off x="548640" y="749808"/>
+            <a:ext cx="320040" cy="25400"/>
           </a:xfrm>
           <a:prstGeom prst="rect">
             <a:avLst/>
@@ -7386,6 +8551,7 @@
           <a:ln>
             <a:noFill/>
           </a:ln>
+          <a:effectLst/>
         </p:spPr>
         <p:style>
           <a:lnRef idx="1">
@@ -7411,14 +8577,14 @@
       </p:sp>
       <p:sp>
         <p:nvSpPr>
-          <p:cNvPr id="4" name="TextBox 3"/>
+          <p:cNvPr id="6" name="TextBox 5"/>
           <p:cNvSpPr txBox="1"/>
           <p:nvPr/>
         </p:nvSpPr>
         <p:spPr>
           <a:xfrm>
-            <a:off x="548640" y="777240"/>
-            <a:ext cx="10789920" cy="1005840"/>
+            <a:off x="548640" y="822960"/>
+            <a:ext cx="10607040" cy="914400"/>
           </a:xfrm>
           <a:prstGeom prst="rect">
             <a:avLst/>
@@ -7426,17 +8592,17 @@
           <a:noFill/>
         </p:spPr>
         <p:txBody>
-          <a:bodyPr wrap="square">
+          <a:bodyPr wrap="square" lIns="0" rIns="0" tIns="0" bIns="0">
             <a:spAutoFit/>
           </a:bodyPr>
           <a:lstStyle/>
           <a:p>
             <a:r>
-              <a:rPr sz="3600" b="1" i="0">
+              <a:rPr sz="3400" b="1" i="0">
                 <a:solidFill>
                   <a:srgbClr val="E5E2E1"/>
                 </a:solidFill>
-                <a:latin typeface="Arial"/>
+                <a:latin typeface="Space Grotesk"/>
               </a:rPr>
               <a:t>GTM: Philippines → APAC → Global</a:t>
             </a:r>
@@ -7445,13 +8611,13 @@
       </p:sp>
       <p:sp>
         <p:nvSpPr>
-          <p:cNvPr id="5" name="Rectangle 4"/>
+          <p:cNvPr id="7" name="Rectangle 6"/>
           <p:cNvSpPr/>
           <p:nvPr/>
         </p:nvSpPr>
         <p:spPr>
           <a:xfrm>
-            <a:off x="548640" y="1645920"/>
+            <a:off x="548640" y="1664208"/>
             <a:ext cx="1280160" cy="38100"/>
           </a:xfrm>
           <a:prstGeom prst="rect">
@@ -7463,6 +8629,7 @@
           <a:ln>
             <a:noFill/>
           </a:ln>
+          <a:effectLst/>
         </p:spPr>
         <p:style>
           <a:lnRef idx="1">
@@ -7488,26 +8655,54 @@
       </p:sp>
       <p:sp>
         <p:nvSpPr>
-          <p:cNvPr id="6" name="Rectangle 5"/>
+          <p:cNvPr id="8" name="Freeform 7"/>
           <p:cNvSpPr/>
           <p:nvPr/>
         </p:nvSpPr>
         <p:spPr>
           <a:xfrm>
-            <a:off x="548640" y="1874519"/>
-            <a:ext cx="3337560" cy="4206240"/>
-          </a:xfrm>
-          <a:prstGeom prst="rect">
-            <a:avLst/>
-          </a:prstGeom>
+            <a:off x="548640" y="1920240"/>
+            <a:ext cx="3401568" cy="4160520"/>
+          </a:xfrm>
+          <a:custGeom>
+            <a:avLst/>
+            <a:gdLst/>
+            <a:ahLst/>
+            <a:cxnLst/>
+            <a:rect l="l" t="t" r="r" b="b"/>
+            <a:pathLst>
+              <a:path w="3401568" h="4160520">
+                <a:moveTo>
+                  <a:pt x="0" y="0"/>
+                </a:moveTo>
+                <a:lnTo>
+                  <a:pt x="3401568" y="0"/>
+                </a:lnTo>
+                <a:lnTo>
+                  <a:pt x="3401568" y="3867912"/>
+                </a:lnTo>
+                <a:lnTo>
+                  <a:pt x="3108960" y="4160520"/>
+                </a:lnTo>
+                <a:lnTo>
+                  <a:pt x="0" y="4160520"/>
+                </a:lnTo>
+                <a:lnTo>
+                  <a:pt x="0" y="0"/>
+                </a:lnTo>
+                <a:close/>
+              </a:path>
+            </a:pathLst>
+          </a:custGeom>
           <a:solidFill>
             <a:srgbClr val="1C1B1B"/>
           </a:solidFill>
-          <a:ln w="15875">
+          <a:ln w="19050">
             <a:solidFill>
               <a:srgbClr val="C3F400"/>
             </a:solidFill>
           </a:ln>
+          <a:effectLst/>
         </p:spPr>
         <p:style>
           <a:lnRef idx="1">
@@ -7533,242 +8728,25 @@
       </p:sp>
       <p:sp>
         <p:nvSpPr>
-          <p:cNvPr id="7" name="TextBox 6"/>
-          <p:cNvSpPr txBox="1"/>
-          <p:nvPr/>
-        </p:nvSpPr>
-        <p:spPr>
-          <a:xfrm>
-            <a:off x="713232" y="2011679"/>
-            <a:ext cx="3008376" cy="457200"/>
-          </a:xfrm>
-          <a:prstGeom prst="rect">
-            <a:avLst/>
-          </a:prstGeom>
-          <a:noFill/>
-        </p:spPr>
-        <p:txBody>
-          <a:bodyPr wrap="square">
-            <a:spAutoFit/>
-          </a:bodyPr>
-          <a:lstStyle/>
-          <a:p>
-            <a:r>
-              <a:rPr sz="1800" b="1" i="0">
-                <a:solidFill>
-                  <a:srgbClr val="C3F400"/>
-                </a:solidFill>
-                <a:latin typeface="Consolas"/>
-              </a:rPr>
-              <a:t>PHILIPPINES</a:t>
-            </a:r>
-          </a:p>
-        </p:txBody>
-      </p:sp>
-      <p:sp>
-        <p:nvSpPr>
-          <p:cNvPr id="8" name="TextBox 7"/>
-          <p:cNvSpPr txBox="1"/>
-          <p:nvPr/>
-        </p:nvSpPr>
-        <p:spPr>
-          <a:xfrm>
-            <a:off x="713232" y="2423159"/>
-            <a:ext cx="3008376" cy="320040"/>
-          </a:xfrm>
-          <a:prstGeom prst="rect">
-            <a:avLst/>
-          </a:prstGeom>
-          <a:noFill/>
-        </p:spPr>
-        <p:txBody>
-          <a:bodyPr wrap="square">
-            <a:spAutoFit/>
-          </a:bodyPr>
-          <a:lstStyle/>
-          <a:p>
-            <a:r>
-              <a:rPr sz="1100" b="0" i="0">
-                <a:solidFill>
-                  <a:srgbClr val="C4C9AC"/>
-                </a:solidFill>
-                <a:latin typeface="Consolas"/>
-              </a:rPr>
-              <a:t>BEACHHEAD</a:t>
-            </a:r>
-          </a:p>
-        </p:txBody>
-      </p:sp>
-      <p:sp>
-        <p:nvSpPr>
-          <p:cNvPr id="9" name="TextBox 8"/>
-          <p:cNvSpPr txBox="1"/>
-          <p:nvPr/>
-        </p:nvSpPr>
-        <p:spPr>
-          <a:xfrm>
-            <a:off x="713232" y="2834639"/>
-            <a:ext cx="3008376" cy="3108960"/>
-          </a:xfrm>
-          <a:prstGeom prst="rect">
-            <a:avLst/>
-          </a:prstGeom>
-          <a:noFill/>
-        </p:spPr>
-        <p:txBody>
-          <a:bodyPr wrap="square">
-            <a:spAutoFit/>
-          </a:bodyPr>
-          <a:lstStyle/>
-          <a:p>
-            <a:pPr>
-              <a:spcAft>
-                <a:spcPts val="600"/>
-              </a:spcAft>
-            </a:pPr>
-            <a:r>
-              <a:rPr sz="1200" b="1" i="0">
-                <a:solidFill>
-                  <a:srgbClr val="C3F400"/>
-                </a:solidFill>
-                <a:latin typeface="Arial"/>
-              </a:rPr>
-              <a:t>‣ </a:t>
-            </a:r>
-            <a:r>
-              <a:rPr sz="1200" b="0" i="0">
-                <a:solidFill>
-                  <a:srgbClr val="E5E2E1"/>
-                </a:solidFill>
-                <a:latin typeface="Arial"/>
-              </a:rPr>
-              <a:t>Anchor partner Gridlock Games as the flagship live studio.</a:t>
-            </a:r>
-          </a:p>
-          <a:p>
-            <a:pPr>
-              <a:spcAft>
-                <a:spcPts val="600"/>
-              </a:spcAft>
-            </a:pPr>
-            <a:r>
-              <a:rPr sz="1200" b="1" i="0">
-                <a:solidFill>
-                  <a:srgbClr val="C3F400"/>
-                </a:solidFill>
-                <a:latin typeface="Arial"/>
-              </a:rPr>
-              <a:t>‣ </a:t>
-            </a:r>
-            <a:r>
-              <a:rPr sz="1200" b="0" i="0">
-                <a:solidFill>
-                  <a:srgbClr val="E5E2E1"/>
-                </a:solidFill>
-                <a:latin typeface="Arial"/>
-              </a:rPr>
-              <a:t>Tap the local indie/mobile dev community (IGDA PH, game jams, Discord).</a:t>
-            </a:r>
-          </a:p>
-          <a:p>
-            <a:pPr>
-              <a:spcAft>
-                <a:spcPts val="600"/>
-              </a:spcAft>
-            </a:pPr>
-            <a:r>
-              <a:rPr sz="1200" b="1" i="0">
-                <a:solidFill>
-                  <a:srgbClr val="C3F400"/>
-                </a:solidFill>
-                <a:latin typeface="Arial"/>
-              </a:rPr>
-              <a:t>‣ </a:t>
-            </a:r>
-            <a:r>
-              <a:rPr sz="1200" b="0" i="0">
-                <a:solidFill>
-                  <a:srgbClr val="E5E2E1"/>
-                </a:solidFill>
-                <a:latin typeface="Arial"/>
-              </a:rPr>
-              <a:t>Peso-friendly wallet UX — players already used to GCash/Maya-style e-wallets.</a:t>
-            </a:r>
-          </a:p>
-          <a:p>
-            <a:pPr>
-              <a:spcAft>
-                <a:spcPts val="600"/>
-              </a:spcAft>
-            </a:pPr>
-            <a:r>
-              <a:rPr sz="1200" b="1" i="0">
-                <a:solidFill>
-                  <a:srgbClr val="C3F400"/>
-                </a:solidFill>
-                <a:latin typeface="Arial"/>
-              </a:rPr>
-              <a:t>‣ </a:t>
-            </a:r>
-            <a:r>
-              <a:rPr sz="1200" b="0" i="0">
-                <a:solidFill>
-                  <a:srgbClr val="E5E2E1"/>
-                </a:solidFill>
-                <a:latin typeface="Arial"/>
-              </a:rPr>
-              <a:t>Local anchor on/off-ramps lower the “buy crypto first” barrier.</a:t>
-            </a:r>
-          </a:p>
-          <a:p>
-            <a:pPr>
-              <a:spcAft>
-                <a:spcPts val="600"/>
-              </a:spcAft>
-            </a:pPr>
-            <a:r>
-              <a:rPr sz="1200" b="1" i="0">
-                <a:solidFill>
-                  <a:srgbClr val="C3F400"/>
-                </a:solidFill>
-                <a:latin typeface="Arial"/>
-              </a:rPr>
-              <a:t>‣ </a:t>
-            </a:r>
-            <a:r>
-              <a:rPr sz="1200" b="0" i="0">
-                <a:solidFill>
-                  <a:srgbClr val="E5E2E1"/>
-                </a:solidFill>
-                <a:latin typeface="Arial"/>
-              </a:rPr>
-              <a:t>Goal: onboard a handful of pilot studios in the first two quarters.</a:t>
-            </a:r>
-          </a:p>
-        </p:txBody>
-      </p:sp>
-      <p:sp>
-        <p:nvSpPr>
-          <p:cNvPr id="10" name="Rectangle 9"/>
+          <p:cNvPr id="9" name="Rectangle 8"/>
           <p:cNvSpPr/>
           <p:nvPr/>
         </p:nvSpPr>
         <p:spPr>
           <a:xfrm>
-            <a:off x="4023360" y="1874519"/>
-            <a:ext cx="3337560" cy="4206240"/>
+            <a:off x="731520" y="2057400"/>
+            <a:ext cx="292608" cy="25400"/>
           </a:xfrm>
           <a:prstGeom prst="rect">
             <a:avLst/>
           </a:prstGeom>
           <a:solidFill>
-            <a:srgbClr val="1C1B1B"/>
+            <a:srgbClr val="C3F400"/>
           </a:solidFill>
-          <a:ln w="15875">
-            <a:solidFill>
-              <a:srgbClr val="7DF4FF"/>
-            </a:solidFill>
+          <a:ln>
+            <a:noFill/>
           </a:ln>
+          <a:effectLst/>
         </p:spPr>
         <p:style>
           <a:lnRef idx="1">
@@ -7794,14 +8772,48 @@
       </p:sp>
       <p:sp>
         <p:nvSpPr>
+          <p:cNvPr id="10" name="TextBox 9"/>
+          <p:cNvSpPr txBox="1"/>
+          <p:nvPr/>
+        </p:nvSpPr>
+        <p:spPr>
+          <a:xfrm>
+            <a:off x="731520" y="2157984"/>
+            <a:ext cx="3035808" cy="457200"/>
+          </a:xfrm>
+          <a:prstGeom prst="rect">
+            <a:avLst/>
+          </a:prstGeom>
+          <a:noFill/>
+        </p:spPr>
+        <p:txBody>
+          <a:bodyPr wrap="square" lIns="0" rIns="0" tIns="0" bIns="0">
+            <a:spAutoFit/>
+          </a:bodyPr>
+          <a:lstStyle/>
+          <a:p>
+            <a:r>
+              <a:rPr sz="1700" b="1" i="0" spc="80">
+                <a:solidFill>
+                  <a:srgbClr val="C3F400"/>
+                </a:solidFill>
+                <a:latin typeface="JetBrains Mono"/>
+              </a:rPr>
+              <a:t>PHILIPPINES</a:t>
+            </a:r>
+          </a:p>
+        </p:txBody>
+      </p:sp>
+      <p:sp>
+        <p:nvSpPr>
           <p:cNvPr id="11" name="TextBox 10"/>
           <p:cNvSpPr txBox="1"/>
           <p:nvPr/>
         </p:nvSpPr>
         <p:spPr>
           <a:xfrm>
-            <a:off x="4187952" y="2011679"/>
-            <a:ext cx="3008376" cy="457200"/>
+            <a:off x="731520" y="2578608"/>
+            <a:ext cx="3035808" cy="274320"/>
           </a:xfrm>
           <a:prstGeom prst="rect">
             <a:avLst/>
@@ -7809,19 +8821,19 @@
           <a:noFill/>
         </p:spPr>
         <p:txBody>
-          <a:bodyPr wrap="square">
+          <a:bodyPr wrap="square" lIns="0" rIns="0" tIns="0" bIns="0">
             <a:spAutoFit/>
           </a:bodyPr>
           <a:lstStyle/>
           <a:p>
             <a:r>
-              <a:rPr sz="1800" b="1" i="0">
-                <a:solidFill>
-                  <a:srgbClr val="7DF4FF"/>
-                </a:solidFill>
-                <a:latin typeface="Consolas"/>
-              </a:rPr>
-              <a:t>APAC</a:t>
+              <a:rPr sz="1050" b="0" i="0" spc="100">
+                <a:solidFill>
+                  <a:srgbClr val="C4C9AC"/>
+                </a:solidFill>
+                <a:latin typeface="JetBrains Mono"/>
+              </a:rPr>
+              <a:t>BEACHHEAD</a:t>
             </a:r>
           </a:p>
         </p:txBody>
@@ -7834,8 +8846,8 @@
         </p:nvSpPr>
         <p:spPr>
           <a:xfrm>
-            <a:off x="4187952" y="2423159"/>
-            <a:ext cx="3008376" cy="320040"/>
+            <a:off x="731520" y="2999232"/>
+            <a:ext cx="3035808" cy="2926080"/>
           </a:xfrm>
           <a:prstGeom prst="rect">
             <a:avLst/>
@@ -7843,168 +8855,202 @@
           <a:noFill/>
         </p:spPr>
         <p:txBody>
-          <a:bodyPr wrap="square">
+          <a:bodyPr wrap="square" lIns="0" rIns="0" tIns="0" bIns="0">
             <a:spAutoFit/>
           </a:bodyPr>
           <a:lstStyle/>
           <a:p>
-            <a:r>
-              <a:rPr sz="1100" b="0" i="0">
-                <a:solidFill>
-                  <a:srgbClr val="C4C9AC"/>
-                </a:solidFill>
-                <a:latin typeface="Consolas"/>
-              </a:rPr>
-              <a:t>REGIONAL EXPANSION</a:t>
-            </a:r>
-          </a:p>
-        </p:txBody>
-      </p:sp>
-      <p:sp>
-        <p:nvSpPr>
-          <p:cNvPr id="13" name="TextBox 12"/>
-          <p:cNvSpPr txBox="1"/>
-          <p:nvPr/>
-        </p:nvSpPr>
-        <p:spPr>
-          <a:xfrm>
-            <a:off x="4187952" y="2834639"/>
-            <a:ext cx="3008376" cy="3108960"/>
-          </a:xfrm>
-          <a:prstGeom prst="rect">
-            <a:avLst/>
-          </a:prstGeom>
-          <a:noFill/>
-        </p:spPr>
-        <p:txBody>
-          <a:bodyPr wrap="square">
-            <a:spAutoFit/>
-          </a:bodyPr>
-          <a:lstStyle/>
-          <a:p>
             <a:pPr>
+              <a:lnSpc>
+                <a:spcPct val="103000"/>
+              </a:lnSpc>
               <a:spcAft>
                 <a:spcPts val="600"/>
               </a:spcAft>
             </a:pPr>
             <a:r>
-              <a:rPr sz="1200" b="1" i="0">
-                <a:solidFill>
-                  <a:srgbClr val="7DF4FF"/>
-                </a:solidFill>
-                <a:latin typeface="Arial"/>
-              </a:rPr>
-              <a:t>‣ </a:t>
-            </a:r>
-            <a:r>
-              <a:rPr sz="1200" b="0" i="0">
+              <a:rPr sz="1150" b="1" i="0">
+                <a:solidFill>
+                  <a:srgbClr val="C3F400"/>
+                </a:solidFill>
+                <a:latin typeface="JetBrains Mono"/>
+              </a:rPr>
+              <a:t>▸ </a:t>
+            </a:r>
+            <a:r>
+              <a:rPr sz="1150" b="0" i="0">
                 <a:solidFill>
                   <a:srgbClr val="E5E2E1"/>
                 </a:solidFill>
-                <a:latin typeface="Arial"/>
-              </a:rPr>
-              <a:t>Expand into Vietnam, Indonesia, Thailand — large mobile player bases, strong wallet adoption.</a:t>
+                <a:latin typeface="Space Grotesk"/>
+              </a:rPr>
+              <a:t>Anchor partner Gridlock Games as the flagship live studio.</a:t>
             </a:r>
           </a:p>
           <a:p>
             <a:pPr>
+              <a:lnSpc>
+                <a:spcPct val="103000"/>
+              </a:lnSpc>
               <a:spcAft>
                 <a:spcPts val="600"/>
               </a:spcAft>
             </a:pPr>
             <a:r>
-              <a:rPr sz="1200" b="1" i="0">
-                <a:solidFill>
-                  <a:srgbClr val="7DF4FF"/>
-                </a:solidFill>
-                <a:latin typeface="Arial"/>
-              </a:rPr>
-              <a:t>‣ </a:t>
-            </a:r>
-            <a:r>
-              <a:rPr sz="1200" b="0" i="0">
+              <a:rPr sz="1150" b="1" i="0">
+                <a:solidFill>
+                  <a:srgbClr val="C3F400"/>
+                </a:solidFill>
+                <a:latin typeface="JetBrains Mono"/>
+              </a:rPr>
+              <a:t>▸ </a:t>
+            </a:r>
+            <a:r>
+              <a:rPr sz="1150" b="0" i="0">
                 <a:solidFill>
                   <a:srgbClr val="E5E2E1"/>
                 </a:solidFill>
-                <a:latin typeface="Arial"/>
-              </a:rPr>
-              <a:t>Localize storefront currency/branding per market; use regional anchors for local fiat rails.</a:t>
+                <a:latin typeface="Space Grotesk"/>
+              </a:rPr>
+              <a:t>Tap the local indie / mobile dev community (IGDA PH, game jams, Discord).</a:t>
             </a:r>
           </a:p>
           <a:p>
             <a:pPr>
+              <a:lnSpc>
+                <a:spcPct val="103000"/>
+              </a:lnSpc>
               <a:spcAft>
                 <a:spcPts val="600"/>
               </a:spcAft>
             </a:pPr>
             <a:r>
-              <a:rPr sz="1200" b="1" i="0">
-                <a:solidFill>
-                  <a:srgbClr val="7DF4FF"/>
-                </a:solidFill>
-                <a:latin typeface="Arial"/>
-              </a:rPr>
-              <a:t>‣ </a:t>
-            </a:r>
-            <a:r>
-              <a:rPr sz="1200" b="0" i="0">
+              <a:rPr sz="1150" b="1" i="0">
+                <a:solidFill>
+                  <a:srgbClr val="C3F400"/>
+                </a:solidFill>
+                <a:latin typeface="JetBrains Mono"/>
+              </a:rPr>
+              <a:t>▸ </a:t>
+            </a:r>
+            <a:r>
+              <a:rPr sz="1150" b="0" i="0">
                 <a:solidFill>
                   <a:srgbClr val="E5E2E1"/>
                 </a:solidFill>
-                <a:latin typeface="Arial"/>
-              </a:rPr>
-              <a:t>Partner with regional publishers / game-SDK platforms already exploring web3 to reach existing players.</a:t>
+                <a:latin typeface="Space Grotesk"/>
+              </a:rPr>
+              <a:t>Peso-friendly wallet UX — players already use GCash / Maya-style e-wallets.</a:t>
             </a:r>
           </a:p>
           <a:p>
             <a:pPr>
+              <a:lnSpc>
+                <a:spcPct val="103000"/>
+              </a:lnSpc>
               <a:spcAft>
                 <a:spcPts val="600"/>
               </a:spcAft>
             </a:pPr>
             <a:r>
-              <a:rPr sz="1200" b="1" i="0">
-                <a:solidFill>
-                  <a:srgbClr val="7DF4FF"/>
-                </a:solidFill>
-                <a:latin typeface="Arial"/>
-              </a:rPr>
-              <a:t>‣ </a:t>
-            </a:r>
-            <a:r>
-              <a:rPr sz="1200" b="0" i="0">
+              <a:rPr sz="1150" b="1" i="0">
+                <a:solidFill>
+                  <a:srgbClr val="C3F400"/>
+                </a:solidFill>
+                <a:latin typeface="JetBrains Mono"/>
+              </a:rPr>
+              <a:t>▸ </a:t>
+            </a:r>
+            <a:r>
+              <a:rPr sz="1150" b="0" i="0">
                 <a:solidFill>
                   <a:srgbClr val="E5E2E1"/>
                 </a:solidFill>
-                <a:latin typeface="Arial"/>
-              </a:rPr>
-              <a:t>Reuse the Philippines playbook: familiar wallet habits reduce onboarding friction region-wide.</a:t>
-            </a:r>
-          </a:p>
-        </p:txBody>
-      </p:sp>
-      <p:sp>
-        <p:nvSpPr>
-          <p:cNvPr id="14" name="Rectangle 13"/>
+                <a:latin typeface="Space Grotesk"/>
+              </a:rPr>
+              <a:t>Local anchor on/off-ramps lower the “buy crypto first” barrier.</a:t>
+            </a:r>
+          </a:p>
+          <a:p>
+            <a:pPr>
+              <a:lnSpc>
+                <a:spcPct val="103000"/>
+              </a:lnSpc>
+              <a:spcAft>
+                <a:spcPts val="600"/>
+              </a:spcAft>
+            </a:pPr>
+            <a:r>
+              <a:rPr sz="1150" b="1" i="0">
+                <a:solidFill>
+                  <a:srgbClr val="C3F400"/>
+                </a:solidFill>
+                <a:latin typeface="JetBrains Mono"/>
+              </a:rPr>
+              <a:t>▸ </a:t>
+            </a:r>
+            <a:r>
+              <a:rPr sz="1150" b="0" i="0">
+                <a:solidFill>
+                  <a:srgbClr val="E5E2E1"/>
+                </a:solidFill>
+                <a:latin typeface="Space Grotesk"/>
+              </a:rPr>
+              <a:t>Goal: onboard a pilot cohort of studios in the first two quarters.</a:t>
+            </a:r>
+          </a:p>
+        </p:txBody>
+      </p:sp>
+      <p:sp>
+        <p:nvSpPr>
+          <p:cNvPr id="13" name="Freeform 12"/>
           <p:cNvSpPr/>
           <p:nvPr/>
         </p:nvSpPr>
         <p:spPr>
           <a:xfrm>
-            <a:off x="7498080" y="1874519"/>
-            <a:ext cx="3337560" cy="4206240"/>
-          </a:xfrm>
-          <a:prstGeom prst="rect">
-            <a:avLst/>
-          </a:prstGeom>
+            <a:off x="4069080" y="1920240"/>
+            <a:ext cx="3401568" cy="4160520"/>
+          </a:xfrm>
+          <a:custGeom>
+            <a:avLst/>
+            <a:gdLst/>
+            <a:ahLst/>
+            <a:cxnLst/>
+            <a:rect l="l" t="t" r="r" b="b"/>
+            <a:pathLst>
+              <a:path w="3401568" h="4160520">
+                <a:moveTo>
+                  <a:pt x="0" y="0"/>
+                </a:moveTo>
+                <a:lnTo>
+                  <a:pt x="3401568" y="0"/>
+                </a:lnTo>
+                <a:lnTo>
+                  <a:pt x="3401568" y="3867912"/>
+                </a:lnTo>
+                <a:lnTo>
+                  <a:pt x="3108960" y="4160520"/>
+                </a:lnTo>
+                <a:lnTo>
+                  <a:pt x="0" y="4160520"/>
+                </a:lnTo>
+                <a:lnTo>
+                  <a:pt x="0" y="0"/>
+                </a:lnTo>
+                <a:close/>
+              </a:path>
+            </a:pathLst>
+          </a:custGeom>
           <a:solidFill>
             <a:srgbClr val="1C1B1B"/>
           </a:solidFill>
-          <a:ln w="15875">
+          <a:ln w="19050">
             <a:solidFill>
-              <a:srgbClr val="FE00FE"/>
+              <a:srgbClr val="7DF4FF"/>
             </a:solidFill>
           </a:ln>
+          <a:effectLst/>
         </p:spPr>
         <p:style>
           <a:lnRef idx="1">
@@ -8030,14 +9076,58 @@
       </p:sp>
       <p:sp>
         <p:nvSpPr>
+          <p:cNvPr id="14" name="Rectangle 13"/>
+          <p:cNvSpPr/>
+          <p:nvPr/>
+        </p:nvSpPr>
+        <p:spPr>
+          <a:xfrm>
+            <a:off x="4251960" y="2057400"/>
+            <a:ext cx="292608" cy="25400"/>
+          </a:xfrm>
+          <a:prstGeom prst="rect">
+            <a:avLst/>
+          </a:prstGeom>
+          <a:solidFill>
+            <a:srgbClr val="7DF4FF"/>
+          </a:solidFill>
+          <a:ln>
+            <a:noFill/>
+          </a:ln>
+          <a:effectLst/>
+        </p:spPr>
+        <p:style>
+          <a:lnRef idx="1">
+            <a:schemeClr val="accent1"/>
+          </a:lnRef>
+          <a:fillRef idx="3">
+            <a:schemeClr val="accent1"/>
+          </a:fillRef>
+          <a:effectRef idx="2">
+            <a:schemeClr val="accent1"/>
+          </a:effectRef>
+          <a:fontRef idx="minor">
+            <a:schemeClr val="lt1"/>
+          </a:fontRef>
+        </p:style>
+        <p:txBody>
+          <a:bodyPr rtlCol="0" anchor="ctr"/>
+          <a:lstStyle/>
+          <a:p>
+            <a:pPr algn="ctr"/>
+          </a:p>
+        </p:txBody>
+      </p:sp>
+      <p:sp>
+        <p:nvSpPr>
           <p:cNvPr id="15" name="TextBox 14"/>
           <p:cNvSpPr txBox="1"/>
           <p:nvPr/>
         </p:nvSpPr>
         <p:spPr>
           <a:xfrm>
-            <a:off x="7662672" y="2011679"/>
-            <a:ext cx="3008376" cy="457200"/>
+            <a:off x="4251960" y="2157984"/>
+            <a:ext cx="3035808" cy="457200"/>
           </a:xfrm>
           <a:prstGeom prst="rect">
             <a:avLst/>
@@ -8045,19 +9135,19 @@
           <a:noFill/>
         </p:spPr>
         <p:txBody>
-          <a:bodyPr wrap="square">
+          <a:bodyPr wrap="square" lIns="0" rIns="0" tIns="0" bIns="0">
             <a:spAutoFit/>
           </a:bodyPr>
           <a:lstStyle/>
           <a:p>
             <a:r>
-              <a:rPr sz="1800" b="1" i="0">
-                <a:solidFill>
-                  <a:srgbClr val="FE00FE"/>
-                </a:solidFill>
-                <a:latin typeface="Consolas"/>
-              </a:rPr>
-              <a:t>GLOBAL</a:t>
+              <a:rPr sz="1700" b="1" i="0" spc="80">
+                <a:solidFill>
+                  <a:srgbClr val="7DF4FF"/>
+                </a:solidFill>
+                <a:latin typeface="JetBrains Mono"/>
+              </a:rPr>
+              <a:t>APAC</a:t>
             </a:r>
           </a:p>
         </p:txBody>
@@ -8070,8 +9160,8 @@
         </p:nvSpPr>
         <p:spPr>
           <a:xfrm>
-            <a:off x="7662672" y="2423159"/>
-            <a:ext cx="3008376" cy="320040"/>
+            <a:off x="4251960" y="2578608"/>
+            <a:ext cx="3035808" cy="274320"/>
           </a:xfrm>
           <a:prstGeom prst="rect">
             <a:avLst/>
@@ -8079,19 +9169,19 @@
           <a:noFill/>
         </p:spPr>
         <p:txBody>
-          <a:bodyPr wrap="square">
+          <a:bodyPr wrap="square" lIns="0" rIns="0" tIns="0" bIns="0">
             <a:spAutoFit/>
           </a:bodyPr>
           <a:lstStyle/>
           <a:p>
             <a:r>
-              <a:rPr sz="1100" b="0" i="0">
+              <a:rPr sz="1050" b="0" i="0" spc="100">
                 <a:solidFill>
                   <a:srgbClr val="C4C9AC"/>
                 </a:solidFill>
-                <a:latin typeface="Consolas"/>
-              </a:rPr>
-              <a:t>SCALE VIA ECOSYSTEM</a:t>
+                <a:latin typeface="JetBrains Mono"/>
+              </a:rPr>
+              <a:t>REGIONAL EXPANSION</a:t>
             </a:r>
           </a:p>
         </p:txBody>
@@ -8104,8 +9194,8 @@
         </p:nvSpPr>
         <p:spPr>
           <a:xfrm>
-            <a:off x="7662672" y="2834639"/>
-            <a:ext cx="3008376" cy="3108960"/>
+            <a:off x="4251960" y="2999232"/>
+            <a:ext cx="3035808" cy="2926080"/>
           </a:xfrm>
           <a:prstGeom prst="rect">
             <a:avLst/>
@@ -8113,122 +9203,251 @@
           <a:noFill/>
         </p:spPr>
         <p:txBody>
-          <a:bodyPr wrap="square">
+          <a:bodyPr wrap="square" lIns="0" rIns="0" tIns="0" bIns="0">
             <a:spAutoFit/>
           </a:bodyPr>
           <a:lstStyle/>
           <a:p>
             <a:pPr>
+              <a:lnSpc>
+                <a:spcPct val="103000"/>
+              </a:lnSpc>
               <a:spcAft>
                 <a:spcPts val="600"/>
               </a:spcAft>
             </a:pPr>
             <a:r>
-              <a:rPr sz="1200" b="1" i="0">
-                <a:solidFill>
-                  <a:srgbClr val="FE00FE"/>
-                </a:solidFill>
-                <a:latin typeface="Arial"/>
-              </a:rPr>
-              <a:t>‣ </a:t>
-            </a:r>
-            <a:r>
-              <a:rPr sz="1200" b="0" i="0">
+              <a:rPr sz="1150" b="1" i="0">
+                <a:solidFill>
+                  <a:srgbClr val="7DF4FF"/>
+                </a:solidFill>
+                <a:latin typeface="JetBrains Mono"/>
+              </a:rPr>
+              <a:t>▸ </a:t>
+            </a:r>
+            <a:r>
+              <a:rPr sz="1150" b="0" i="0">
                 <a:solidFill>
                   <a:srgbClr val="E5E2E1"/>
                 </a:solidFill>
-                <a:latin typeface="Arial"/>
-              </a:rPr>
-              <a:t>Reach Western/English-speaking indie studios via dev Discords, game jams, the SCF network.</a:t>
+                <a:latin typeface="Space Grotesk"/>
+              </a:rPr>
+              <a:t>Expand to Vietnam, Indonesia, Thailand — large mobile bases, strong wallet adoption.</a:t>
             </a:r>
           </a:p>
           <a:p>
             <a:pPr>
+              <a:lnSpc>
+                <a:spcPct val="103000"/>
+              </a:lnSpc>
               <a:spcAft>
                 <a:spcPts val="600"/>
               </a:spcAft>
             </a:pPr>
             <a:r>
-              <a:rPr sz="1200" b="1" i="0">
-                <a:solidFill>
-                  <a:srgbClr val="FE00FE"/>
-                </a:solidFill>
-                <a:latin typeface="Arial"/>
-              </a:rPr>
-              <a:t>‣ </a:t>
-            </a:r>
-            <a:r>
-              <a:rPr sz="1200" b="0" i="0">
+              <a:rPr sz="1150" b="1" i="0">
+                <a:solidFill>
+                  <a:srgbClr val="7DF4FF"/>
+                </a:solidFill>
+                <a:latin typeface="JetBrains Mono"/>
+              </a:rPr>
+              <a:t>▸ </a:t>
+            </a:r>
+            <a:r>
+              <a:rPr sz="1150" b="0" i="0">
                 <a:solidFill>
                   <a:srgbClr val="E5E2E1"/>
                 </a:solidFill>
-                <a:latin typeface="Arial"/>
-              </a:rPr>
-              <a:t>Position as “commerce infra for game-item economies on Stellar” — apply for an SCF Build Award as non-dilutive GTM fuel.</a:t>
+                <a:latin typeface="Space Grotesk"/>
+              </a:rPr>
+              <a:t>Localize storefront currency / branding; use regional anchors for local fiat rails.</a:t>
             </a:r>
           </a:p>
           <a:p>
             <a:pPr>
+              <a:lnSpc>
+                <a:spcPct val="103000"/>
+              </a:lnSpc>
               <a:spcAft>
                 <a:spcPts val="600"/>
               </a:spcAft>
             </a:pPr>
             <a:r>
-              <a:rPr sz="1200" b="1" i="0">
-                <a:solidFill>
-                  <a:srgbClr val="FE00FE"/>
-                </a:solidFill>
-                <a:latin typeface="Arial"/>
-              </a:rPr>
-              <a:t>‣ </a:t>
-            </a:r>
-            <a:r>
-              <a:rPr sz="1200" b="0" i="0">
+              <a:rPr sz="1150" b="1" i="0">
+                <a:solidFill>
+                  <a:srgbClr val="7DF4FF"/>
+                </a:solidFill>
+                <a:latin typeface="JetBrains Mono"/>
+              </a:rPr>
+              <a:t>▸ </a:t>
+            </a:r>
+            <a:r>
+              <a:rPr sz="1150" b="0" i="0">
                 <a:solidFill>
                   <a:srgbClr val="E5E2E1"/>
                 </a:solidFill>
-                <a:latin typeface="Arial"/>
-              </a:rPr>
-              <a:t>Multi-stablecoin support (USDC/EURC) serves studios with no single regional asset dependency.</a:t>
+                <a:latin typeface="Space Grotesk"/>
+              </a:rPr>
+              <a:t>Partner with regional publishers / game-SDK platforms exploring web3.</a:t>
             </a:r>
           </a:p>
           <a:p>
             <a:pPr>
+              <a:lnSpc>
+                <a:spcPct val="103000"/>
+              </a:lnSpc>
               <a:spcAft>
                 <a:spcPts val="600"/>
               </a:spcAft>
             </a:pPr>
             <a:r>
-              <a:rPr sz="1200" b="1" i="0">
-                <a:solidFill>
-                  <a:srgbClr val="FE00FE"/>
-                </a:solidFill>
-                <a:latin typeface="Arial"/>
-              </a:rPr>
-              <a:t>‣ </a:t>
-            </a:r>
-            <a:r>
-              <a:rPr sz="1200" b="0" i="0">
+              <a:rPr sz="1150" b="1" i="0">
+                <a:solidFill>
+                  <a:srgbClr val="7DF4FF"/>
+                </a:solidFill>
+                <a:latin typeface="JetBrains Mono"/>
+              </a:rPr>
+              <a:t>▸ </a:t>
+            </a:r>
+            <a:r>
+              <a:rPr sz="1150" b="0" i="0">
                 <a:solidFill>
                   <a:srgbClr val="E5E2E1"/>
                 </a:solidFill>
-                <a:latin typeface="Arial"/>
-              </a:rPr>
-              <a:t>Soroban NFT interoperability becomes a network-effect moat: cross-game secondary markets.</a:t>
-            </a:r>
-          </a:p>
-        </p:txBody>
-      </p:sp>
-      <p:sp>
-        <p:nvSpPr>
-          <p:cNvPr id="18" name="TextBox 17"/>
+                <a:latin typeface="Space Grotesk"/>
+              </a:rPr>
+              <a:t>Reuse the PH playbook: familiar wallet habits cut onboarding friction region-wide.</a:t>
+            </a:r>
+          </a:p>
+        </p:txBody>
+      </p:sp>
+      <p:sp>
+        <p:nvSpPr>
+          <p:cNvPr id="18" name="Freeform 17"/>
+          <p:cNvSpPr/>
+          <p:nvPr/>
+        </p:nvSpPr>
+        <p:spPr>
+          <a:xfrm>
+            <a:off x="7589520" y="1920240"/>
+            <a:ext cx="3401568" cy="4160520"/>
+          </a:xfrm>
+          <a:custGeom>
+            <a:avLst/>
+            <a:gdLst/>
+            <a:ahLst/>
+            <a:cxnLst/>
+            <a:rect l="l" t="t" r="r" b="b"/>
+            <a:pathLst>
+              <a:path w="3401568" h="4160520">
+                <a:moveTo>
+                  <a:pt x="0" y="0"/>
+                </a:moveTo>
+                <a:lnTo>
+                  <a:pt x="3401568" y="0"/>
+                </a:lnTo>
+                <a:lnTo>
+                  <a:pt x="3401568" y="3867912"/>
+                </a:lnTo>
+                <a:lnTo>
+                  <a:pt x="3108960" y="4160520"/>
+                </a:lnTo>
+                <a:lnTo>
+                  <a:pt x="0" y="4160520"/>
+                </a:lnTo>
+                <a:lnTo>
+                  <a:pt x="0" y="0"/>
+                </a:lnTo>
+                <a:close/>
+              </a:path>
+            </a:pathLst>
+          </a:custGeom>
+          <a:solidFill>
+            <a:srgbClr val="1C1B1B"/>
+          </a:solidFill>
+          <a:ln w="19050">
+            <a:solidFill>
+              <a:srgbClr val="FE00FE"/>
+            </a:solidFill>
+          </a:ln>
+          <a:effectLst/>
+        </p:spPr>
+        <p:style>
+          <a:lnRef idx="1">
+            <a:schemeClr val="accent1"/>
+          </a:lnRef>
+          <a:fillRef idx="3">
+            <a:schemeClr val="accent1"/>
+          </a:fillRef>
+          <a:effectRef idx="2">
+            <a:schemeClr val="accent1"/>
+          </a:effectRef>
+          <a:fontRef idx="minor">
+            <a:schemeClr val="lt1"/>
+          </a:fontRef>
+        </p:style>
+        <p:txBody>
+          <a:bodyPr rtlCol="0" anchor="ctr"/>
+          <a:lstStyle/>
+          <a:p>
+            <a:pPr algn="ctr"/>
+          </a:p>
+        </p:txBody>
+      </p:sp>
+      <p:sp>
+        <p:nvSpPr>
+          <p:cNvPr id="19" name="Rectangle 18"/>
+          <p:cNvSpPr/>
+          <p:nvPr/>
+        </p:nvSpPr>
+        <p:spPr>
+          <a:xfrm>
+            <a:off x="7772400" y="2057400"/>
+            <a:ext cx="292608" cy="25400"/>
+          </a:xfrm>
+          <a:prstGeom prst="rect">
+            <a:avLst/>
+          </a:prstGeom>
+          <a:solidFill>
+            <a:srgbClr val="FE00FE"/>
+          </a:solidFill>
+          <a:ln>
+            <a:noFill/>
+          </a:ln>
+          <a:effectLst/>
+        </p:spPr>
+        <p:style>
+          <a:lnRef idx="1">
+            <a:schemeClr val="accent1"/>
+          </a:lnRef>
+          <a:fillRef idx="3">
+            <a:schemeClr val="accent1"/>
+          </a:fillRef>
+          <a:effectRef idx="2">
+            <a:schemeClr val="accent1"/>
+          </a:effectRef>
+          <a:fontRef idx="minor">
+            <a:schemeClr val="lt1"/>
+          </a:fontRef>
+        </p:style>
+        <p:txBody>
+          <a:bodyPr rtlCol="0" anchor="ctr"/>
+          <a:lstStyle/>
+          <a:p>
+            <a:pPr algn="ctr"/>
+          </a:p>
+        </p:txBody>
+      </p:sp>
+      <p:sp>
+        <p:nvSpPr>
+          <p:cNvPr id="20" name="TextBox 19"/>
           <p:cNvSpPr txBox="1"/>
           <p:nvPr/>
         </p:nvSpPr>
         <p:spPr>
           <a:xfrm>
-            <a:off x="548640" y="6446520"/>
-            <a:ext cx="5486400" cy="320040"/>
+            <a:off x="7772400" y="2157984"/>
+            <a:ext cx="3035808" cy="457200"/>
           </a:xfrm>
           <a:prstGeom prst="rect">
             <a:avLst/>
@@ -8236,33 +9455,33 @@
           <a:noFill/>
         </p:spPr>
         <p:txBody>
-          <a:bodyPr wrap="square">
+          <a:bodyPr wrap="square" lIns="0" rIns="0" tIns="0" bIns="0">
             <a:spAutoFit/>
           </a:bodyPr>
           <a:lstStyle/>
           <a:p>
             <a:r>
-              <a:rPr sz="1000" b="0" i="0">
-                <a:solidFill>
-                  <a:srgbClr val="444933"/>
-                </a:solidFill>
-                <a:latin typeface="Consolas"/>
-              </a:rPr>
-              <a:t>xGameFi  //  Stellar commerce infrastructure</a:t>
-            </a:r>
-          </a:p>
-        </p:txBody>
-      </p:sp>
-      <p:sp>
-        <p:nvSpPr>
-          <p:cNvPr id="19" name="TextBox 18"/>
+              <a:rPr sz="1700" b="1" i="0" spc="80">
+                <a:solidFill>
+                  <a:srgbClr val="FE00FE"/>
+                </a:solidFill>
+                <a:latin typeface="JetBrains Mono"/>
+              </a:rPr>
+              <a:t>GLOBAL</a:t>
+            </a:r>
+          </a:p>
+        </p:txBody>
+      </p:sp>
+      <p:sp>
+        <p:nvSpPr>
+          <p:cNvPr id="21" name="TextBox 20"/>
           <p:cNvSpPr txBox="1"/>
           <p:nvPr/>
         </p:nvSpPr>
         <p:spPr>
           <a:xfrm>
-            <a:off x="10607040" y="6446520"/>
-            <a:ext cx="1097280" cy="320040"/>
+            <a:off x="7772400" y="2578608"/>
+            <a:ext cx="3035808" cy="274320"/>
           </a:xfrm>
           <a:prstGeom prst="rect">
             <a:avLst/>
@@ -8270,18 +9489,239 @@
           <a:noFill/>
         </p:spPr>
         <p:txBody>
-          <a:bodyPr wrap="square">
+          <a:bodyPr wrap="square" lIns="0" rIns="0" tIns="0" bIns="0">
             <a:spAutoFit/>
           </a:bodyPr>
           <a:lstStyle/>
           <a:p>
+            <a:r>
+              <a:rPr sz="1050" b="0" i="0" spc="100">
+                <a:solidFill>
+                  <a:srgbClr val="C4C9AC"/>
+                </a:solidFill>
+                <a:latin typeface="JetBrains Mono"/>
+              </a:rPr>
+              <a:t>SCALE VIA ECOSYSTEM</a:t>
+            </a:r>
+          </a:p>
+        </p:txBody>
+      </p:sp>
+      <p:sp>
+        <p:nvSpPr>
+          <p:cNvPr id="22" name="TextBox 21"/>
+          <p:cNvSpPr txBox="1"/>
+          <p:nvPr/>
+        </p:nvSpPr>
+        <p:spPr>
+          <a:xfrm>
+            <a:off x="7772400" y="2999232"/>
+            <a:ext cx="3035808" cy="2926080"/>
+          </a:xfrm>
+          <a:prstGeom prst="rect">
+            <a:avLst/>
+          </a:prstGeom>
+          <a:noFill/>
+        </p:spPr>
+        <p:txBody>
+          <a:bodyPr wrap="square" lIns="0" rIns="0" tIns="0" bIns="0">
+            <a:spAutoFit/>
+          </a:bodyPr>
+          <a:lstStyle/>
+          <a:p>
+            <a:pPr>
+              <a:lnSpc>
+                <a:spcPct val="103000"/>
+              </a:lnSpc>
+              <a:spcAft>
+                <a:spcPts val="600"/>
+              </a:spcAft>
+            </a:pPr>
+            <a:r>
+              <a:rPr sz="1150" b="1" i="0">
+                <a:solidFill>
+                  <a:srgbClr val="FE00FE"/>
+                </a:solidFill>
+                <a:latin typeface="JetBrains Mono"/>
+              </a:rPr>
+              <a:t>▸ </a:t>
+            </a:r>
+            <a:r>
+              <a:rPr sz="1150" b="0" i="0">
+                <a:solidFill>
+                  <a:srgbClr val="E5E2E1"/>
+                </a:solidFill>
+                <a:latin typeface="Space Grotesk"/>
+              </a:rPr>
+              <a:t>Reach Western indie studios via dev Discords, game jams, the SCF network.</a:t>
+            </a:r>
+          </a:p>
+          <a:p>
+            <a:pPr>
+              <a:lnSpc>
+                <a:spcPct val="103000"/>
+              </a:lnSpc>
+              <a:spcAft>
+                <a:spcPts val="600"/>
+              </a:spcAft>
+            </a:pPr>
+            <a:r>
+              <a:rPr sz="1150" b="1" i="0">
+                <a:solidFill>
+                  <a:srgbClr val="FE00FE"/>
+                </a:solidFill>
+                <a:latin typeface="JetBrains Mono"/>
+              </a:rPr>
+              <a:t>▸ </a:t>
+            </a:r>
+            <a:r>
+              <a:rPr sz="1150" b="0" i="0">
+                <a:solidFill>
+                  <a:srgbClr val="E5E2E1"/>
+                </a:solidFill>
+                <a:latin typeface="Space Grotesk"/>
+              </a:rPr>
+              <a:t>Position as “commerce infra for game-item economies on Stellar”; SCF Build Award as GTM fuel.</a:t>
+            </a:r>
+          </a:p>
+          <a:p>
+            <a:pPr>
+              <a:lnSpc>
+                <a:spcPct val="103000"/>
+              </a:lnSpc>
+              <a:spcAft>
+                <a:spcPts val="600"/>
+              </a:spcAft>
+            </a:pPr>
+            <a:r>
+              <a:rPr sz="1150" b="1" i="0">
+                <a:solidFill>
+                  <a:srgbClr val="FE00FE"/>
+                </a:solidFill>
+                <a:latin typeface="JetBrains Mono"/>
+              </a:rPr>
+              <a:t>▸ </a:t>
+            </a:r>
+            <a:r>
+              <a:rPr sz="1150" b="0" i="0">
+                <a:solidFill>
+                  <a:srgbClr val="E5E2E1"/>
+                </a:solidFill>
+                <a:latin typeface="Space Grotesk"/>
+              </a:rPr>
+              <a:t>Multi-stablecoin support (USDC / EURC) removes single-region asset dependency.</a:t>
+            </a:r>
+          </a:p>
+          <a:p>
+            <a:pPr>
+              <a:lnSpc>
+                <a:spcPct val="103000"/>
+              </a:lnSpc>
+              <a:spcAft>
+                <a:spcPts val="600"/>
+              </a:spcAft>
+            </a:pPr>
+            <a:r>
+              <a:rPr sz="1150" b="1" i="0">
+                <a:solidFill>
+                  <a:srgbClr val="FE00FE"/>
+                </a:solidFill>
+                <a:latin typeface="JetBrains Mono"/>
+              </a:rPr>
+              <a:t>▸ </a:t>
+            </a:r>
+            <a:r>
+              <a:rPr sz="1150" b="0" i="0">
+                <a:solidFill>
+                  <a:srgbClr val="E5E2E1"/>
+                </a:solidFill>
+                <a:latin typeface="Space Grotesk"/>
+              </a:rPr>
+              <a:t>Soroban NFT interoperability = network-effect moat: cross-game secondary markets.</a:t>
+            </a:r>
+          </a:p>
+        </p:txBody>
+      </p:sp>
+      <p:sp>
+        <p:nvSpPr>
+          <p:cNvPr id="23" name="TextBox 22"/>
+          <p:cNvSpPr txBox="1"/>
+          <p:nvPr/>
+        </p:nvSpPr>
+        <p:spPr>
+          <a:xfrm>
+            <a:off x="548640" y="6419088"/>
+            <a:ext cx="6400800" cy="320040"/>
+          </a:xfrm>
+          <a:prstGeom prst="rect">
+            <a:avLst/>
+          </a:prstGeom>
+          <a:noFill/>
+        </p:spPr>
+        <p:txBody>
+          <a:bodyPr wrap="square" lIns="0" rIns="0" tIns="0" bIns="0">
+            <a:spAutoFit/>
+          </a:bodyPr>
+          <a:lstStyle/>
+          <a:p>
+            <a:r>
+              <a:rPr sz="1000" b="0" i="1">
+                <a:solidFill>
+                  <a:srgbClr val="8E9379"/>
+                </a:solidFill>
+                <a:latin typeface="JetBrains Mono"/>
+              </a:rPr>
+              <a:t>x</a:t>
+            </a:r>
+            <a:r>
+              <a:rPr sz="1000" b="0" i="1">
+                <a:solidFill>
+                  <a:srgbClr val="ABD600"/>
+                </a:solidFill>
+                <a:latin typeface="JetBrains Mono"/>
+              </a:rPr>
+              <a:t>GameFi</a:t>
+            </a:r>
+            <a:r>
+              <a:rPr sz="1000" b="0" i="0" spc="100">
+                <a:solidFill>
+                  <a:srgbClr val="8E9379"/>
+                </a:solidFill>
+                <a:latin typeface="JetBrains Mono"/>
+              </a:rPr>
+              <a:t>  //  STELLAR COMMERCE INFRASTRUCTURE</a:t>
+            </a:r>
+          </a:p>
+        </p:txBody>
+      </p:sp>
+      <p:sp>
+        <p:nvSpPr>
+          <p:cNvPr id="24" name="TextBox 23"/>
+          <p:cNvSpPr txBox="1"/>
+          <p:nvPr/>
+        </p:nvSpPr>
+        <p:spPr>
+          <a:xfrm>
+            <a:off x="9966960" y="6419088"/>
+            <a:ext cx="1188720" cy="320040"/>
+          </a:xfrm>
+          <a:prstGeom prst="rect">
+            <a:avLst/>
+          </a:prstGeom>
+          <a:noFill/>
+        </p:spPr>
+        <p:txBody>
+          <a:bodyPr wrap="square" lIns="0" rIns="0" tIns="0" bIns="0">
+            <a:spAutoFit/>
+          </a:bodyPr>
+          <a:lstStyle/>
+          <a:p>
             <a:pPr algn="r"/>
             <a:r>
-              <a:rPr sz="1000" b="0" i="0">
-                <a:solidFill>
-                  <a:srgbClr val="444933"/>
-                </a:solidFill>
-                <a:latin typeface="Consolas"/>
+              <a:rPr sz="1000" b="0" i="0" spc="100">
+                <a:solidFill>
+                  <a:srgbClr val="8E9379"/>
+                </a:solidFill>
+                <a:latin typeface="JetBrains Mono"/>
               </a:rPr>
               <a:t>08 / 10</a:t>
             </a:r>
@@ -8316,48 +9756,14 @@
       <p:grpSpPr/>
       <p:sp>
         <p:nvSpPr>
-          <p:cNvPr id="2" name="TextBox 1"/>
-          <p:cNvSpPr txBox="1"/>
-          <p:nvPr/>
-        </p:nvSpPr>
-        <p:spPr>
-          <a:xfrm>
-            <a:off x="548640" y="411480"/>
-            <a:ext cx="7315200" cy="365760"/>
-          </a:xfrm>
-          <a:prstGeom prst="rect">
-            <a:avLst/>
-          </a:prstGeom>
-          <a:noFill/>
-        </p:spPr>
-        <p:txBody>
-          <a:bodyPr wrap="square">
-            <a:spAutoFit/>
-          </a:bodyPr>
-          <a:lstStyle/>
-          <a:p>
-            <a:r>
-              <a:rPr sz="1300" b="1" i="0">
-                <a:solidFill>
-                  <a:srgbClr val="C3F400"/>
-                </a:solidFill>
-                <a:latin typeface="Consolas"/>
-              </a:rPr>
-              <a:t>08 // ROADMAP</a:t>
-            </a:r>
-          </a:p>
-        </p:txBody>
-      </p:sp>
-      <p:sp>
-        <p:nvSpPr>
-          <p:cNvPr id="3" name="Rectangle 2"/>
+          <p:cNvPr id="2" name="Rectangle 1"/>
           <p:cNvSpPr/>
           <p:nvPr/>
         </p:nvSpPr>
         <p:spPr>
           <a:xfrm>
-            <a:off x="548640" y="731520"/>
-            <a:ext cx="320040" cy="27940"/>
+            <a:off x="0" y="0"/>
+            <a:ext cx="12192000" cy="31750"/>
           </a:xfrm>
           <a:prstGeom prst="rect">
             <a:avLst/>
@@ -8368,6 +9774,7 @@
           <a:ln>
             <a:noFill/>
           </a:ln>
+          <a:effectLst/>
         </p:spPr>
         <p:style>
           <a:lnRef idx="1">
@@ -8393,14 +9800,58 @@
       </p:sp>
       <p:sp>
         <p:nvSpPr>
+          <p:cNvPr id="3" name="Rectangle 2"/>
+          <p:cNvSpPr/>
+          <p:nvPr/>
+        </p:nvSpPr>
+        <p:spPr>
+          <a:xfrm>
+            <a:off x="548640" y="31750"/>
+            <a:ext cx="640080" cy="31750"/>
+          </a:xfrm>
+          <a:prstGeom prst="rect">
+            <a:avLst/>
+          </a:prstGeom>
+          <a:solidFill>
+            <a:srgbClr val="ABD600"/>
+          </a:solidFill>
+          <a:ln>
+            <a:noFill/>
+          </a:ln>
+          <a:effectLst/>
+        </p:spPr>
+        <p:style>
+          <a:lnRef idx="1">
+            <a:schemeClr val="accent1"/>
+          </a:lnRef>
+          <a:fillRef idx="3">
+            <a:schemeClr val="accent1"/>
+          </a:fillRef>
+          <a:effectRef idx="2">
+            <a:schemeClr val="accent1"/>
+          </a:effectRef>
+          <a:fontRef idx="minor">
+            <a:schemeClr val="lt1"/>
+          </a:fontRef>
+        </p:style>
+        <p:txBody>
+          <a:bodyPr rtlCol="0" anchor="ctr"/>
+          <a:lstStyle/>
+          <a:p>
+            <a:pPr algn="ctr"/>
+          </a:p>
+        </p:txBody>
+      </p:sp>
+      <p:sp>
+        <p:nvSpPr>
           <p:cNvPr id="4" name="TextBox 3"/>
           <p:cNvSpPr txBox="1"/>
           <p:nvPr/>
         </p:nvSpPr>
         <p:spPr>
           <a:xfrm>
-            <a:off x="548640" y="777240"/>
-            <a:ext cx="10789920" cy="1005840"/>
+            <a:off x="548640" y="457200"/>
+            <a:ext cx="8229600" cy="320040"/>
           </a:xfrm>
           <a:prstGeom prst="rect">
             <a:avLst/>
@@ -8408,19 +9859,19 @@
           <a:noFill/>
         </p:spPr>
         <p:txBody>
-          <a:bodyPr wrap="square">
+          <a:bodyPr wrap="square" lIns="0" rIns="0" tIns="0" bIns="0">
             <a:spAutoFit/>
           </a:bodyPr>
           <a:lstStyle/>
           <a:p>
             <a:r>
-              <a:rPr sz="3600" b="1" i="0">
-                <a:solidFill>
-                  <a:srgbClr val="E5E2E1"/>
-                </a:solidFill>
-                <a:latin typeface="Arial"/>
-              </a:rPr>
-              <a:t>What's next</a:t>
+              <a:rPr sz="1250" b="1" i="0" spc="120">
+                <a:solidFill>
+                  <a:srgbClr val="C3F400"/>
+                </a:solidFill>
+                <a:latin typeface="JetBrains Mono"/>
+              </a:rPr>
+              <a:t>08 // ROADMAP</a:t>
             </a:r>
           </a:p>
         </p:txBody>
@@ -8433,8 +9884,8 @@
         </p:nvSpPr>
         <p:spPr>
           <a:xfrm>
-            <a:off x="548640" y="1645920"/>
-            <a:ext cx="1280160" cy="38100"/>
+            <a:off x="548640" y="749808"/>
+            <a:ext cx="320040" cy="25400"/>
           </a:xfrm>
           <a:prstGeom prst="rect">
             <a:avLst/>
@@ -8445,6 +9896,7 @@
           <a:ln>
             <a:noFill/>
           </a:ln>
+          <a:effectLst/>
         </p:spPr>
         <p:style>
           <a:lnRef idx="1">
@@ -8476,8 +9928,8 @@
         </p:nvSpPr>
         <p:spPr>
           <a:xfrm>
-            <a:off x="548640" y="1828800"/>
-            <a:ext cx="10241280" cy="4206240"/>
+            <a:off x="548640" y="822960"/>
+            <a:ext cx="10607040" cy="914400"/>
           </a:xfrm>
           <a:prstGeom prst="rect">
             <a:avLst/>
@@ -8485,147 +9937,240 @@
           <a:noFill/>
         </p:spPr>
         <p:txBody>
-          <a:bodyPr wrap="square">
+          <a:bodyPr wrap="square" lIns="0" rIns="0" tIns="0" bIns="0">
             <a:spAutoFit/>
           </a:bodyPr>
           <a:lstStyle/>
           <a:p>
+            <a:r>
+              <a:rPr sz="3400" b="1" i="0">
+                <a:solidFill>
+                  <a:srgbClr val="E5E2E1"/>
+                </a:solidFill>
+                <a:latin typeface="Space Grotesk"/>
+              </a:rPr>
+              <a:t>What's next</a:t>
+            </a:r>
+          </a:p>
+        </p:txBody>
+      </p:sp>
+      <p:sp>
+        <p:nvSpPr>
+          <p:cNvPr id="7" name="Rectangle 6"/>
+          <p:cNvSpPr/>
+          <p:nvPr/>
+        </p:nvSpPr>
+        <p:spPr>
+          <a:xfrm>
+            <a:off x="548640" y="1664208"/>
+            <a:ext cx="1280160" cy="38100"/>
+          </a:xfrm>
+          <a:prstGeom prst="rect">
+            <a:avLst/>
+          </a:prstGeom>
+          <a:solidFill>
+            <a:srgbClr val="C3F400"/>
+          </a:solidFill>
+          <a:ln>
+            <a:noFill/>
+          </a:ln>
+          <a:effectLst/>
+        </p:spPr>
+        <p:style>
+          <a:lnRef idx="1">
+            <a:schemeClr val="accent1"/>
+          </a:lnRef>
+          <a:fillRef idx="3">
+            <a:schemeClr val="accent1"/>
+          </a:fillRef>
+          <a:effectRef idx="2">
+            <a:schemeClr val="accent1"/>
+          </a:effectRef>
+          <a:fontRef idx="minor">
+            <a:schemeClr val="lt1"/>
+          </a:fontRef>
+        </p:style>
+        <p:txBody>
+          <a:bodyPr rtlCol="0" anchor="ctr"/>
+          <a:lstStyle/>
+          <a:p>
+            <a:pPr algn="ctr"/>
+          </a:p>
+        </p:txBody>
+      </p:sp>
+      <p:sp>
+        <p:nvSpPr>
+          <p:cNvPr id="8" name="TextBox 7"/>
+          <p:cNvSpPr txBox="1"/>
+          <p:nvPr/>
+        </p:nvSpPr>
+        <p:spPr>
+          <a:xfrm>
+            <a:off x="548640" y="1874519"/>
+            <a:ext cx="10424160" cy="4206240"/>
+          </a:xfrm>
+          <a:prstGeom prst="rect">
+            <a:avLst/>
+          </a:prstGeom>
+          <a:noFill/>
+        </p:spPr>
+        <p:txBody>
+          <a:bodyPr wrap="square" lIns="0" rIns="0" tIns="0" bIns="0">
+            <a:spAutoFit/>
+          </a:bodyPr>
+          <a:lstStyle/>
+          <a:p>
             <a:pPr>
+              <a:lnSpc>
+                <a:spcPct val="105000"/>
+              </a:lnSpc>
               <a:spcAft>
                 <a:spcPts val="800"/>
               </a:spcAft>
             </a:pPr>
             <a:r>
-              <a:rPr sz="1600" b="1" i="0">
+              <a:rPr sz="1550" b="1" i="0">
                 <a:solidFill>
                   <a:srgbClr val="C3F400"/>
                 </a:solidFill>
-                <a:latin typeface="Arial"/>
-              </a:rPr>
-              <a:t>‣  </a:t>
-            </a:r>
-            <a:r>
-              <a:rPr sz="1600" b="0" i="0">
+                <a:latin typeface="JetBrains Mono"/>
+              </a:rPr>
+              <a:t>▸  </a:t>
+            </a:r>
+            <a:r>
+              <a:rPr sz="1550" b="0" i="0">
                 <a:solidFill>
                   <a:srgbClr val="E5E2E1"/>
                 </a:solidFill>
-                <a:latin typeface="Arial"/>
-              </a:rPr>
-              <a:t>SPEC.md v1 is feature-complete: studio dashboard (overview, settings, transactions, P2P), purchase history, P2P sell page, self-contained demo — all shipped, CI-green.</a:t>
+                <a:latin typeface="Space Grotesk"/>
+              </a:rPr>
+              <a:t>SPEC.md v1 feature-complete: studio dashboard (overview, settings, transactions, P2P), purchase history, P2P sell page, self-contained demo — shipped, CI-green.</a:t>
             </a:r>
           </a:p>
           <a:p>
             <a:pPr>
+              <a:lnSpc>
+                <a:spcPct val="105000"/>
+              </a:lnSpc>
               <a:spcAft>
                 <a:spcPts val="800"/>
               </a:spcAft>
             </a:pPr>
             <a:r>
-              <a:rPr sz="1600" b="1" i="0">
+              <a:rPr sz="1550" b="1" i="0">
                 <a:solidFill>
                   <a:srgbClr val="C3F400"/>
                 </a:solidFill>
-                <a:latin typeface="Arial"/>
-              </a:rPr>
-              <a:t>‣  </a:t>
-            </a:r>
-            <a:r>
-              <a:rPr sz="1600" b="0" i="0">
+                <a:latin typeface="JetBrains Mono"/>
+              </a:rPr>
+              <a:t>▸  </a:t>
+            </a:r>
+            <a:r>
+              <a:rPr sz="1550" b="0" i="0">
                 <a:solidFill>
                   <a:srgbClr val="E5E2E1"/>
                 </a:solidFill>
-                <a:latin typeface="Arial"/>
-              </a:rPr>
-              <a:t>Immediate: multi-anchor/stablecoin config + SEP-10 migration — low effort, unblocks moving off the single demo asset.</a:t>
+                <a:latin typeface="Space Grotesk"/>
+              </a:rPr>
+              <a:t>Immediate: multi-anchor / stablecoin config + SEP-10 migration — low effort, unblocks moving off the single demo asset.</a:t>
             </a:r>
           </a:p>
           <a:p>
             <a:pPr>
+              <a:lnSpc>
+                <a:spcPct val="105000"/>
+              </a:lnSpc>
               <a:spcAft>
                 <a:spcPts val="800"/>
               </a:spcAft>
             </a:pPr>
             <a:r>
-              <a:rPr sz="1600" b="1" i="0">
+              <a:rPr sz="1550" b="1" i="0">
                 <a:solidFill>
                   <a:srgbClr val="C3F400"/>
                 </a:solidFill>
-                <a:latin typeface="Arial"/>
-              </a:rPr>
-              <a:t>‣  </a:t>
-            </a:r>
-            <a:r>
-              <a:rPr sz="1600" b="0" i="0">
+                <a:latin typeface="JetBrains Mono"/>
+              </a:rPr>
+              <a:t>▸  </a:t>
+            </a:r>
+            <a:r>
+              <a:rPr sz="1550" b="0" i="0">
                 <a:solidFill>
                   <a:srgbClr val="E5E2E1"/>
                 </a:solidFill>
-                <a:latin typeface="Arial"/>
-              </a:rPr>
-              <a:t>Near-term: passkey/smart-wallet onboarding + SEP-24 anchor checkout — the two highest-leverage conversion unlocks; SCF Build Award candidates.</a:t>
+                <a:latin typeface="Space Grotesk"/>
+              </a:rPr>
+              <a:t>Near-term: passkey / smart-wallet onboarding + SEP-24 anchor checkout — highest-leverage conversion unlocks; SCF Build Award candidates.</a:t>
             </a:r>
           </a:p>
           <a:p>
             <a:pPr>
+              <a:lnSpc>
+                <a:spcPct val="105000"/>
+              </a:lnSpc>
               <a:spcAft>
                 <a:spcPts val="800"/>
               </a:spcAft>
             </a:pPr>
             <a:r>
-              <a:rPr sz="1600" b="1" i="0">
+              <a:rPr sz="1550" b="1" i="0">
                 <a:solidFill>
                   <a:srgbClr val="C3F400"/>
                 </a:solidFill>
-                <a:latin typeface="Arial"/>
-              </a:rPr>
-              <a:t>‣  </a:t>
-            </a:r>
-            <a:r>
-              <a:rPr sz="1600" b="0" i="0">
+                <a:latin typeface="JetBrains Mono"/>
+              </a:rPr>
+              <a:t>▸  </a:t>
+            </a:r>
+            <a:r>
+              <a:rPr sz="1550" b="0" i="0">
                 <a:solidFill>
                   <a:srgbClr val="E5E2E1"/>
                 </a:solidFill>
-                <a:latin typeface="Arial"/>
+                <a:latin typeface="Space Grotesk"/>
               </a:rPr>
               <a:t>Following: Soroban NFT item ownership (opt-in per studio), path-payment multi-asset checkout.</a:t>
             </a:r>
           </a:p>
           <a:p>
             <a:pPr>
+              <a:lnSpc>
+                <a:spcPct val="105000"/>
+              </a:lnSpc>
               <a:spcAft>
                 <a:spcPts val="800"/>
               </a:spcAft>
             </a:pPr>
             <a:r>
-              <a:rPr sz="1600" b="1" i="0">
+              <a:rPr sz="1550" b="1" i="0">
                 <a:solidFill>
                   <a:srgbClr val="C3F400"/>
                 </a:solidFill>
-                <a:latin typeface="Arial"/>
-              </a:rPr>
-              <a:t>‣  </a:t>
-            </a:r>
-            <a:r>
-              <a:rPr sz="1600" b="0" i="0">
+                <a:latin typeface="JetBrains Mono"/>
+              </a:rPr>
+              <a:t>▸  </a:t>
+            </a:r>
+            <a:r>
+              <a:rPr sz="1550" b="0" i="0">
                 <a:solidFill>
                   <a:srgbClr val="E5E2E1"/>
                 </a:solidFill>
-                <a:latin typeface="Arial"/>
-              </a:rPr>
-              <a:t>GTM execution in parallel: Philippines pilot cohort → APAC expansion → global positioning via grants and SDK partnerships.</a:t>
-            </a:r>
-          </a:p>
-        </p:txBody>
-      </p:sp>
-      <p:sp>
-        <p:nvSpPr>
-          <p:cNvPr id="7" name="TextBox 6"/>
+                <a:latin typeface="Space Grotesk"/>
+              </a:rPr>
+              <a:t>GTM in parallel: Philippines pilot cohort → APAC expansion → global positioning via grants and SDK partnerships.</a:t>
+            </a:r>
+          </a:p>
+        </p:txBody>
+      </p:sp>
+      <p:sp>
+        <p:nvSpPr>
+          <p:cNvPr id="9" name="TextBox 8"/>
           <p:cNvSpPr txBox="1"/>
           <p:nvPr/>
         </p:nvSpPr>
         <p:spPr>
           <a:xfrm>
-            <a:off x="548640" y="6446520"/>
-            <a:ext cx="5486400" cy="320040"/>
+            <a:off x="548640" y="6419088"/>
+            <a:ext cx="6400800" cy="320040"/>
           </a:xfrm>
           <a:prstGeom prst="rect">
             <a:avLst/>
@@ -8633,33 +10178,51 @@
           <a:noFill/>
         </p:spPr>
         <p:txBody>
-          <a:bodyPr wrap="square">
+          <a:bodyPr wrap="square" lIns="0" rIns="0" tIns="0" bIns="0">
             <a:spAutoFit/>
           </a:bodyPr>
           <a:lstStyle/>
           <a:p>
             <a:r>
-              <a:rPr sz="1000" b="0" i="0">
-                <a:solidFill>
-                  <a:srgbClr val="444933"/>
-                </a:solidFill>
-                <a:latin typeface="Consolas"/>
-              </a:rPr>
-              <a:t>xGameFi  //  Stellar commerce infrastructure</a:t>
-            </a:r>
-          </a:p>
-        </p:txBody>
-      </p:sp>
-      <p:sp>
-        <p:nvSpPr>
-          <p:cNvPr id="8" name="TextBox 7"/>
+              <a:rPr sz="1000" b="0" i="1">
+                <a:solidFill>
+                  <a:srgbClr val="8E9379"/>
+                </a:solidFill>
+                <a:latin typeface="JetBrains Mono"/>
+              </a:rPr>
+              <a:t>x</a:t>
+            </a:r>
+            <a:r>
+              <a:rPr sz="1000" b="0" i="1">
+                <a:solidFill>
+                  <a:srgbClr val="ABD600"/>
+                </a:solidFill>
+                <a:latin typeface="JetBrains Mono"/>
+              </a:rPr>
+              <a:t>GameFi</a:t>
+            </a:r>
+            <a:r>
+              <a:rPr sz="1000" b="0" i="0" spc="100">
+                <a:solidFill>
+                  <a:srgbClr val="8E9379"/>
+                </a:solidFill>
+                <a:latin typeface="JetBrains Mono"/>
+              </a:rPr>
+              <a:t>  //  STELLAR COMMERCE INFRASTRUCTURE</a:t>
+            </a:r>
+          </a:p>
+        </p:txBody>
+      </p:sp>
+      <p:sp>
+        <p:nvSpPr>
+          <p:cNvPr id="10" name="TextBox 9"/>
           <p:cNvSpPr txBox="1"/>
           <p:nvPr/>
         </p:nvSpPr>
         <p:spPr>
           <a:xfrm>
-            <a:off x="10607040" y="6446520"/>
-            <a:ext cx="1097280" cy="320040"/>
+            <a:off x="9966960" y="6419088"/>
+            <a:ext cx="1188720" cy="320040"/>
           </a:xfrm>
           <a:prstGeom prst="rect">
             <a:avLst/>
@@ -8667,18 +10230,18 @@
           <a:noFill/>
         </p:spPr>
         <p:txBody>
-          <a:bodyPr wrap="square">
+          <a:bodyPr wrap="square" lIns="0" rIns="0" tIns="0" bIns="0">
             <a:spAutoFit/>
           </a:bodyPr>
           <a:lstStyle/>
           <a:p>
             <a:pPr algn="r"/>
             <a:r>
-              <a:rPr sz="1000" b="0" i="0">
-                <a:solidFill>
-                  <a:srgbClr val="444933"/>
-                </a:solidFill>
-                <a:latin typeface="Consolas"/>
+              <a:rPr sz="1000" b="0" i="0" spc="100">
+                <a:solidFill>
+                  <a:srgbClr val="8E9379"/>
+                </a:solidFill>
+                <a:latin typeface="JetBrains Mono"/>
               </a:rPr>
               <a:t>09 / 10</a:t>
             </a:r>
